--- a/courses/research-in-finance/lectures/lecture-03-statistical-analysis/slides.pptx
+++ b/courses/research-in-finance/lectures/lecture-03-statistical-analysis/slides.pptx
@@ -32,6 +32,7 @@
     <p:sldId id="280" r:id="rId26"/>
     <p:sldId id="281" r:id="rId27"/>
     <p:sldId id="282" r:id="rId28"/>
+    <p:sldId id="283" r:id="rId29"/>
   </p:sldIdLst>
   <p:sldSz cx="9144000" cy="5143500" type="screen16x9"/>
   <p:notesSz cx="6858000" cy="9144000"/>
@@ -13344,99 +13345,55 @@
             <a:pPr lvl="0"/>
             <a:r>
               <a:rPr/>
-              <a:t>Angrist, J. D., &amp; Pischke, J.-S. (2009). </a:t>
-            </a:r>
-            <a:r>
-              <a:rPr i="1"/>
-              <a:t>Mostly Harmless Econometrics: An Empiricist’s Companion</a:t>
-            </a:r>
+              <a:t>Angrist and Pischke (2009) — the standard graduate text on identification and causal inference in empirical economics.</a:t>
+            </a:r>
+          </a:p>
+          <a:p>
+            <a:pPr lvl="0"/>
             <a:r>
               <a:rPr/>
-              <a:t>. Princeton University Press. </a:t>
+              <a:t>Thulin (2024) — modern statistical methods worked through in R, free at </a:t>
             </a:r>
             <a:r>
               <a:rPr>
                 <a:hlinkClick r:id="rId2"/>
               </a:rPr>
-              <a:t>https://press.princeton.edu/books/paperback/9780691120355/mostly-harmless-econometrics</a:t>
+              <a:t>https://www.modernstatisticswithr.com/</a:t>
+            </a:r>
+            <a:r>
+              <a:rPr/>
+              <a:t>.</a:t>
             </a:r>
           </a:p>
           <a:p>
             <a:pPr lvl="0"/>
             <a:r>
               <a:rPr/>
-              <a:t>Thulin, M. (2024). </a:t>
-            </a:r>
-            <a:r>
-              <a:rPr i="1"/>
-              <a:t>Modern Statistics with R</a:t>
+              <a:t>Navarro (2015) — accessible introduction to statistics with R, free at </a:t>
+            </a:r>
+            <a:r>
+              <a:rPr>
+                <a:hlinkClick r:id="rId3"/>
+              </a:rPr>
+              <a:t>https://learningstatisticswithr.com/</a:t>
             </a:r>
             <a:r>
               <a:rPr/>
-              <a:t>. Free: </a:t>
-            </a:r>
-            <a:r>
-              <a:rPr>
-                <a:hlinkClick r:id="rId3"/>
-              </a:rPr>
-              <a:t>https://www.modernstatisticswithr.com/</a:t>
+              <a:t>.</a:t>
             </a:r>
           </a:p>
           <a:p>
             <a:pPr lvl="0"/>
             <a:r>
               <a:rPr/>
-              <a:t>Navarro, D. J. (2015). </a:t>
-            </a:r>
-            <a:r>
-              <a:rPr i="1"/>
-              <a:t>Learning Statistics with R</a:t>
-            </a:r>
+              <a:t>Gentle (2020) — applied statistical analysis on financial data, with R examples.</a:t>
+            </a:r>
+          </a:p>
+          <a:p>
+            <a:pPr lvl="0"/>
             <a:r>
               <a:rPr/>
-              <a:t>. Free: </a:t>
-            </a:r>
-            <a:r>
-              <a:rPr>
-                <a:hlinkClick r:id="rId4"/>
-              </a:rPr>
-              <a:t>https://learningstatisticswithr.com/</a:t>
-            </a:r>
-          </a:p>
-          <a:p>
-            <a:pPr lvl="0"/>
-            <a:r>
-              <a:rPr/>
-              <a:t>Gentle, J. E. (2020). </a:t>
-            </a:r>
-            <a:r>
-              <a:rPr i="1"/>
-              <a:t>Statistical Analysis of Financial Data: With Examples in R</a:t>
-            </a:r>
-            <a:r>
-              <a:rPr/>
-              <a:t>. CRC Press.</a:t>
-            </a:r>
-          </a:p>
-          <a:p>
-            <a:pPr lvl="0"/>
-            <a:r>
-              <a:rPr/>
-              <a:t>James, G. et al. (2021). </a:t>
-            </a:r>
-            <a:r>
-              <a:rPr i="1"/>
-              <a:t>An Introduction to Statistical Learning with applications in R</a:t>
-            </a:r>
-            <a:r>
-              <a:rPr/>
-              <a:t> (2nd ed.). Springer. Free PDF: </a:t>
-            </a:r>
-            <a:r>
-              <a:rPr>
-                <a:hlinkClick r:id="rId5"/>
-              </a:rPr>
-              <a:t>https://www.statlearning.com/</a:t>
+              <a:t>James et al. (2021) — covers regression, model selection, resampling, and tree-based methods.</a:t>
             </a:r>
           </a:p>
         </p:txBody>
@@ -13536,6 +13493,194 @@
             <a:r>
               <a:rPr sz="2000"/>
               <a:t> Academic publishing and refereeing — what makes a great empirical paper, the publication process, how to write a referee report.</a:t>
+            </a:r>
+          </a:p>
+        </p:txBody>
+      </p:sp>
+    </p:spTree>
+  </p:cSld>
+</p:sld>
+</file>
+
+<file path=ppt/slides/slide28.xml><?xml version="1.0" encoding="utf-8"?>
+<p:sld xmlns:a="http://schemas.openxmlformats.org/drawingml/2006/main" xmlns:r="http://schemas.openxmlformats.org/officeDocument/2006/relationships" xmlns:p="http://schemas.openxmlformats.org/presentationml/2006/main">
+  <p:cSld>
+    <p:spTree>
+      <p:nvGrpSpPr>
+        <p:cNvPr id="1" name=""/>
+        <p:cNvGrpSpPr/>
+        <p:nvPr/>
+      </p:nvGrpSpPr>
+      <p:grpSpPr>
+        <a:xfrm>
+          <a:off x="0" y="0"/>
+          <a:ext cx="0" cy="0"/>
+          <a:chOff x="0" y="0"/>
+          <a:chExt cx="0" cy="0"/>
+        </a:xfrm>
+      </p:grpSpPr>
+      <p:sp>
+        <p:nvSpPr>
+          <p:cNvPr id="2" name="Title 1"/>
+          <p:cNvSpPr>
+            <a:spLocks noGrp="1"/>
+          </p:cNvSpPr>
+          <p:nvPr>
+            <p:ph type="title"/>
+          </p:nvPr>
+        </p:nvSpPr>
+        <p:spPr/>
+        <p:txBody>
+          <a:bodyPr/>
+          <a:lstStyle/>
+          <a:p>
+            <a:pPr lvl="0" indent="0" marL="0">
+              <a:buNone/>
+            </a:pPr>
+            <a:r>
+              <a:rPr/>
+              <a:t>References</a:t>
+            </a:r>
+          </a:p>
+        </p:txBody>
+      </p:sp>
+      <p:sp>
+        <p:nvSpPr>
+          <p:cNvPr id="3" name="Content Placeholder 2"/>
+          <p:cNvSpPr>
+            <a:spLocks noGrp="1"/>
+          </p:cNvSpPr>
+          <p:nvPr>
+            <p:ph idx="1"/>
+          </p:nvPr>
+        </p:nvSpPr>
+        <p:spPr/>
+        <p:txBody>
+          <a:bodyPr/>
+          <a:lstStyle/>
+          <a:p>
+            <a:pPr lvl="0" indent="0" marL="0">
+              <a:buNone/>
+            </a:pPr>
+            <a:r>
+              <a:rPr/>
+              <a:t>Angrist, Joshua D., and Jörn-Steffen Pischke. 2009. </a:t>
+            </a:r>
+            <a:r>
+              <a:rPr i="1"/>
+              <a:t>Mostly Harmless Econometrics: An Empiricist’s Companion</a:t>
+            </a:r>
+            <a:r>
+              <a:rPr/>
+              <a:t>. Princeton, NJ: Princeton University Press. </a:t>
+            </a:r>
+            <a:r>
+              <a:rPr>
+                <a:hlinkClick r:id="rId2"/>
+              </a:rPr>
+              <a:t>https://press.princeton.edu/books/paperback/9780691120355/mostly-harmless-econometrics</a:t>
+            </a:r>
+            <a:r>
+              <a:rPr/>
+              <a:t>.</a:t>
+            </a:r>
+          </a:p>
+          <a:p>
+            <a:pPr lvl="0" indent="0" marL="0">
+              <a:buNone/>
+            </a:pPr>
+            <a:r>
+              <a:rPr/>
+              <a:t>Gentle, James E. 2020. </a:t>
+            </a:r>
+            <a:r>
+              <a:rPr i="1"/>
+              <a:t>Statistical Analysis of Financial Data: With Examples in R</a:t>
+            </a:r>
+            <a:r>
+              <a:rPr/>
+              <a:t>. Boca Raton, FL: CRC Press.</a:t>
+            </a:r>
+          </a:p>
+          <a:p>
+            <a:pPr lvl="0" indent="0" marL="0">
+              <a:buNone/>
+            </a:pPr>
+            <a:r>
+              <a:rPr/>
+              <a:t>James, Gareth, Daniela Witten, Trevor Hastie, and Robert Tibshirani. 2021. </a:t>
+            </a:r>
+            <a:r>
+              <a:rPr i="1"/>
+              <a:t>An Introduction to Statistical Learning with Applications in R</a:t>
+            </a:r>
+            <a:r>
+              <a:rPr/>
+              <a:t>. 2nd ed. New York, NY: Springer. </a:t>
+            </a:r>
+            <a:r>
+              <a:rPr>
+                <a:hlinkClick r:id="rId3"/>
+              </a:rPr>
+              <a:t>https://www.statlearning.com/</a:t>
+            </a:r>
+            <a:r>
+              <a:rPr/>
+              <a:t>.</a:t>
+            </a:r>
+          </a:p>
+          <a:p>
+            <a:pPr lvl="0" indent="0" marL="0">
+              <a:buNone/>
+            </a:pPr>
+            <a:r>
+              <a:rPr/>
+              <a:t>Navarro, Daniel J. 2015. </a:t>
+            </a:r>
+            <a:r>
+              <a:rPr i="1"/>
+              <a:t>Learning Statistics with R</a:t>
+            </a:r>
+            <a:r>
+              <a:rPr/>
+              <a:t>. </a:t>
+            </a:r>
+            <a:r>
+              <a:rPr>
+                <a:hlinkClick r:id="rId4"/>
+              </a:rPr>
+              <a:t>https://learningstatisticswithr.com/</a:t>
+            </a:r>
+            <a:r>
+              <a:rPr/>
+              <a:t>.</a:t>
+            </a:r>
+          </a:p>
+          <a:p>
+            <a:pPr lvl="0" indent="0" marL="0">
+              <a:buNone/>
+            </a:pPr>
+            <a:r>
+              <a:rPr/>
+              <a:t>Thulin, Måns. 2024. </a:t>
+            </a:r>
+            <a:r>
+              <a:rPr i="1"/>
+              <a:t>Modern Statistics with R</a:t>
+            </a:r>
+            <a:r>
+              <a:rPr/>
+              <a:t>. </a:t>
+            </a:r>
+            <a:r>
+              <a:rPr>
+                <a:hlinkClick r:id="rId5"/>
+              </a:rPr>
+              <a:t>https://www.modernstatisticswithr.com/</a:t>
+            </a:r>
+            <a:r>
+              <a:rPr/>
+              <a:t>.</a:t>
             </a:r>
           </a:p>
         </p:txBody>

--- a/courses/research-in-finance/lectures/lecture-03-statistical-analysis/slides.pptx
+++ b/courses/research-in-finance/lectures/lecture-03-statistical-analysis/slides.pptx
@@ -4,37 +4,7 @@
   <p:sldMasterIdLst>
     <p:sldMasterId id="2147483648" r:id="rId1"/>
   </p:sldMasterIdLst>
-  <p:sldIdLst>
-    <p:sldId id="256" r:id="rId2"/>
-    <p:sldId id="257" r:id="rId3"/>
-    <p:sldId id="258" r:id="rId4"/>
-    <p:sldId id="259" r:id="rId5"/>
-    <p:sldId id="260" r:id="rId6"/>
-    <p:sldId id="261" r:id="rId7"/>
-    <p:sldId id="262" r:id="rId8"/>
-    <p:sldId id="263" r:id="rId9"/>
-    <p:sldId id="264" r:id="rId10"/>
-    <p:sldId id="265" r:id="rId11"/>
-    <p:sldId id="266" r:id="rId12"/>
-    <p:sldId id="267" r:id="rId13"/>
-    <p:sldId id="268" r:id="rId14"/>
-    <p:sldId id="269" r:id="rId15"/>
-    <p:sldId id="270" r:id="rId16"/>
-    <p:sldId id="271" r:id="rId17"/>
-    <p:sldId id="272" r:id="rId18"/>
-    <p:sldId id="273" r:id="rId19"/>
-    <p:sldId id="274" r:id="rId20"/>
-    <p:sldId id="275" r:id="rId21"/>
-    <p:sldId id="276" r:id="rId22"/>
-    <p:sldId id="277" r:id="rId23"/>
-    <p:sldId id="278" r:id="rId24"/>
-    <p:sldId id="279" r:id="rId25"/>
-    <p:sldId id="280" r:id="rId26"/>
-    <p:sldId id="281" r:id="rId27"/>
-    <p:sldId id="282" r:id="rId28"/>
-    <p:sldId id="283" r:id="rId29"/>
-  </p:sldIdLst>
-  <p:sldSz cx="9144000" cy="5143500" type="screen16x9"/>
+  <p:sldSz cx="12191695" cy="6858000" type="screen4x3"/>
   <p:notesSz cx="6858000" cy="9144000"/>
   <p:defaultTextStyle>
     <a:defPPr>
@@ -131,22 +101,6 @@
       </a:defRPr>
     </a:lvl9pPr>
   </p:defaultTextStyle>
-  <p:extLst>
-    <p:ext uri="{EFAFB233-063F-42B5-8137-9DF3F51BA10A}">
-      <p15:sldGuideLst xmlns:p15="http://schemas.microsoft.com/office/powerpoint/2012/main">
-        <p15:guide id="1" orient="horz" pos="1620" userDrawn="1">
-          <p15:clr>
-            <a:srgbClr val="A4A3A4"/>
-          </p15:clr>
-        </p15:guide>
-        <p15:guide id="2" pos="2880" userDrawn="1">
-          <p15:clr>
-            <a:srgbClr val="A4A3A4"/>
-          </p15:clr>
-        </p15:guide>
-      </p15:sldGuideLst>
-    </p:ext>
-  </p:extLst>
 </p:presentation>
 </file>
 
@@ -179,8 +133,8 @@
         </p:nvSpPr>
         <p:spPr>
           <a:xfrm>
-            <a:off x="685800" y="1597819"/>
-            <a:ext cx="7772400" cy="1102519"/>
+            <a:off x="685800" y="2130425"/>
+            <a:ext cx="7772400" cy="1470025"/>
           </a:xfrm>
         </p:spPr>
         <p:txBody>
@@ -188,9 +142,14 @@
           <a:lstStyle/>
           <a:p>
             <a:r>
-              <a:rPr lang="en-US"/>
+              <a:rPr lang="en-US" smtClean="0">
+                <a:solidFill>
+                  <a:srgbClr val="111111"/>
+                </a:solidFill>
+              </a:rPr>
               <a:t>Click to edit Master title style</a:t>
             </a:r>
+            <a:endParaRPr lang="en-US"/>
           </a:p>
         </p:txBody>
       </p:sp>
@@ -206,8 +165,8 @@
         </p:nvSpPr>
         <p:spPr>
           <a:xfrm>
-            <a:off x="1371600" y="2914650"/>
-            <a:ext cx="6400800" cy="1314450"/>
+            <a:off x="1371600" y="3886200"/>
+            <a:ext cx="6400800" cy="1752600"/>
           </a:xfrm>
         </p:spPr>
         <p:txBody>
@@ -217,98 +176,85 @@
               <a:buNone/>
               <a:defRPr>
                 <a:solidFill>
-                  <a:schemeClr val="tx1">
-                    <a:tint val="75000"/>
-                  </a:schemeClr>
+                  <a:srgbClr val="111111"/>
                 </a:solidFill>
               </a:defRPr>
             </a:lvl1pPr>
-            <a:lvl2pPr marL="342900" indent="0" algn="ctr">
+            <a:lvl2pPr marL="457200" indent="0" algn="ctr">
               <a:buNone/>
               <a:defRPr>
                 <a:solidFill>
-                  <a:schemeClr val="tx1">
-                    <a:tint val="75000"/>
-                  </a:schemeClr>
+                  <a:srgbClr val="111111"/>
                 </a:solidFill>
               </a:defRPr>
             </a:lvl2pPr>
-            <a:lvl3pPr marL="685800" indent="0" algn="ctr">
+            <a:lvl3pPr marL="914400" indent="0" algn="ctr">
               <a:buNone/>
               <a:defRPr>
                 <a:solidFill>
-                  <a:schemeClr val="tx1">
-                    <a:tint val="75000"/>
-                  </a:schemeClr>
+                  <a:srgbClr val="111111"/>
                 </a:solidFill>
               </a:defRPr>
             </a:lvl3pPr>
-            <a:lvl4pPr marL="1028700" indent="0" algn="ctr">
+            <a:lvl4pPr marL="1371600" indent="0" algn="ctr">
               <a:buNone/>
               <a:defRPr>
                 <a:solidFill>
-                  <a:schemeClr val="tx1">
-                    <a:tint val="75000"/>
-                  </a:schemeClr>
+                  <a:srgbClr val="111111"/>
                 </a:solidFill>
               </a:defRPr>
             </a:lvl4pPr>
-            <a:lvl5pPr marL="1371600" indent="0" algn="ctr">
+            <a:lvl5pPr marL="1828800" indent="0" algn="ctr">
               <a:buNone/>
               <a:defRPr>
                 <a:solidFill>
-                  <a:schemeClr val="tx1">
-                    <a:tint val="75000"/>
-                  </a:schemeClr>
+                  <a:srgbClr val="111111"/>
                 </a:solidFill>
               </a:defRPr>
             </a:lvl5pPr>
-            <a:lvl6pPr marL="1714500" indent="0" algn="ctr">
+            <a:lvl6pPr marL="2286000" indent="0" algn="ctr">
               <a:buNone/>
               <a:defRPr>
                 <a:solidFill>
-                  <a:schemeClr val="tx1">
-                    <a:tint val="75000"/>
-                  </a:schemeClr>
+                  <a:srgbClr val="111111"/>
                 </a:solidFill>
               </a:defRPr>
             </a:lvl6pPr>
-            <a:lvl7pPr marL="2057400" indent="0" algn="ctr">
+            <a:lvl7pPr marL="2743200" indent="0" algn="ctr">
               <a:buNone/>
               <a:defRPr>
                 <a:solidFill>
-                  <a:schemeClr val="tx1">
-                    <a:tint val="75000"/>
-                  </a:schemeClr>
+                  <a:srgbClr val="111111"/>
                 </a:solidFill>
               </a:defRPr>
             </a:lvl7pPr>
-            <a:lvl8pPr marL="2400300" indent="0" algn="ctr">
+            <a:lvl8pPr marL="3200400" indent="0" algn="ctr">
               <a:buNone/>
               <a:defRPr>
                 <a:solidFill>
-                  <a:schemeClr val="tx1">
-                    <a:tint val="75000"/>
-                  </a:schemeClr>
+                  <a:srgbClr val="111111"/>
                 </a:solidFill>
               </a:defRPr>
             </a:lvl8pPr>
-            <a:lvl9pPr marL="2743200" indent="0" algn="ctr">
+            <a:lvl9pPr marL="3657600" indent="0" algn="ctr">
               <a:buNone/>
               <a:defRPr>
                 <a:solidFill>
-                  <a:schemeClr val="tx1">
-                    <a:tint val="75000"/>
-                  </a:schemeClr>
+                  <a:srgbClr val="111111"/>
                 </a:solidFill>
               </a:defRPr>
             </a:lvl9pPr>
           </a:lstStyle>
           <a:p>
             <a:r>
-              <a:rPr lang="en-US"/>
+              <a:rPr lang="en-US" smtClean="0">
+                <a:solidFill>
+                  <a:srgbClr val="111111"/>
+                </a:solidFill>
+              </a:rPr>
               <a:t>Click to edit Master subtitle style</a:t>
             </a:r>
+            <a:endParaRPr lang="en-US"/>
           </a:p>
         </p:txBody>
       </p:sp>
@@ -327,9 +273,13 @@
           <a:bodyPr/>
           <a:lstStyle/>
           <a:p>
-            <a:fld id="{241EB5C9-1307-BA42-ABA2-0BC069CD8E7F}" type="datetimeFigureOut">
-              <a:rPr lang="en-US" smtClean="0"/>
-              <a:t>1/2/22</a:t>
+            <a:fld id="{5BCAD085-E8A6-8845-BD4E-CB4CCA059FC4}" type="datetimeFigureOut">
+              <a:rPr lang="en-US" smtClean="0">
+                <a:solidFill>
+                  <a:srgbClr val="111111"/>
+                </a:solidFill>
+              </a:rPr>
+              <a:t>1/27/13</a:t>
             </a:fld>
             <a:endParaRPr lang="en-US"/>
           </a:p>
@@ -369,8 +319,12 @@
           <a:bodyPr/>
           <a:lstStyle/>
           <a:p>
-            <a:fld id="{C5EF2332-01BF-834F-8236-50238282D533}" type="slidenum">
-              <a:rPr lang="en-US" smtClean="0"/>
+            <a:fld id="{C1FF6DA9-008F-8B48-92A6-B652298478BF}" type="slidenum">
+              <a:rPr lang="en-US" smtClean="0">
+                <a:solidFill>
+                  <a:srgbClr val="111111"/>
+                </a:solidFill>
+              </a:rPr>
               <a:t>‹#›</a:t>
             </a:fld>
             <a:endParaRPr lang="en-US"/>
@@ -380,7 +334,7 @@
     </p:spTree>
     <p:extLst>
       <p:ext uri="{BB962C8B-B14F-4D97-AF65-F5344CB8AC3E}">
-        <p14:creationId xmlns:p14="http://schemas.microsoft.com/office/powerpoint/2010/main" val="1444357513"/>
+        <p14:creationId xmlns:p14="http://schemas.microsoft.com/office/powerpoint/2010/main" val="3168075583"/>
       </p:ext>
     </p:extLst>
   </p:cSld>
@@ -423,9 +377,14 @@
           <a:lstStyle/>
           <a:p>
             <a:r>
-              <a:rPr lang="en-US"/>
+              <a:rPr lang="en-US" smtClean="0">
+                <a:solidFill>
+                  <a:srgbClr val="111111"/>
+                </a:solidFill>
+              </a:rPr>
               <a:t>Click to edit Master title style</a:t>
             </a:r>
+            <a:endParaRPr lang="en-US"/>
           </a:p>
         </p:txBody>
       </p:sp>
@@ -446,37 +405,58 @@
           <a:p>
             <a:pPr lvl="0"/>
             <a:r>
-              <a:rPr lang="en-US"/>
+              <a:rPr lang="en-US" smtClean="0">
+                <a:solidFill>
+                  <a:srgbClr val="111111"/>
+                </a:solidFill>
+              </a:rPr>
               <a:t>Click to edit Master text styles</a:t>
             </a:r>
           </a:p>
           <a:p>
             <a:pPr lvl="1"/>
             <a:r>
-              <a:rPr lang="en-US"/>
+              <a:rPr lang="en-US" smtClean="0">
+                <a:solidFill>
+                  <a:srgbClr val="111111"/>
+                </a:solidFill>
+              </a:rPr>
               <a:t>Second level</a:t>
             </a:r>
           </a:p>
           <a:p>
             <a:pPr lvl="2"/>
             <a:r>
-              <a:rPr lang="en-US"/>
+              <a:rPr lang="en-US" smtClean="0">
+                <a:solidFill>
+                  <a:srgbClr val="111111"/>
+                </a:solidFill>
+              </a:rPr>
               <a:t>Third level</a:t>
             </a:r>
           </a:p>
           <a:p>
             <a:pPr lvl="3"/>
             <a:r>
-              <a:rPr lang="en-US"/>
+              <a:rPr lang="en-US" smtClean="0">
+                <a:solidFill>
+                  <a:srgbClr val="111111"/>
+                </a:solidFill>
+              </a:rPr>
               <a:t>Fourth level</a:t>
             </a:r>
           </a:p>
           <a:p>
             <a:pPr lvl="4"/>
             <a:r>
-              <a:rPr lang="en-US"/>
+              <a:rPr lang="en-US" smtClean="0">
+                <a:solidFill>
+                  <a:srgbClr val="111111"/>
+                </a:solidFill>
+              </a:rPr>
               <a:t>Fifth level</a:t>
             </a:r>
+            <a:endParaRPr lang="en-US"/>
           </a:p>
         </p:txBody>
       </p:sp>
@@ -495,9 +475,13 @@
           <a:bodyPr/>
           <a:lstStyle/>
           <a:p>
-            <a:fld id="{241EB5C9-1307-BA42-ABA2-0BC069CD8E7F}" type="datetimeFigureOut">
-              <a:rPr lang="en-US" smtClean="0"/>
-              <a:t>1/2/22</a:t>
+            <a:fld id="{5BCAD085-E8A6-8845-BD4E-CB4CCA059FC4}" type="datetimeFigureOut">
+              <a:rPr lang="en-US" smtClean="0">
+                <a:solidFill>
+                  <a:srgbClr val="111111"/>
+                </a:solidFill>
+              </a:rPr>
+              <a:t>1/27/13</a:t>
             </a:fld>
             <a:endParaRPr lang="en-US"/>
           </a:p>
@@ -537,8 +521,12 @@
           <a:bodyPr/>
           <a:lstStyle/>
           <a:p>
-            <a:fld id="{C5EF2332-01BF-834F-8236-50238282D533}" type="slidenum">
-              <a:rPr lang="en-US" smtClean="0"/>
+            <a:fld id="{C1FF6DA9-008F-8B48-92A6-B652298478BF}" type="slidenum">
+              <a:rPr lang="en-US" smtClean="0">
+                <a:solidFill>
+                  <a:srgbClr val="111111"/>
+                </a:solidFill>
+              </a:rPr>
               <a:t>‹#›</a:t>
             </a:fld>
             <a:endParaRPr lang="en-US"/>
@@ -548,7 +536,7 @@
     </p:spTree>
     <p:extLst>
       <p:ext uri="{BB962C8B-B14F-4D97-AF65-F5344CB8AC3E}">
-        <p14:creationId xmlns:p14="http://schemas.microsoft.com/office/powerpoint/2010/main" val="313914798"/>
+        <p14:creationId xmlns:p14="http://schemas.microsoft.com/office/powerpoint/2010/main" val="2910927964"/>
       </p:ext>
     </p:extLst>
   </p:cSld>
@@ -587,8 +575,8 @@
         </p:nvSpPr>
         <p:spPr>
           <a:xfrm>
-            <a:off x="6629400" y="205979"/>
-            <a:ext cx="2057400" cy="4388644"/>
+            <a:off x="6629400" y="274638"/>
+            <a:ext cx="2057400" cy="5851525"/>
           </a:xfrm>
         </p:spPr>
         <p:txBody>
@@ -596,9 +584,14 @@
           <a:lstStyle/>
           <a:p>
             <a:r>
-              <a:rPr lang="en-US"/>
+              <a:rPr lang="en-US" smtClean="0">
+                <a:solidFill>
+                  <a:srgbClr val="111111"/>
+                </a:solidFill>
+              </a:rPr>
               <a:t>Click to edit Master title style</a:t>
             </a:r>
+            <a:endParaRPr lang="en-US"/>
           </a:p>
         </p:txBody>
       </p:sp>
@@ -614,8 +607,8 @@
         </p:nvSpPr>
         <p:spPr>
           <a:xfrm>
-            <a:off x="457200" y="205979"/>
-            <a:ext cx="6019800" cy="4388644"/>
+            <a:off x="457200" y="274638"/>
+            <a:ext cx="6019800" cy="5851525"/>
           </a:xfrm>
         </p:spPr>
         <p:txBody>
@@ -624,37 +617,58 @@
           <a:p>
             <a:pPr lvl="0"/>
             <a:r>
-              <a:rPr lang="en-US"/>
+              <a:rPr lang="en-US" smtClean="0">
+                <a:solidFill>
+                  <a:srgbClr val="111111"/>
+                </a:solidFill>
+              </a:rPr>
               <a:t>Click to edit Master text styles</a:t>
             </a:r>
           </a:p>
           <a:p>
             <a:pPr lvl="1"/>
             <a:r>
-              <a:rPr lang="en-US"/>
+              <a:rPr lang="en-US" smtClean="0">
+                <a:solidFill>
+                  <a:srgbClr val="111111"/>
+                </a:solidFill>
+              </a:rPr>
               <a:t>Second level</a:t>
             </a:r>
           </a:p>
           <a:p>
             <a:pPr lvl="2"/>
             <a:r>
-              <a:rPr lang="en-US"/>
+              <a:rPr lang="en-US" smtClean="0">
+                <a:solidFill>
+                  <a:srgbClr val="111111"/>
+                </a:solidFill>
+              </a:rPr>
               <a:t>Third level</a:t>
             </a:r>
           </a:p>
           <a:p>
             <a:pPr lvl="3"/>
             <a:r>
-              <a:rPr lang="en-US"/>
+              <a:rPr lang="en-US" smtClean="0">
+                <a:solidFill>
+                  <a:srgbClr val="111111"/>
+                </a:solidFill>
+              </a:rPr>
               <a:t>Fourth level</a:t>
             </a:r>
           </a:p>
           <a:p>
             <a:pPr lvl="4"/>
             <a:r>
-              <a:rPr lang="en-US"/>
+              <a:rPr lang="en-US" smtClean="0">
+                <a:solidFill>
+                  <a:srgbClr val="111111"/>
+                </a:solidFill>
+              </a:rPr>
               <a:t>Fifth level</a:t>
             </a:r>
+            <a:endParaRPr lang="en-US"/>
           </a:p>
         </p:txBody>
       </p:sp>
@@ -673,9 +687,13 @@
           <a:bodyPr/>
           <a:lstStyle/>
           <a:p>
-            <a:fld id="{241EB5C9-1307-BA42-ABA2-0BC069CD8E7F}" type="datetimeFigureOut">
-              <a:rPr lang="en-US" smtClean="0"/>
-              <a:t>1/2/22</a:t>
+            <a:fld id="{5BCAD085-E8A6-8845-BD4E-CB4CCA059FC4}" type="datetimeFigureOut">
+              <a:rPr lang="en-US" smtClean="0">
+                <a:solidFill>
+                  <a:srgbClr val="111111"/>
+                </a:solidFill>
+              </a:rPr>
+              <a:t>1/27/13</a:t>
             </a:fld>
             <a:endParaRPr lang="en-US"/>
           </a:p>
@@ -715,8 +733,12 @@
           <a:bodyPr/>
           <a:lstStyle/>
           <a:p>
-            <a:fld id="{C5EF2332-01BF-834F-8236-50238282D533}" type="slidenum">
-              <a:rPr lang="en-US" smtClean="0"/>
+            <a:fld id="{C1FF6DA9-008F-8B48-92A6-B652298478BF}" type="slidenum">
+              <a:rPr lang="en-US" smtClean="0">
+                <a:solidFill>
+                  <a:srgbClr val="111111"/>
+                </a:solidFill>
+              </a:rPr>
               <a:t>‹#›</a:t>
             </a:fld>
             <a:endParaRPr lang="en-US"/>
@@ -726,7 +748,7 @@
     </p:spTree>
     <p:extLst>
       <p:ext uri="{BB962C8B-B14F-4D97-AF65-F5344CB8AC3E}">
-        <p14:creationId xmlns:p14="http://schemas.microsoft.com/office/powerpoint/2010/main" val="2581529045"/>
+        <p14:creationId xmlns:p14="http://schemas.microsoft.com/office/powerpoint/2010/main" val="3612223792"/>
       </p:ext>
     </p:extLst>
   </p:cSld>
@@ -769,9 +791,14 @@
           <a:lstStyle/>
           <a:p>
             <a:r>
-              <a:rPr lang="en-US"/>
+              <a:rPr lang="en-US" smtClean="0">
+                <a:solidFill>
+                  <a:srgbClr val="111111"/>
+                </a:solidFill>
+              </a:rPr>
               <a:t>Click to edit Master title style</a:t>
             </a:r>
+            <a:endParaRPr lang="en-US"/>
           </a:p>
         </p:txBody>
       </p:sp>
@@ -792,37 +819,58 @@
           <a:p>
             <a:pPr lvl="0"/>
             <a:r>
-              <a:rPr lang="en-US"/>
+              <a:rPr lang="en-US" smtClean="0">
+                <a:solidFill>
+                  <a:srgbClr val="111111"/>
+                </a:solidFill>
+              </a:rPr>
               <a:t>Click to edit Master text styles</a:t>
             </a:r>
           </a:p>
           <a:p>
             <a:pPr lvl="1"/>
             <a:r>
-              <a:rPr lang="en-US"/>
+              <a:rPr lang="en-US" smtClean="0">
+                <a:solidFill>
+                  <a:srgbClr val="111111"/>
+                </a:solidFill>
+              </a:rPr>
               <a:t>Second level</a:t>
             </a:r>
           </a:p>
           <a:p>
             <a:pPr lvl="2"/>
             <a:r>
-              <a:rPr lang="en-US"/>
+              <a:rPr lang="en-US" smtClean="0">
+                <a:solidFill>
+                  <a:srgbClr val="111111"/>
+                </a:solidFill>
+              </a:rPr>
               <a:t>Third level</a:t>
             </a:r>
           </a:p>
           <a:p>
             <a:pPr lvl="3"/>
             <a:r>
-              <a:rPr lang="en-US"/>
+              <a:rPr lang="en-US" smtClean="0">
+                <a:solidFill>
+                  <a:srgbClr val="111111"/>
+                </a:solidFill>
+              </a:rPr>
               <a:t>Fourth level</a:t>
             </a:r>
           </a:p>
           <a:p>
             <a:pPr lvl="4"/>
             <a:r>
-              <a:rPr lang="en-US"/>
+              <a:rPr lang="en-US" smtClean="0">
+                <a:solidFill>
+                  <a:srgbClr val="111111"/>
+                </a:solidFill>
+              </a:rPr>
               <a:t>Fifth level</a:t>
             </a:r>
+            <a:endParaRPr lang="en-US"/>
           </a:p>
         </p:txBody>
       </p:sp>
@@ -841,9 +889,13 @@
           <a:bodyPr/>
           <a:lstStyle/>
           <a:p>
-            <a:fld id="{241EB5C9-1307-BA42-ABA2-0BC069CD8E7F}" type="datetimeFigureOut">
-              <a:rPr lang="en-US" smtClean="0"/>
-              <a:t>1/2/22</a:t>
+            <a:fld id="{5BCAD085-E8A6-8845-BD4E-CB4CCA059FC4}" type="datetimeFigureOut">
+              <a:rPr lang="en-US" smtClean="0">
+                <a:solidFill>
+                  <a:srgbClr val="111111"/>
+                </a:solidFill>
+              </a:rPr>
+              <a:t>1/27/13</a:t>
             </a:fld>
             <a:endParaRPr lang="en-US"/>
           </a:p>
@@ -883,8 +935,12 @@
           <a:bodyPr/>
           <a:lstStyle/>
           <a:p>
-            <a:fld id="{C5EF2332-01BF-834F-8236-50238282D533}" type="slidenum">
-              <a:rPr lang="en-US" smtClean="0"/>
+            <a:fld id="{C1FF6DA9-008F-8B48-92A6-B652298478BF}" type="slidenum">
+              <a:rPr lang="en-US" smtClean="0">
+                <a:solidFill>
+                  <a:srgbClr val="111111"/>
+                </a:solidFill>
+              </a:rPr>
               <a:t>‹#›</a:t>
             </a:fld>
             <a:endParaRPr lang="en-US"/>
@@ -894,7 +950,7 @@
     </p:spTree>
     <p:extLst>
       <p:ext uri="{BB962C8B-B14F-4D97-AF65-F5344CB8AC3E}">
-        <p14:creationId xmlns:p14="http://schemas.microsoft.com/office/powerpoint/2010/main" val="338346009"/>
+        <p14:creationId xmlns:p14="http://schemas.microsoft.com/office/powerpoint/2010/main" val="2614314258"/>
       </p:ext>
     </p:extLst>
   </p:cSld>
@@ -933,22 +989,31 @@
         </p:nvSpPr>
         <p:spPr>
           <a:xfrm>
-            <a:off x="722313" y="3305176"/>
-            <a:ext cx="7772400" cy="1021556"/>
+            <a:off x="722313" y="4406900"/>
+            <a:ext cx="7772400" cy="1362075"/>
           </a:xfrm>
         </p:spPr>
         <p:txBody>
           <a:bodyPr anchor="t"/>
           <a:lstStyle>
             <a:lvl1pPr algn="l">
-              <a:defRPr sz="3000" b="1" cap="all"/>
+              <a:defRPr sz="4000" b="1" cap="all">
+                <a:solidFill>
+                  <a:srgbClr val="111111"/>
+                </a:solidFill>
+              </a:defRPr>
             </a:lvl1pPr>
           </a:lstStyle>
           <a:p>
             <a:r>
-              <a:rPr lang="en-US"/>
+              <a:rPr lang="en-US" smtClean="0">
+                <a:solidFill>
+                  <a:srgbClr val="111111"/>
+                </a:solidFill>
+              </a:rPr>
               <a:t>Click to edit Master title style</a:t>
             </a:r>
+            <a:endParaRPr lang="en-US"/>
           </a:p>
         </p:txBody>
       </p:sp>
@@ -964,8 +1029,8 @@
         </p:nvSpPr>
         <p:spPr>
           <a:xfrm>
-            <a:off x="722313" y="2180035"/>
-            <a:ext cx="7772400" cy="1125140"/>
+            <a:off x="722313" y="2906713"/>
+            <a:ext cx="7772400" cy="1500187"/>
           </a:xfrm>
         </p:spPr>
         <p:txBody>
@@ -973,91 +1038,73 @@
           <a:lstStyle>
             <a:lvl1pPr marL="0" indent="0">
               <a:buNone/>
-              <a:defRPr sz="1500">
-                <a:solidFill>
-                  <a:schemeClr val="tx1">
-                    <a:tint val="75000"/>
-                  </a:schemeClr>
+              <a:defRPr sz="2000">
+                <a:solidFill>
+                  <a:srgbClr val="111111"/>
                 </a:solidFill>
               </a:defRPr>
             </a:lvl1pPr>
-            <a:lvl2pPr marL="342900" indent="0">
+            <a:lvl2pPr marL="457200" indent="0">
               <a:buNone/>
-              <a:defRPr sz="1350">
-                <a:solidFill>
-                  <a:schemeClr val="tx1">
-                    <a:tint val="75000"/>
-                  </a:schemeClr>
+              <a:defRPr sz="1800">
+                <a:solidFill>
+                  <a:srgbClr val="111111"/>
                 </a:solidFill>
               </a:defRPr>
             </a:lvl2pPr>
-            <a:lvl3pPr marL="685800" indent="0">
+            <a:lvl3pPr marL="914400" indent="0">
               <a:buNone/>
-              <a:defRPr sz="1200">
-                <a:solidFill>
-                  <a:schemeClr val="tx1">
-                    <a:tint val="75000"/>
-                  </a:schemeClr>
+              <a:defRPr sz="1600">
+                <a:solidFill>
+                  <a:srgbClr val="111111"/>
                 </a:solidFill>
               </a:defRPr>
             </a:lvl3pPr>
-            <a:lvl4pPr marL="1028700" indent="0">
+            <a:lvl4pPr marL="1371600" indent="0">
               <a:buNone/>
-              <a:defRPr sz="1050">
-                <a:solidFill>
-                  <a:schemeClr val="tx1">
-                    <a:tint val="75000"/>
-                  </a:schemeClr>
+              <a:defRPr sz="1400">
+                <a:solidFill>
+                  <a:srgbClr val="111111"/>
                 </a:solidFill>
               </a:defRPr>
             </a:lvl4pPr>
-            <a:lvl5pPr marL="1371600" indent="0">
+            <a:lvl5pPr marL="1828800" indent="0">
               <a:buNone/>
-              <a:defRPr sz="1050">
-                <a:solidFill>
-                  <a:schemeClr val="tx1">
-                    <a:tint val="75000"/>
-                  </a:schemeClr>
+              <a:defRPr sz="1400">
+                <a:solidFill>
+                  <a:srgbClr val="111111"/>
                 </a:solidFill>
               </a:defRPr>
             </a:lvl5pPr>
-            <a:lvl6pPr marL="1714500" indent="0">
+            <a:lvl6pPr marL="2286000" indent="0">
               <a:buNone/>
-              <a:defRPr sz="1050">
-                <a:solidFill>
-                  <a:schemeClr val="tx1">
-                    <a:tint val="75000"/>
-                  </a:schemeClr>
+              <a:defRPr sz="1400">
+                <a:solidFill>
+                  <a:srgbClr val="111111"/>
                 </a:solidFill>
               </a:defRPr>
             </a:lvl6pPr>
-            <a:lvl7pPr marL="2057400" indent="0">
+            <a:lvl7pPr marL="2743200" indent="0">
               <a:buNone/>
-              <a:defRPr sz="1050">
-                <a:solidFill>
-                  <a:schemeClr val="tx1">
-                    <a:tint val="75000"/>
-                  </a:schemeClr>
+              <a:defRPr sz="1400">
+                <a:solidFill>
+                  <a:srgbClr val="111111"/>
                 </a:solidFill>
               </a:defRPr>
             </a:lvl7pPr>
-            <a:lvl8pPr marL="2400300" indent="0">
+            <a:lvl8pPr marL="3200400" indent="0">
               <a:buNone/>
-              <a:defRPr sz="1050">
-                <a:solidFill>
-                  <a:schemeClr val="tx1">
-                    <a:tint val="75000"/>
-                  </a:schemeClr>
+              <a:defRPr sz="1400">
+                <a:solidFill>
+                  <a:srgbClr val="111111"/>
                 </a:solidFill>
               </a:defRPr>
             </a:lvl8pPr>
-            <a:lvl9pPr marL="2743200" indent="0">
+            <a:lvl9pPr marL="3657600" indent="0">
               <a:buNone/>
-              <a:defRPr sz="1050">
-                <a:solidFill>
-                  <a:schemeClr val="tx1">
-                    <a:tint val="75000"/>
-                  </a:schemeClr>
+              <a:defRPr sz="1400">
+                <a:solidFill>
+                  <a:srgbClr val="111111"/>
                 </a:solidFill>
               </a:defRPr>
             </a:lvl9pPr>
@@ -1065,7 +1112,11 @@
           <a:p>
             <a:pPr lvl="0"/>
             <a:r>
-              <a:rPr lang="en-US"/>
+              <a:rPr lang="en-US" smtClean="0">
+                <a:solidFill>
+                  <a:srgbClr val="111111"/>
+                </a:solidFill>
+              </a:rPr>
               <a:t>Click to edit Master text styles</a:t>
             </a:r>
           </a:p>
@@ -1086,9 +1137,13 @@
           <a:bodyPr/>
           <a:lstStyle/>
           <a:p>
-            <a:fld id="{241EB5C9-1307-BA42-ABA2-0BC069CD8E7F}" type="datetimeFigureOut">
-              <a:rPr lang="en-US" smtClean="0"/>
-              <a:t>1/2/22</a:t>
+            <a:fld id="{5BCAD085-E8A6-8845-BD4E-CB4CCA059FC4}" type="datetimeFigureOut">
+              <a:rPr lang="en-US" smtClean="0">
+                <a:solidFill>
+                  <a:srgbClr val="111111"/>
+                </a:solidFill>
+              </a:rPr>
+              <a:t>1/27/13</a:t>
             </a:fld>
             <a:endParaRPr lang="en-US"/>
           </a:p>
@@ -1128,8 +1183,12 @@
           <a:bodyPr/>
           <a:lstStyle/>
           <a:p>
-            <a:fld id="{C5EF2332-01BF-834F-8236-50238282D533}" type="slidenum">
-              <a:rPr lang="en-US" smtClean="0"/>
+            <a:fld id="{C1FF6DA9-008F-8B48-92A6-B652298478BF}" type="slidenum">
+              <a:rPr lang="en-US" smtClean="0">
+                <a:solidFill>
+                  <a:srgbClr val="111111"/>
+                </a:solidFill>
+              </a:rPr>
               <a:t>‹#›</a:t>
             </a:fld>
             <a:endParaRPr lang="en-US"/>
@@ -1139,7 +1198,7 @@
     </p:spTree>
     <p:extLst>
       <p:ext uri="{BB962C8B-B14F-4D97-AF65-F5344CB8AC3E}">
-        <p14:creationId xmlns:p14="http://schemas.microsoft.com/office/powerpoint/2010/main" val="1073069076"/>
+        <p14:creationId xmlns:p14="http://schemas.microsoft.com/office/powerpoint/2010/main" val="960648375"/>
       </p:ext>
     </p:extLst>
   </p:cSld>
@@ -1182,9 +1241,14 @@
           <a:lstStyle/>
           <a:p>
             <a:r>
-              <a:rPr lang="en-US"/>
+              <a:rPr lang="en-US" smtClean="0">
+                <a:solidFill>
+                  <a:srgbClr val="111111"/>
+                </a:solidFill>
+              </a:rPr>
               <a:t>Click to edit Master title style</a:t>
             </a:r>
+            <a:endParaRPr lang="en-US"/>
           </a:p>
         </p:txBody>
       </p:sp>
@@ -1200,75 +1264,132 @@
         </p:nvSpPr>
         <p:spPr>
           <a:xfrm>
-            <a:off x="457200" y="1200151"/>
-            <a:ext cx="4038600" cy="3394472"/>
+            <a:off x="457200" y="1600200"/>
+            <a:ext cx="4038600" cy="4525963"/>
           </a:xfrm>
         </p:spPr>
         <p:txBody>
           <a:bodyPr/>
           <a:lstStyle>
             <a:lvl1pPr>
-              <a:defRPr sz="2100"/>
+              <a:defRPr sz="2800">
+                <a:solidFill>
+                  <a:srgbClr val="111111"/>
+                </a:solidFill>
+              </a:defRPr>
             </a:lvl1pPr>
             <a:lvl2pPr>
-              <a:defRPr sz="1800"/>
+              <a:defRPr sz="2400">
+                <a:solidFill>
+                  <a:srgbClr val="111111"/>
+                </a:solidFill>
+              </a:defRPr>
             </a:lvl2pPr>
             <a:lvl3pPr>
-              <a:defRPr sz="1500"/>
+              <a:defRPr sz="2000">
+                <a:solidFill>
+                  <a:srgbClr val="111111"/>
+                </a:solidFill>
+              </a:defRPr>
             </a:lvl3pPr>
             <a:lvl4pPr>
-              <a:defRPr sz="1350"/>
+              <a:defRPr sz="1800">
+                <a:solidFill>
+                  <a:srgbClr val="111111"/>
+                </a:solidFill>
+              </a:defRPr>
             </a:lvl4pPr>
             <a:lvl5pPr>
-              <a:defRPr sz="1350"/>
+              <a:defRPr sz="1800">
+                <a:solidFill>
+                  <a:srgbClr val="111111"/>
+                </a:solidFill>
+              </a:defRPr>
             </a:lvl5pPr>
             <a:lvl6pPr>
-              <a:defRPr sz="1350"/>
+              <a:defRPr sz="1800">
+                <a:solidFill>
+                  <a:srgbClr val="111111"/>
+                </a:solidFill>
+              </a:defRPr>
             </a:lvl6pPr>
             <a:lvl7pPr>
-              <a:defRPr sz="1350"/>
+              <a:defRPr sz="1800">
+                <a:solidFill>
+                  <a:srgbClr val="111111"/>
+                </a:solidFill>
+              </a:defRPr>
             </a:lvl7pPr>
             <a:lvl8pPr>
-              <a:defRPr sz="1350"/>
+              <a:defRPr sz="1800">
+                <a:solidFill>
+                  <a:srgbClr val="111111"/>
+                </a:solidFill>
+              </a:defRPr>
             </a:lvl8pPr>
             <a:lvl9pPr>
-              <a:defRPr sz="1350"/>
+              <a:defRPr sz="1800">
+                <a:solidFill>
+                  <a:srgbClr val="111111"/>
+                </a:solidFill>
+              </a:defRPr>
             </a:lvl9pPr>
           </a:lstStyle>
           <a:p>
             <a:pPr lvl="0"/>
             <a:r>
-              <a:rPr lang="en-US"/>
+              <a:rPr lang="en-US" smtClean="0">
+                <a:solidFill>
+                  <a:srgbClr val="111111"/>
+                </a:solidFill>
+              </a:rPr>
               <a:t>Click to edit Master text styles</a:t>
             </a:r>
           </a:p>
           <a:p>
             <a:pPr lvl="1"/>
             <a:r>
-              <a:rPr lang="en-US"/>
+              <a:rPr lang="en-US" smtClean="0">
+                <a:solidFill>
+                  <a:srgbClr val="111111"/>
+                </a:solidFill>
+              </a:rPr>
               <a:t>Second level</a:t>
             </a:r>
           </a:p>
           <a:p>
             <a:pPr lvl="2"/>
             <a:r>
-              <a:rPr lang="en-US"/>
+              <a:rPr lang="en-US" smtClean="0">
+                <a:solidFill>
+                  <a:srgbClr val="111111"/>
+                </a:solidFill>
+              </a:rPr>
               <a:t>Third level</a:t>
             </a:r>
           </a:p>
           <a:p>
             <a:pPr lvl="3"/>
             <a:r>
-              <a:rPr lang="en-US"/>
+              <a:rPr lang="en-US" smtClean="0">
+                <a:solidFill>
+                  <a:srgbClr val="111111"/>
+                </a:solidFill>
+              </a:rPr>
               <a:t>Fourth level</a:t>
             </a:r>
           </a:p>
           <a:p>
             <a:pPr lvl="4"/>
             <a:r>
-              <a:rPr lang="en-US"/>
+              <a:rPr lang="en-US" smtClean="0">
+                <a:solidFill>
+                  <a:srgbClr val="111111"/>
+                </a:solidFill>
+              </a:rPr>
               <a:t>Fifth level</a:t>
             </a:r>
+            <a:endParaRPr lang="en-US"/>
           </a:p>
         </p:txBody>
       </p:sp>
@@ -1284,75 +1405,132 @@
         </p:nvSpPr>
         <p:spPr>
           <a:xfrm>
-            <a:off x="4648200" y="1200151"/>
-            <a:ext cx="4038600" cy="3394472"/>
+            <a:off x="4648200" y="1600200"/>
+            <a:ext cx="4038600" cy="4525963"/>
           </a:xfrm>
         </p:spPr>
         <p:txBody>
           <a:bodyPr/>
           <a:lstStyle>
             <a:lvl1pPr>
-              <a:defRPr sz="2100"/>
+              <a:defRPr sz="2800">
+                <a:solidFill>
+                  <a:srgbClr val="111111"/>
+                </a:solidFill>
+              </a:defRPr>
             </a:lvl1pPr>
             <a:lvl2pPr>
-              <a:defRPr sz="1800"/>
+              <a:defRPr sz="2400">
+                <a:solidFill>
+                  <a:srgbClr val="111111"/>
+                </a:solidFill>
+              </a:defRPr>
             </a:lvl2pPr>
             <a:lvl3pPr>
-              <a:defRPr sz="1500"/>
+              <a:defRPr sz="2000">
+                <a:solidFill>
+                  <a:srgbClr val="111111"/>
+                </a:solidFill>
+              </a:defRPr>
             </a:lvl3pPr>
             <a:lvl4pPr>
-              <a:defRPr sz="1350"/>
+              <a:defRPr sz="1800">
+                <a:solidFill>
+                  <a:srgbClr val="111111"/>
+                </a:solidFill>
+              </a:defRPr>
             </a:lvl4pPr>
             <a:lvl5pPr>
-              <a:defRPr sz="1350"/>
+              <a:defRPr sz="1800">
+                <a:solidFill>
+                  <a:srgbClr val="111111"/>
+                </a:solidFill>
+              </a:defRPr>
             </a:lvl5pPr>
             <a:lvl6pPr>
-              <a:defRPr sz="1350"/>
+              <a:defRPr sz="1800">
+                <a:solidFill>
+                  <a:srgbClr val="111111"/>
+                </a:solidFill>
+              </a:defRPr>
             </a:lvl6pPr>
             <a:lvl7pPr>
-              <a:defRPr sz="1350"/>
+              <a:defRPr sz="1800">
+                <a:solidFill>
+                  <a:srgbClr val="111111"/>
+                </a:solidFill>
+              </a:defRPr>
             </a:lvl7pPr>
             <a:lvl8pPr>
-              <a:defRPr sz="1350"/>
+              <a:defRPr sz="1800">
+                <a:solidFill>
+                  <a:srgbClr val="111111"/>
+                </a:solidFill>
+              </a:defRPr>
             </a:lvl8pPr>
             <a:lvl9pPr>
-              <a:defRPr sz="1350"/>
+              <a:defRPr sz="1800">
+                <a:solidFill>
+                  <a:srgbClr val="111111"/>
+                </a:solidFill>
+              </a:defRPr>
             </a:lvl9pPr>
           </a:lstStyle>
           <a:p>
             <a:pPr lvl="0"/>
             <a:r>
-              <a:rPr lang="en-US"/>
+              <a:rPr lang="en-US" smtClean="0">
+                <a:solidFill>
+                  <a:srgbClr val="111111"/>
+                </a:solidFill>
+              </a:rPr>
               <a:t>Click to edit Master text styles</a:t>
             </a:r>
           </a:p>
           <a:p>
             <a:pPr lvl="1"/>
             <a:r>
-              <a:rPr lang="en-US"/>
+              <a:rPr lang="en-US" smtClean="0">
+                <a:solidFill>
+                  <a:srgbClr val="111111"/>
+                </a:solidFill>
+              </a:rPr>
               <a:t>Second level</a:t>
             </a:r>
           </a:p>
           <a:p>
             <a:pPr lvl="2"/>
             <a:r>
-              <a:rPr lang="en-US"/>
+              <a:rPr lang="en-US" smtClean="0">
+                <a:solidFill>
+                  <a:srgbClr val="111111"/>
+                </a:solidFill>
+              </a:rPr>
               <a:t>Third level</a:t>
             </a:r>
           </a:p>
           <a:p>
             <a:pPr lvl="3"/>
             <a:r>
-              <a:rPr lang="en-US"/>
+              <a:rPr lang="en-US" smtClean="0">
+                <a:solidFill>
+                  <a:srgbClr val="111111"/>
+                </a:solidFill>
+              </a:rPr>
               <a:t>Fourth level</a:t>
             </a:r>
           </a:p>
           <a:p>
             <a:pPr lvl="4"/>
             <a:r>
-              <a:rPr lang="en-US"/>
+              <a:rPr lang="en-US" smtClean="0">
+                <a:solidFill>
+                  <a:srgbClr val="111111"/>
+                </a:solidFill>
+              </a:rPr>
               <a:t>Fifth level</a:t>
             </a:r>
+            <a:endParaRPr lang="en-US"/>
           </a:p>
         </p:txBody>
       </p:sp>
@@ -1371,9 +1549,13 @@
           <a:bodyPr/>
           <a:lstStyle/>
           <a:p>
-            <a:fld id="{241EB5C9-1307-BA42-ABA2-0BC069CD8E7F}" type="datetimeFigureOut">
-              <a:rPr lang="en-US" smtClean="0"/>
-              <a:t>1/2/22</a:t>
+            <a:fld id="{5BCAD085-E8A6-8845-BD4E-CB4CCA059FC4}" type="datetimeFigureOut">
+              <a:rPr lang="en-US" smtClean="0">
+                <a:solidFill>
+                  <a:srgbClr val="111111"/>
+                </a:solidFill>
+              </a:rPr>
+              <a:t>1/27/13</a:t>
             </a:fld>
             <a:endParaRPr lang="en-US"/>
           </a:p>
@@ -1413,8 +1595,12 @@
           <a:bodyPr/>
           <a:lstStyle/>
           <a:p>
-            <a:fld id="{C5EF2332-01BF-834F-8236-50238282D533}" type="slidenum">
-              <a:rPr lang="en-US" smtClean="0"/>
+            <a:fld id="{C1FF6DA9-008F-8B48-92A6-B652298478BF}" type="slidenum">
+              <a:rPr lang="en-US" smtClean="0">
+                <a:solidFill>
+                  <a:srgbClr val="111111"/>
+                </a:solidFill>
+              </a:rPr>
               <a:t>‹#›</a:t>
             </a:fld>
             <a:endParaRPr lang="en-US"/>
@@ -1424,7 +1610,7 @@
     </p:spTree>
     <p:extLst>
       <p:ext uri="{BB962C8B-B14F-4D97-AF65-F5344CB8AC3E}">
-        <p14:creationId xmlns:p14="http://schemas.microsoft.com/office/powerpoint/2010/main" val="2619886245"/>
+        <p14:creationId xmlns:p14="http://schemas.microsoft.com/office/powerpoint/2010/main" val="2782244947"/>
       </p:ext>
     </p:extLst>
   </p:cSld>
@@ -1466,14 +1652,23 @@
           <a:bodyPr/>
           <a:lstStyle>
             <a:lvl1pPr>
-              <a:defRPr/>
+              <a:defRPr>
+                <a:solidFill>
+                  <a:srgbClr val="111111"/>
+                </a:solidFill>
+              </a:defRPr>
             </a:lvl1pPr>
           </a:lstStyle>
           <a:p>
             <a:r>
-              <a:rPr lang="en-US"/>
+              <a:rPr lang="en-US" smtClean="0">
+                <a:solidFill>
+                  <a:srgbClr val="111111"/>
+                </a:solidFill>
+              </a:rPr>
               <a:t>Click to edit Master title style</a:t>
             </a:r>
+            <a:endParaRPr lang="en-US"/>
           </a:p>
         </p:txBody>
       </p:sp>
@@ -1489,8 +1684,8 @@
         </p:nvSpPr>
         <p:spPr>
           <a:xfrm>
-            <a:off x="457200" y="1151335"/>
-            <a:ext cx="4040188" cy="479822"/>
+            <a:off x="457200" y="1535113"/>
+            <a:ext cx="4040188" cy="639762"/>
           </a:xfrm>
         </p:spPr>
         <p:txBody>
@@ -1498,45 +1693,85 @@
           <a:lstStyle>
             <a:lvl1pPr marL="0" indent="0">
               <a:buNone/>
-              <a:defRPr sz="1800" b="1"/>
+              <a:defRPr sz="2400" b="1">
+                <a:solidFill>
+                  <a:srgbClr val="111111"/>
+                </a:solidFill>
+              </a:defRPr>
             </a:lvl1pPr>
-            <a:lvl2pPr marL="342900" indent="0">
+            <a:lvl2pPr marL="457200" indent="0">
               <a:buNone/>
-              <a:defRPr sz="1500" b="1"/>
+              <a:defRPr sz="2000" b="1">
+                <a:solidFill>
+                  <a:srgbClr val="111111"/>
+                </a:solidFill>
+              </a:defRPr>
             </a:lvl2pPr>
-            <a:lvl3pPr marL="685800" indent="0">
+            <a:lvl3pPr marL="914400" indent="0">
               <a:buNone/>
-              <a:defRPr sz="1350" b="1"/>
+              <a:defRPr sz="1800" b="1">
+                <a:solidFill>
+                  <a:srgbClr val="111111"/>
+                </a:solidFill>
+              </a:defRPr>
             </a:lvl3pPr>
-            <a:lvl4pPr marL="1028700" indent="0">
+            <a:lvl4pPr marL="1371600" indent="0">
               <a:buNone/>
-              <a:defRPr sz="1200" b="1"/>
+              <a:defRPr sz="1600" b="1">
+                <a:solidFill>
+                  <a:srgbClr val="111111"/>
+                </a:solidFill>
+              </a:defRPr>
             </a:lvl4pPr>
-            <a:lvl5pPr marL="1371600" indent="0">
+            <a:lvl5pPr marL="1828800" indent="0">
               <a:buNone/>
-              <a:defRPr sz="1200" b="1"/>
+              <a:defRPr sz="1600" b="1">
+                <a:solidFill>
+                  <a:srgbClr val="111111"/>
+                </a:solidFill>
+              </a:defRPr>
             </a:lvl5pPr>
-            <a:lvl6pPr marL="1714500" indent="0">
+            <a:lvl6pPr marL="2286000" indent="0">
               <a:buNone/>
-              <a:defRPr sz="1200" b="1"/>
+              <a:defRPr sz="1600" b="1">
+                <a:solidFill>
+                  <a:srgbClr val="111111"/>
+                </a:solidFill>
+              </a:defRPr>
             </a:lvl6pPr>
-            <a:lvl7pPr marL="2057400" indent="0">
+            <a:lvl7pPr marL="2743200" indent="0">
               <a:buNone/>
-              <a:defRPr sz="1200" b="1"/>
+              <a:defRPr sz="1600" b="1">
+                <a:solidFill>
+                  <a:srgbClr val="111111"/>
+                </a:solidFill>
+              </a:defRPr>
             </a:lvl7pPr>
-            <a:lvl8pPr marL="2400300" indent="0">
+            <a:lvl8pPr marL="3200400" indent="0">
               <a:buNone/>
-              <a:defRPr sz="1200" b="1"/>
+              <a:defRPr sz="1600" b="1">
+                <a:solidFill>
+                  <a:srgbClr val="111111"/>
+                </a:solidFill>
+              </a:defRPr>
             </a:lvl8pPr>
-            <a:lvl9pPr marL="2743200" indent="0">
+            <a:lvl9pPr marL="3657600" indent="0">
               <a:buNone/>
-              <a:defRPr sz="1200" b="1"/>
+              <a:defRPr sz="1600" b="1">
+                <a:solidFill>
+                  <a:srgbClr val="111111"/>
+                </a:solidFill>
+              </a:defRPr>
             </a:lvl9pPr>
           </a:lstStyle>
           <a:p>
             <a:pPr lvl="0"/>
             <a:r>
-              <a:rPr lang="en-US"/>
+              <a:rPr lang="en-US" smtClean="0">
+                <a:solidFill>
+                  <a:srgbClr val="111111"/>
+                </a:solidFill>
+              </a:rPr>
               <a:t>Click to edit Master text styles</a:t>
             </a:r>
           </a:p>
@@ -1554,75 +1789,132 @@
         </p:nvSpPr>
         <p:spPr>
           <a:xfrm>
-            <a:off x="457200" y="1631156"/>
-            <a:ext cx="4040188" cy="2963466"/>
+            <a:off x="457200" y="2174875"/>
+            <a:ext cx="4040188" cy="3951288"/>
           </a:xfrm>
         </p:spPr>
         <p:txBody>
           <a:bodyPr/>
           <a:lstStyle>
             <a:lvl1pPr>
-              <a:defRPr sz="1800"/>
+              <a:defRPr sz="2400">
+                <a:solidFill>
+                  <a:srgbClr val="111111"/>
+                </a:solidFill>
+              </a:defRPr>
             </a:lvl1pPr>
             <a:lvl2pPr>
-              <a:defRPr sz="1500"/>
+              <a:defRPr sz="2000">
+                <a:solidFill>
+                  <a:srgbClr val="111111"/>
+                </a:solidFill>
+              </a:defRPr>
             </a:lvl2pPr>
             <a:lvl3pPr>
-              <a:defRPr sz="1350"/>
+              <a:defRPr sz="1800">
+                <a:solidFill>
+                  <a:srgbClr val="111111"/>
+                </a:solidFill>
+              </a:defRPr>
             </a:lvl3pPr>
             <a:lvl4pPr>
-              <a:defRPr sz="1200"/>
+              <a:defRPr sz="1600">
+                <a:solidFill>
+                  <a:srgbClr val="111111"/>
+                </a:solidFill>
+              </a:defRPr>
             </a:lvl4pPr>
             <a:lvl5pPr>
-              <a:defRPr sz="1200"/>
+              <a:defRPr sz="1600">
+                <a:solidFill>
+                  <a:srgbClr val="111111"/>
+                </a:solidFill>
+              </a:defRPr>
             </a:lvl5pPr>
             <a:lvl6pPr>
-              <a:defRPr sz="1200"/>
+              <a:defRPr sz="1600">
+                <a:solidFill>
+                  <a:srgbClr val="111111"/>
+                </a:solidFill>
+              </a:defRPr>
             </a:lvl6pPr>
             <a:lvl7pPr>
-              <a:defRPr sz="1200"/>
+              <a:defRPr sz="1600">
+                <a:solidFill>
+                  <a:srgbClr val="111111"/>
+                </a:solidFill>
+              </a:defRPr>
             </a:lvl7pPr>
             <a:lvl8pPr>
-              <a:defRPr sz="1200"/>
+              <a:defRPr sz="1600">
+                <a:solidFill>
+                  <a:srgbClr val="111111"/>
+                </a:solidFill>
+              </a:defRPr>
             </a:lvl8pPr>
             <a:lvl9pPr>
-              <a:defRPr sz="1200"/>
+              <a:defRPr sz="1600">
+                <a:solidFill>
+                  <a:srgbClr val="111111"/>
+                </a:solidFill>
+              </a:defRPr>
             </a:lvl9pPr>
           </a:lstStyle>
           <a:p>
             <a:pPr lvl="0"/>
             <a:r>
-              <a:rPr lang="en-US"/>
+              <a:rPr lang="en-US" smtClean="0">
+                <a:solidFill>
+                  <a:srgbClr val="111111"/>
+                </a:solidFill>
+              </a:rPr>
               <a:t>Click to edit Master text styles</a:t>
             </a:r>
           </a:p>
           <a:p>
             <a:pPr lvl="1"/>
             <a:r>
-              <a:rPr lang="en-US"/>
+              <a:rPr lang="en-US" smtClean="0">
+                <a:solidFill>
+                  <a:srgbClr val="111111"/>
+                </a:solidFill>
+              </a:rPr>
               <a:t>Second level</a:t>
             </a:r>
           </a:p>
           <a:p>
             <a:pPr lvl="2"/>
             <a:r>
-              <a:rPr lang="en-US"/>
+              <a:rPr lang="en-US" smtClean="0">
+                <a:solidFill>
+                  <a:srgbClr val="111111"/>
+                </a:solidFill>
+              </a:rPr>
               <a:t>Third level</a:t>
             </a:r>
           </a:p>
           <a:p>
             <a:pPr lvl="3"/>
             <a:r>
-              <a:rPr lang="en-US"/>
+              <a:rPr lang="en-US" smtClean="0">
+                <a:solidFill>
+                  <a:srgbClr val="111111"/>
+                </a:solidFill>
+              </a:rPr>
               <a:t>Fourth level</a:t>
             </a:r>
           </a:p>
           <a:p>
             <a:pPr lvl="4"/>
             <a:r>
-              <a:rPr lang="en-US"/>
+              <a:rPr lang="en-US" smtClean="0">
+                <a:solidFill>
+                  <a:srgbClr val="111111"/>
+                </a:solidFill>
+              </a:rPr>
               <a:t>Fifth level</a:t>
             </a:r>
+            <a:endParaRPr lang="en-US"/>
           </a:p>
         </p:txBody>
       </p:sp>
@@ -1638,8 +1930,8 @@
         </p:nvSpPr>
         <p:spPr>
           <a:xfrm>
-            <a:off x="4645026" y="1151335"/>
-            <a:ext cx="4041775" cy="479822"/>
+            <a:off x="4645025" y="1535113"/>
+            <a:ext cx="4041775" cy="639762"/>
           </a:xfrm>
         </p:spPr>
         <p:txBody>
@@ -1647,45 +1939,85 @@
           <a:lstStyle>
             <a:lvl1pPr marL="0" indent="0">
               <a:buNone/>
-              <a:defRPr sz="1800" b="1"/>
+              <a:defRPr sz="2400" b="1">
+                <a:solidFill>
+                  <a:srgbClr val="111111"/>
+                </a:solidFill>
+              </a:defRPr>
             </a:lvl1pPr>
-            <a:lvl2pPr marL="342900" indent="0">
+            <a:lvl2pPr marL="457200" indent="0">
               <a:buNone/>
-              <a:defRPr sz="1500" b="1"/>
+              <a:defRPr sz="2000" b="1">
+                <a:solidFill>
+                  <a:srgbClr val="111111"/>
+                </a:solidFill>
+              </a:defRPr>
             </a:lvl2pPr>
-            <a:lvl3pPr marL="685800" indent="0">
+            <a:lvl3pPr marL="914400" indent="0">
               <a:buNone/>
-              <a:defRPr sz="1350" b="1"/>
+              <a:defRPr sz="1800" b="1">
+                <a:solidFill>
+                  <a:srgbClr val="111111"/>
+                </a:solidFill>
+              </a:defRPr>
             </a:lvl3pPr>
-            <a:lvl4pPr marL="1028700" indent="0">
+            <a:lvl4pPr marL="1371600" indent="0">
               <a:buNone/>
-              <a:defRPr sz="1200" b="1"/>
+              <a:defRPr sz="1600" b="1">
+                <a:solidFill>
+                  <a:srgbClr val="111111"/>
+                </a:solidFill>
+              </a:defRPr>
             </a:lvl4pPr>
-            <a:lvl5pPr marL="1371600" indent="0">
+            <a:lvl5pPr marL="1828800" indent="0">
               <a:buNone/>
-              <a:defRPr sz="1200" b="1"/>
+              <a:defRPr sz="1600" b="1">
+                <a:solidFill>
+                  <a:srgbClr val="111111"/>
+                </a:solidFill>
+              </a:defRPr>
             </a:lvl5pPr>
-            <a:lvl6pPr marL="1714500" indent="0">
+            <a:lvl6pPr marL="2286000" indent="0">
               <a:buNone/>
-              <a:defRPr sz="1200" b="1"/>
+              <a:defRPr sz="1600" b="1">
+                <a:solidFill>
+                  <a:srgbClr val="111111"/>
+                </a:solidFill>
+              </a:defRPr>
             </a:lvl6pPr>
-            <a:lvl7pPr marL="2057400" indent="0">
+            <a:lvl7pPr marL="2743200" indent="0">
               <a:buNone/>
-              <a:defRPr sz="1200" b="1"/>
+              <a:defRPr sz="1600" b="1">
+                <a:solidFill>
+                  <a:srgbClr val="111111"/>
+                </a:solidFill>
+              </a:defRPr>
             </a:lvl7pPr>
-            <a:lvl8pPr marL="2400300" indent="0">
+            <a:lvl8pPr marL="3200400" indent="0">
               <a:buNone/>
-              <a:defRPr sz="1200" b="1"/>
+              <a:defRPr sz="1600" b="1">
+                <a:solidFill>
+                  <a:srgbClr val="111111"/>
+                </a:solidFill>
+              </a:defRPr>
             </a:lvl8pPr>
-            <a:lvl9pPr marL="2743200" indent="0">
+            <a:lvl9pPr marL="3657600" indent="0">
               <a:buNone/>
-              <a:defRPr sz="1200" b="1"/>
+              <a:defRPr sz="1600" b="1">
+                <a:solidFill>
+                  <a:srgbClr val="111111"/>
+                </a:solidFill>
+              </a:defRPr>
             </a:lvl9pPr>
           </a:lstStyle>
           <a:p>
             <a:pPr lvl="0"/>
             <a:r>
-              <a:rPr lang="en-US"/>
+              <a:rPr lang="en-US" smtClean="0">
+                <a:solidFill>
+                  <a:srgbClr val="111111"/>
+                </a:solidFill>
+              </a:rPr>
               <a:t>Click to edit Master text styles</a:t>
             </a:r>
           </a:p>
@@ -1703,75 +2035,132 @@
         </p:nvSpPr>
         <p:spPr>
           <a:xfrm>
-            <a:off x="4645026" y="1631156"/>
-            <a:ext cx="4041775" cy="2963466"/>
+            <a:off x="4645025" y="2174875"/>
+            <a:ext cx="4041775" cy="3951288"/>
           </a:xfrm>
         </p:spPr>
         <p:txBody>
           <a:bodyPr/>
           <a:lstStyle>
             <a:lvl1pPr>
-              <a:defRPr sz="1800"/>
+              <a:defRPr sz="2400">
+                <a:solidFill>
+                  <a:srgbClr val="111111"/>
+                </a:solidFill>
+              </a:defRPr>
             </a:lvl1pPr>
             <a:lvl2pPr>
-              <a:defRPr sz="1500"/>
+              <a:defRPr sz="2000">
+                <a:solidFill>
+                  <a:srgbClr val="111111"/>
+                </a:solidFill>
+              </a:defRPr>
             </a:lvl2pPr>
             <a:lvl3pPr>
-              <a:defRPr sz="1350"/>
+              <a:defRPr sz="1800">
+                <a:solidFill>
+                  <a:srgbClr val="111111"/>
+                </a:solidFill>
+              </a:defRPr>
             </a:lvl3pPr>
             <a:lvl4pPr>
-              <a:defRPr sz="1200"/>
+              <a:defRPr sz="1600">
+                <a:solidFill>
+                  <a:srgbClr val="111111"/>
+                </a:solidFill>
+              </a:defRPr>
             </a:lvl4pPr>
             <a:lvl5pPr>
-              <a:defRPr sz="1200"/>
+              <a:defRPr sz="1600">
+                <a:solidFill>
+                  <a:srgbClr val="111111"/>
+                </a:solidFill>
+              </a:defRPr>
             </a:lvl5pPr>
             <a:lvl6pPr>
-              <a:defRPr sz="1200"/>
+              <a:defRPr sz="1600">
+                <a:solidFill>
+                  <a:srgbClr val="111111"/>
+                </a:solidFill>
+              </a:defRPr>
             </a:lvl6pPr>
             <a:lvl7pPr>
-              <a:defRPr sz="1200"/>
+              <a:defRPr sz="1600">
+                <a:solidFill>
+                  <a:srgbClr val="111111"/>
+                </a:solidFill>
+              </a:defRPr>
             </a:lvl7pPr>
             <a:lvl8pPr>
-              <a:defRPr sz="1200"/>
+              <a:defRPr sz="1600">
+                <a:solidFill>
+                  <a:srgbClr val="111111"/>
+                </a:solidFill>
+              </a:defRPr>
             </a:lvl8pPr>
             <a:lvl9pPr>
-              <a:defRPr sz="1200"/>
+              <a:defRPr sz="1600">
+                <a:solidFill>
+                  <a:srgbClr val="111111"/>
+                </a:solidFill>
+              </a:defRPr>
             </a:lvl9pPr>
           </a:lstStyle>
           <a:p>
             <a:pPr lvl="0"/>
             <a:r>
-              <a:rPr lang="en-US"/>
+              <a:rPr lang="en-US" smtClean="0">
+                <a:solidFill>
+                  <a:srgbClr val="111111"/>
+                </a:solidFill>
+              </a:rPr>
               <a:t>Click to edit Master text styles</a:t>
             </a:r>
           </a:p>
           <a:p>
             <a:pPr lvl="1"/>
             <a:r>
-              <a:rPr lang="en-US"/>
+              <a:rPr lang="en-US" smtClean="0">
+                <a:solidFill>
+                  <a:srgbClr val="111111"/>
+                </a:solidFill>
+              </a:rPr>
               <a:t>Second level</a:t>
             </a:r>
           </a:p>
           <a:p>
             <a:pPr lvl="2"/>
             <a:r>
-              <a:rPr lang="en-US"/>
+              <a:rPr lang="en-US" smtClean="0">
+                <a:solidFill>
+                  <a:srgbClr val="111111"/>
+                </a:solidFill>
+              </a:rPr>
               <a:t>Third level</a:t>
             </a:r>
           </a:p>
           <a:p>
             <a:pPr lvl="3"/>
             <a:r>
-              <a:rPr lang="en-US"/>
+              <a:rPr lang="en-US" smtClean="0">
+                <a:solidFill>
+                  <a:srgbClr val="111111"/>
+                </a:solidFill>
+              </a:rPr>
               <a:t>Fourth level</a:t>
             </a:r>
           </a:p>
           <a:p>
             <a:pPr lvl="4"/>
             <a:r>
-              <a:rPr lang="en-US"/>
+              <a:rPr lang="en-US" smtClean="0">
+                <a:solidFill>
+                  <a:srgbClr val="111111"/>
+                </a:solidFill>
+              </a:rPr>
               <a:t>Fifth level</a:t>
             </a:r>
+            <a:endParaRPr lang="en-US"/>
           </a:p>
         </p:txBody>
       </p:sp>
@@ -1790,9 +2179,13 @@
           <a:bodyPr/>
           <a:lstStyle/>
           <a:p>
-            <a:fld id="{241EB5C9-1307-BA42-ABA2-0BC069CD8E7F}" type="datetimeFigureOut">
-              <a:rPr lang="en-US" smtClean="0"/>
-              <a:t>1/2/22</a:t>
+            <a:fld id="{5BCAD085-E8A6-8845-BD4E-CB4CCA059FC4}" type="datetimeFigureOut">
+              <a:rPr lang="en-US" smtClean="0">
+                <a:solidFill>
+                  <a:srgbClr val="111111"/>
+                </a:solidFill>
+              </a:rPr>
+              <a:t>1/27/13</a:t>
             </a:fld>
             <a:endParaRPr lang="en-US"/>
           </a:p>
@@ -1832,8 +2225,12 @@
           <a:bodyPr/>
           <a:lstStyle/>
           <a:p>
-            <a:fld id="{C5EF2332-01BF-834F-8236-50238282D533}" type="slidenum">
-              <a:rPr lang="en-US" smtClean="0"/>
+            <a:fld id="{C1FF6DA9-008F-8B48-92A6-B652298478BF}" type="slidenum">
+              <a:rPr lang="en-US" smtClean="0">
+                <a:solidFill>
+                  <a:srgbClr val="111111"/>
+                </a:solidFill>
+              </a:rPr>
               <a:t>‹#›</a:t>
             </a:fld>
             <a:endParaRPr lang="en-US"/>
@@ -1843,7 +2240,7 @@
     </p:spTree>
     <p:extLst>
       <p:ext uri="{BB962C8B-B14F-4D97-AF65-F5344CB8AC3E}">
-        <p14:creationId xmlns:p14="http://schemas.microsoft.com/office/powerpoint/2010/main" val="2535793967"/>
+        <p14:creationId xmlns:p14="http://schemas.microsoft.com/office/powerpoint/2010/main" val="990158736"/>
       </p:ext>
     </p:extLst>
   </p:cSld>
@@ -1886,9 +2283,14 @@
           <a:lstStyle/>
           <a:p>
             <a:r>
-              <a:rPr lang="en-US"/>
+              <a:rPr lang="en-US" smtClean="0">
+                <a:solidFill>
+                  <a:srgbClr val="111111"/>
+                </a:solidFill>
+              </a:rPr>
               <a:t>Click to edit Master title style</a:t>
             </a:r>
+            <a:endParaRPr lang="en-US"/>
           </a:p>
         </p:txBody>
       </p:sp>
@@ -1907,9 +2309,13 @@
           <a:bodyPr/>
           <a:lstStyle/>
           <a:p>
-            <a:fld id="{241EB5C9-1307-BA42-ABA2-0BC069CD8E7F}" type="datetimeFigureOut">
-              <a:rPr lang="en-US" smtClean="0"/>
-              <a:t>1/2/22</a:t>
+            <a:fld id="{5BCAD085-E8A6-8845-BD4E-CB4CCA059FC4}" type="datetimeFigureOut">
+              <a:rPr lang="en-US" smtClean="0">
+                <a:solidFill>
+                  <a:srgbClr val="111111"/>
+                </a:solidFill>
+              </a:rPr>
+              <a:t>1/27/13</a:t>
             </a:fld>
             <a:endParaRPr lang="en-US"/>
           </a:p>
@@ -1949,8 +2355,12 @@
           <a:bodyPr/>
           <a:lstStyle/>
           <a:p>
-            <a:fld id="{C5EF2332-01BF-834F-8236-50238282D533}" type="slidenum">
-              <a:rPr lang="en-US" smtClean="0"/>
+            <a:fld id="{C1FF6DA9-008F-8B48-92A6-B652298478BF}" type="slidenum">
+              <a:rPr lang="en-US" smtClean="0">
+                <a:solidFill>
+                  <a:srgbClr val="111111"/>
+                </a:solidFill>
+              </a:rPr>
               <a:t>‹#›</a:t>
             </a:fld>
             <a:endParaRPr lang="en-US"/>
@@ -1960,7 +2370,7 @@
     </p:spTree>
     <p:extLst>
       <p:ext uri="{BB962C8B-B14F-4D97-AF65-F5344CB8AC3E}">
-        <p14:creationId xmlns:p14="http://schemas.microsoft.com/office/powerpoint/2010/main" val="3472721253"/>
+        <p14:creationId xmlns:p14="http://schemas.microsoft.com/office/powerpoint/2010/main" val="727027711"/>
       </p:ext>
     </p:extLst>
   </p:cSld>
@@ -2002,9 +2412,13 @@
           <a:bodyPr/>
           <a:lstStyle/>
           <a:p>
-            <a:fld id="{241EB5C9-1307-BA42-ABA2-0BC069CD8E7F}" type="datetimeFigureOut">
-              <a:rPr lang="en-US" smtClean="0"/>
-              <a:t>1/2/22</a:t>
+            <a:fld id="{5BCAD085-E8A6-8845-BD4E-CB4CCA059FC4}" type="datetimeFigureOut">
+              <a:rPr lang="en-US" smtClean="0">
+                <a:solidFill>
+                  <a:srgbClr val="111111"/>
+                </a:solidFill>
+              </a:rPr>
+              <a:t>1/27/13</a:t>
             </a:fld>
             <a:endParaRPr lang="en-US"/>
           </a:p>
@@ -2044,8 +2458,12 @@
           <a:bodyPr/>
           <a:lstStyle/>
           <a:p>
-            <a:fld id="{C5EF2332-01BF-834F-8236-50238282D533}" type="slidenum">
-              <a:rPr lang="en-US" smtClean="0"/>
+            <a:fld id="{C1FF6DA9-008F-8B48-92A6-B652298478BF}" type="slidenum">
+              <a:rPr lang="en-US" smtClean="0">
+                <a:solidFill>
+                  <a:srgbClr val="111111"/>
+                </a:solidFill>
+              </a:rPr>
               <a:t>‹#›</a:t>
             </a:fld>
             <a:endParaRPr lang="en-US"/>
@@ -2055,7 +2473,7 @@
     </p:spTree>
     <p:extLst>
       <p:ext uri="{BB962C8B-B14F-4D97-AF65-F5344CB8AC3E}">
-        <p14:creationId xmlns:p14="http://schemas.microsoft.com/office/powerpoint/2010/main" val="2130901097"/>
+        <p14:creationId xmlns:p14="http://schemas.microsoft.com/office/powerpoint/2010/main" val="1212999818"/>
       </p:ext>
     </p:extLst>
   </p:cSld>
@@ -2094,22 +2512,31 @@
         </p:nvSpPr>
         <p:spPr>
           <a:xfrm>
-            <a:off x="457201" y="204787"/>
-            <a:ext cx="3008313" cy="871538"/>
+            <a:off x="457200" y="273050"/>
+            <a:ext cx="3008313" cy="1162050"/>
           </a:xfrm>
         </p:spPr>
         <p:txBody>
           <a:bodyPr anchor="b"/>
           <a:lstStyle>
             <a:lvl1pPr algn="l">
-              <a:defRPr sz="1500" b="1"/>
+              <a:defRPr sz="2000" b="1">
+                <a:solidFill>
+                  <a:srgbClr val="111111"/>
+                </a:solidFill>
+              </a:defRPr>
             </a:lvl1pPr>
           </a:lstStyle>
           <a:p>
             <a:r>
-              <a:rPr lang="en-US"/>
+              <a:rPr lang="en-US" smtClean="0">
+                <a:solidFill>
+                  <a:srgbClr val="111111"/>
+                </a:solidFill>
+              </a:rPr>
               <a:t>Click to edit Master title style</a:t>
             </a:r>
+            <a:endParaRPr lang="en-US"/>
           </a:p>
         </p:txBody>
       </p:sp>
@@ -2125,75 +2552,132 @@
         </p:nvSpPr>
         <p:spPr>
           <a:xfrm>
-            <a:off x="3575050" y="204788"/>
-            <a:ext cx="5111750" cy="4389835"/>
+            <a:off x="3575050" y="273050"/>
+            <a:ext cx="5111750" cy="5853113"/>
           </a:xfrm>
         </p:spPr>
         <p:txBody>
           <a:bodyPr/>
           <a:lstStyle>
             <a:lvl1pPr>
-              <a:defRPr sz="2400"/>
+              <a:defRPr sz="3200">
+                <a:solidFill>
+                  <a:srgbClr val="111111"/>
+                </a:solidFill>
+              </a:defRPr>
             </a:lvl1pPr>
             <a:lvl2pPr>
-              <a:defRPr sz="2100"/>
+              <a:defRPr sz="2800">
+                <a:solidFill>
+                  <a:srgbClr val="111111"/>
+                </a:solidFill>
+              </a:defRPr>
             </a:lvl2pPr>
             <a:lvl3pPr>
-              <a:defRPr sz="1800"/>
+              <a:defRPr sz="2400">
+                <a:solidFill>
+                  <a:srgbClr val="111111"/>
+                </a:solidFill>
+              </a:defRPr>
             </a:lvl3pPr>
             <a:lvl4pPr>
-              <a:defRPr sz="1500"/>
+              <a:defRPr sz="2000">
+                <a:solidFill>
+                  <a:srgbClr val="111111"/>
+                </a:solidFill>
+              </a:defRPr>
             </a:lvl4pPr>
             <a:lvl5pPr>
-              <a:defRPr sz="1500"/>
+              <a:defRPr sz="2000">
+                <a:solidFill>
+                  <a:srgbClr val="111111"/>
+                </a:solidFill>
+              </a:defRPr>
             </a:lvl5pPr>
             <a:lvl6pPr>
-              <a:defRPr sz="1500"/>
+              <a:defRPr sz="2000">
+                <a:solidFill>
+                  <a:srgbClr val="111111"/>
+                </a:solidFill>
+              </a:defRPr>
             </a:lvl6pPr>
             <a:lvl7pPr>
-              <a:defRPr sz="1500"/>
+              <a:defRPr sz="2000">
+                <a:solidFill>
+                  <a:srgbClr val="111111"/>
+                </a:solidFill>
+              </a:defRPr>
             </a:lvl7pPr>
             <a:lvl8pPr>
-              <a:defRPr sz="1500"/>
+              <a:defRPr sz="2000">
+                <a:solidFill>
+                  <a:srgbClr val="111111"/>
+                </a:solidFill>
+              </a:defRPr>
             </a:lvl8pPr>
             <a:lvl9pPr>
-              <a:defRPr sz="1500"/>
+              <a:defRPr sz="2000">
+                <a:solidFill>
+                  <a:srgbClr val="111111"/>
+                </a:solidFill>
+              </a:defRPr>
             </a:lvl9pPr>
           </a:lstStyle>
           <a:p>
             <a:pPr lvl="0"/>
             <a:r>
-              <a:rPr lang="en-US"/>
+              <a:rPr lang="en-US" smtClean="0">
+                <a:solidFill>
+                  <a:srgbClr val="111111"/>
+                </a:solidFill>
+              </a:rPr>
               <a:t>Click to edit Master text styles</a:t>
             </a:r>
           </a:p>
           <a:p>
             <a:pPr lvl="1"/>
             <a:r>
-              <a:rPr lang="en-US"/>
+              <a:rPr lang="en-US" smtClean="0">
+                <a:solidFill>
+                  <a:srgbClr val="111111"/>
+                </a:solidFill>
+              </a:rPr>
               <a:t>Second level</a:t>
             </a:r>
           </a:p>
           <a:p>
             <a:pPr lvl="2"/>
             <a:r>
-              <a:rPr lang="en-US"/>
+              <a:rPr lang="en-US" smtClean="0">
+                <a:solidFill>
+                  <a:srgbClr val="111111"/>
+                </a:solidFill>
+              </a:rPr>
               <a:t>Third level</a:t>
             </a:r>
           </a:p>
           <a:p>
             <a:pPr lvl="3"/>
             <a:r>
-              <a:rPr lang="en-US"/>
+              <a:rPr lang="en-US" smtClean="0">
+                <a:solidFill>
+                  <a:srgbClr val="111111"/>
+                </a:solidFill>
+              </a:rPr>
               <a:t>Fourth level</a:t>
             </a:r>
           </a:p>
           <a:p>
             <a:pPr lvl="4"/>
             <a:r>
-              <a:rPr lang="en-US"/>
+              <a:rPr lang="en-US" smtClean="0">
+                <a:solidFill>
+                  <a:srgbClr val="111111"/>
+                </a:solidFill>
+              </a:rPr>
               <a:t>Fifth level</a:t>
             </a:r>
+            <a:endParaRPr lang="en-US"/>
           </a:p>
         </p:txBody>
       </p:sp>
@@ -2209,8 +2693,8 @@
         </p:nvSpPr>
         <p:spPr>
           <a:xfrm>
-            <a:off x="457201" y="1076326"/>
-            <a:ext cx="3008313" cy="3518297"/>
+            <a:off x="457200" y="1435100"/>
+            <a:ext cx="3008313" cy="4691063"/>
           </a:xfrm>
         </p:spPr>
         <p:txBody>
@@ -2218,45 +2702,85 @@
           <a:lstStyle>
             <a:lvl1pPr marL="0" indent="0">
               <a:buNone/>
-              <a:defRPr sz="1050"/>
+              <a:defRPr sz="1400">
+                <a:solidFill>
+                  <a:srgbClr val="111111"/>
+                </a:solidFill>
+              </a:defRPr>
             </a:lvl1pPr>
-            <a:lvl2pPr marL="342900" indent="0">
+            <a:lvl2pPr marL="457200" indent="0">
               <a:buNone/>
-              <a:defRPr sz="900"/>
+              <a:defRPr sz="1200">
+                <a:solidFill>
+                  <a:srgbClr val="111111"/>
+                </a:solidFill>
+              </a:defRPr>
             </a:lvl2pPr>
-            <a:lvl3pPr marL="685800" indent="0">
+            <a:lvl3pPr marL="914400" indent="0">
               <a:buNone/>
-              <a:defRPr sz="750"/>
+              <a:defRPr sz="1000">
+                <a:solidFill>
+                  <a:srgbClr val="111111"/>
+                </a:solidFill>
+              </a:defRPr>
             </a:lvl3pPr>
-            <a:lvl4pPr marL="1028700" indent="0">
+            <a:lvl4pPr marL="1371600" indent="0">
               <a:buNone/>
-              <a:defRPr sz="675"/>
+              <a:defRPr sz="900">
+                <a:solidFill>
+                  <a:srgbClr val="111111"/>
+                </a:solidFill>
+              </a:defRPr>
             </a:lvl4pPr>
-            <a:lvl5pPr marL="1371600" indent="0">
+            <a:lvl5pPr marL="1828800" indent="0">
               <a:buNone/>
-              <a:defRPr sz="675"/>
+              <a:defRPr sz="900">
+                <a:solidFill>
+                  <a:srgbClr val="111111"/>
+                </a:solidFill>
+              </a:defRPr>
             </a:lvl5pPr>
-            <a:lvl6pPr marL="1714500" indent="0">
+            <a:lvl6pPr marL="2286000" indent="0">
               <a:buNone/>
-              <a:defRPr sz="675"/>
+              <a:defRPr sz="900">
+                <a:solidFill>
+                  <a:srgbClr val="111111"/>
+                </a:solidFill>
+              </a:defRPr>
             </a:lvl6pPr>
-            <a:lvl7pPr marL="2057400" indent="0">
+            <a:lvl7pPr marL="2743200" indent="0">
               <a:buNone/>
-              <a:defRPr sz="675"/>
+              <a:defRPr sz="900">
+                <a:solidFill>
+                  <a:srgbClr val="111111"/>
+                </a:solidFill>
+              </a:defRPr>
             </a:lvl7pPr>
-            <a:lvl8pPr marL="2400300" indent="0">
+            <a:lvl8pPr marL="3200400" indent="0">
               <a:buNone/>
-              <a:defRPr sz="675"/>
+              <a:defRPr sz="900">
+                <a:solidFill>
+                  <a:srgbClr val="111111"/>
+                </a:solidFill>
+              </a:defRPr>
             </a:lvl8pPr>
-            <a:lvl9pPr marL="2743200" indent="0">
+            <a:lvl9pPr marL="3657600" indent="0">
               <a:buNone/>
-              <a:defRPr sz="675"/>
+              <a:defRPr sz="900">
+                <a:solidFill>
+                  <a:srgbClr val="111111"/>
+                </a:solidFill>
+              </a:defRPr>
             </a:lvl9pPr>
           </a:lstStyle>
           <a:p>
             <a:pPr lvl="0"/>
             <a:r>
-              <a:rPr lang="en-US"/>
+              <a:rPr lang="en-US" smtClean="0">
+                <a:solidFill>
+                  <a:srgbClr val="111111"/>
+                </a:solidFill>
+              </a:rPr>
               <a:t>Click to edit Master text styles</a:t>
             </a:r>
           </a:p>
@@ -2277,9 +2801,13 @@
           <a:bodyPr/>
           <a:lstStyle/>
           <a:p>
-            <a:fld id="{241EB5C9-1307-BA42-ABA2-0BC069CD8E7F}" type="datetimeFigureOut">
-              <a:rPr lang="en-US" smtClean="0"/>
-              <a:t>1/2/22</a:t>
+            <a:fld id="{5BCAD085-E8A6-8845-BD4E-CB4CCA059FC4}" type="datetimeFigureOut">
+              <a:rPr lang="en-US" smtClean="0">
+                <a:solidFill>
+                  <a:srgbClr val="111111"/>
+                </a:solidFill>
+              </a:rPr>
+              <a:t>1/27/13</a:t>
             </a:fld>
             <a:endParaRPr lang="en-US"/>
           </a:p>
@@ -2319,8 +2847,12 @@
           <a:bodyPr/>
           <a:lstStyle/>
           <a:p>
-            <a:fld id="{C5EF2332-01BF-834F-8236-50238282D533}" type="slidenum">
-              <a:rPr lang="en-US" smtClean="0"/>
+            <a:fld id="{C1FF6DA9-008F-8B48-92A6-B652298478BF}" type="slidenum">
+              <a:rPr lang="en-US" smtClean="0">
+                <a:solidFill>
+                  <a:srgbClr val="111111"/>
+                </a:solidFill>
+              </a:rPr>
               <a:t>‹#›</a:t>
             </a:fld>
             <a:endParaRPr lang="en-US"/>
@@ -2330,7 +2862,7 @@
     </p:spTree>
     <p:extLst>
       <p:ext uri="{BB962C8B-B14F-4D97-AF65-F5344CB8AC3E}">
-        <p14:creationId xmlns:p14="http://schemas.microsoft.com/office/powerpoint/2010/main" val="3540895647"/>
+        <p14:creationId xmlns:p14="http://schemas.microsoft.com/office/powerpoint/2010/main" val="1840726560"/>
       </p:ext>
     </p:extLst>
   </p:cSld>
@@ -2369,22 +2901,31 @@
         </p:nvSpPr>
         <p:spPr>
           <a:xfrm>
-            <a:off x="1792288" y="3600450"/>
-            <a:ext cx="5486400" cy="425054"/>
+            <a:off x="1792288" y="4800600"/>
+            <a:ext cx="5486400" cy="566738"/>
           </a:xfrm>
         </p:spPr>
         <p:txBody>
           <a:bodyPr anchor="b"/>
           <a:lstStyle>
             <a:lvl1pPr algn="l">
-              <a:defRPr sz="1500" b="1"/>
+              <a:defRPr sz="2000" b="1">
+                <a:solidFill>
+                  <a:srgbClr val="111111"/>
+                </a:solidFill>
+              </a:defRPr>
             </a:lvl1pPr>
           </a:lstStyle>
           <a:p>
             <a:r>
-              <a:rPr lang="en-US"/>
+              <a:rPr lang="en-US" smtClean="0">
+                <a:solidFill>
+                  <a:srgbClr val="111111"/>
+                </a:solidFill>
+              </a:rPr>
               <a:t>Click to edit Master title style</a:t>
             </a:r>
+            <a:endParaRPr lang="en-US"/>
           </a:p>
         </p:txBody>
       </p:sp>
@@ -2400,8 +2941,8 @@
         </p:nvSpPr>
         <p:spPr>
           <a:xfrm>
-            <a:off x="1792288" y="459581"/>
-            <a:ext cx="5486400" cy="3086100"/>
+            <a:off x="1792288" y="612775"/>
+            <a:ext cx="5486400" cy="4114800"/>
           </a:xfrm>
         </p:spPr>
         <p:txBody>
@@ -2409,39 +2950,75 @@
           <a:lstStyle>
             <a:lvl1pPr marL="0" indent="0">
               <a:buNone/>
-              <a:defRPr sz="2400"/>
+              <a:defRPr sz="3200">
+                <a:solidFill>
+                  <a:srgbClr val="111111"/>
+                </a:solidFill>
+              </a:defRPr>
             </a:lvl1pPr>
-            <a:lvl2pPr marL="342900" indent="0">
+            <a:lvl2pPr marL="457200" indent="0">
               <a:buNone/>
-              <a:defRPr sz="2100"/>
+              <a:defRPr sz="2800">
+                <a:solidFill>
+                  <a:srgbClr val="111111"/>
+                </a:solidFill>
+              </a:defRPr>
             </a:lvl2pPr>
-            <a:lvl3pPr marL="685800" indent="0">
+            <a:lvl3pPr marL="914400" indent="0">
               <a:buNone/>
-              <a:defRPr sz="1800"/>
+              <a:defRPr sz="2400">
+                <a:solidFill>
+                  <a:srgbClr val="111111"/>
+                </a:solidFill>
+              </a:defRPr>
             </a:lvl3pPr>
-            <a:lvl4pPr marL="1028700" indent="0">
+            <a:lvl4pPr marL="1371600" indent="0">
               <a:buNone/>
-              <a:defRPr sz="1500"/>
+              <a:defRPr sz="2000">
+                <a:solidFill>
+                  <a:srgbClr val="111111"/>
+                </a:solidFill>
+              </a:defRPr>
             </a:lvl4pPr>
-            <a:lvl5pPr marL="1371600" indent="0">
+            <a:lvl5pPr marL="1828800" indent="0">
               <a:buNone/>
-              <a:defRPr sz="1500"/>
+              <a:defRPr sz="2000">
+                <a:solidFill>
+                  <a:srgbClr val="111111"/>
+                </a:solidFill>
+              </a:defRPr>
             </a:lvl5pPr>
-            <a:lvl6pPr marL="1714500" indent="0">
+            <a:lvl6pPr marL="2286000" indent="0">
               <a:buNone/>
-              <a:defRPr sz="1500"/>
+              <a:defRPr sz="2000">
+                <a:solidFill>
+                  <a:srgbClr val="111111"/>
+                </a:solidFill>
+              </a:defRPr>
             </a:lvl6pPr>
-            <a:lvl7pPr marL="2057400" indent="0">
+            <a:lvl7pPr marL="2743200" indent="0">
               <a:buNone/>
-              <a:defRPr sz="1500"/>
+              <a:defRPr sz="2000">
+                <a:solidFill>
+                  <a:srgbClr val="111111"/>
+                </a:solidFill>
+              </a:defRPr>
             </a:lvl7pPr>
-            <a:lvl8pPr marL="2400300" indent="0">
+            <a:lvl8pPr marL="3200400" indent="0">
               <a:buNone/>
-              <a:defRPr sz="1500"/>
+              <a:defRPr sz="2000">
+                <a:solidFill>
+                  <a:srgbClr val="111111"/>
+                </a:solidFill>
+              </a:defRPr>
             </a:lvl8pPr>
-            <a:lvl9pPr marL="2743200" indent="0">
+            <a:lvl9pPr marL="3657600" indent="0">
               <a:buNone/>
-              <a:defRPr sz="1500"/>
+              <a:defRPr sz="2000">
+                <a:solidFill>
+                  <a:srgbClr val="111111"/>
+                </a:solidFill>
+              </a:defRPr>
             </a:lvl9pPr>
           </a:lstStyle>
           <a:p>
@@ -2461,8 +3038,8 @@
         </p:nvSpPr>
         <p:spPr>
           <a:xfrm>
-            <a:off x="1792288" y="4025503"/>
-            <a:ext cx="5486400" cy="603647"/>
+            <a:off x="1792288" y="5367338"/>
+            <a:ext cx="5486400" cy="804862"/>
           </a:xfrm>
         </p:spPr>
         <p:txBody>
@@ -2470,45 +3047,85 @@
           <a:lstStyle>
             <a:lvl1pPr marL="0" indent="0">
               <a:buNone/>
-              <a:defRPr sz="1050"/>
+              <a:defRPr sz="1400">
+                <a:solidFill>
+                  <a:srgbClr val="111111"/>
+                </a:solidFill>
+              </a:defRPr>
             </a:lvl1pPr>
-            <a:lvl2pPr marL="342900" indent="0">
+            <a:lvl2pPr marL="457200" indent="0">
               <a:buNone/>
-              <a:defRPr sz="900"/>
+              <a:defRPr sz="1200">
+                <a:solidFill>
+                  <a:srgbClr val="111111"/>
+                </a:solidFill>
+              </a:defRPr>
             </a:lvl2pPr>
-            <a:lvl3pPr marL="685800" indent="0">
+            <a:lvl3pPr marL="914400" indent="0">
               <a:buNone/>
-              <a:defRPr sz="750"/>
+              <a:defRPr sz="1000">
+                <a:solidFill>
+                  <a:srgbClr val="111111"/>
+                </a:solidFill>
+              </a:defRPr>
             </a:lvl3pPr>
-            <a:lvl4pPr marL="1028700" indent="0">
+            <a:lvl4pPr marL="1371600" indent="0">
               <a:buNone/>
-              <a:defRPr sz="675"/>
+              <a:defRPr sz="900">
+                <a:solidFill>
+                  <a:srgbClr val="111111"/>
+                </a:solidFill>
+              </a:defRPr>
             </a:lvl4pPr>
-            <a:lvl5pPr marL="1371600" indent="0">
+            <a:lvl5pPr marL="1828800" indent="0">
               <a:buNone/>
-              <a:defRPr sz="675"/>
+              <a:defRPr sz="900">
+                <a:solidFill>
+                  <a:srgbClr val="111111"/>
+                </a:solidFill>
+              </a:defRPr>
             </a:lvl5pPr>
-            <a:lvl6pPr marL="1714500" indent="0">
+            <a:lvl6pPr marL="2286000" indent="0">
               <a:buNone/>
-              <a:defRPr sz="675"/>
+              <a:defRPr sz="900">
+                <a:solidFill>
+                  <a:srgbClr val="111111"/>
+                </a:solidFill>
+              </a:defRPr>
             </a:lvl6pPr>
-            <a:lvl7pPr marL="2057400" indent="0">
+            <a:lvl7pPr marL="2743200" indent="0">
               <a:buNone/>
-              <a:defRPr sz="675"/>
+              <a:defRPr sz="900">
+                <a:solidFill>
+                  <a:srgbClr val="111111"/>
+                </a:solidFill>
+              </a:defRPr>
             </a:lvl7pPr>
-            <a:lvl8pPr marL="2400300" indent="0">
+            <a:lvl8pPr marL="3200400" indent="0">
               <a:buNone/>
-              <a:defRPr sz="675"/>
+              <a:defRPr sz="900">
+                <a:solidFill>
+                  <a:srgbClr val="111111"/>
+                </a:solidFill>
+              </a:defRPr>
             </a:lvl8pPr>
-            <a:lvl9pPr marL="2743200" indent="0">
+            <a:lvl9pPr marL="3657600" indent="0">
               <a:buNone/>
-              <a:defRPr sz="675"/>
+              <a:defRPr sz="900">
+                <a:solidFill>
+                  <a:srgbClr val="111111"/>
+                </a:solidFill>
+              </a:defRPr>
             </a:lvl9pPr>
           </a:lstStyle>
           <a:p>
             <a:pPr lvl="0"/>
             <a:r>
-              <a:rPr lang="en-US"/>
+              <a:rPr lang="en-US" smtClean="0">
+                <a:solidFill>
+                  <a:srgbClr val="111111"/>
+                </a:solidFill>
+              </a:rPr>
               <a:t>Click to edit Master text styles</a:t>
             </a:r>
           </a:p>
@@ -2529,9 +3146,13 @@
           <a:bodyPr/>
           <a:lstStyle/>
           <a:p>
-            <a:fld id="{241EB5C9-1307-BA42-ABA2-0BC069CD8E7F}" type="datetimeFigureOut">
-              <a:rPr lang="en-US" smtClean="0"/>
-              <a:t>1/2/22</a:t>
+            <a:fld id="{5BCAD085-E8A6-8845-BD4E-CB4CCA059FC4}" type="datetimeFigureOut">
+              <a:rPr lang="en-US" smtClean="0">
+                <a:solidFill>
+                  <a:srgbClr val="111111"/>
+                </a:solidFill>
+              </a:rPr>
+              <a:t>1/27/13</a:t>
             </a:fld>
             <a:endParaRPr lang="en-US"/>
           </a:p>
@@ -2571,8 +3192,12 @@
           <a:bodyPr/>
           <a:lstStyle/>
           <a:p>
-            <a:fld id="{C5EF2332-01BF-834F-8236-50238282D533}" type="slidenum">
-              <a:rPr lang="en-US" smtClean="0"/>
+            <a:fld id="{C1FF6DA9-008F-8B48-92A6-B652298478BF}" type="slidenum">
+              <a:rPr lang="en-US" smtClean="0">
+                <a:solidFill>
+                  <a:srgbClr val="111111"/>
+                </a:solidFill>
+              </a:rPr>
               <a:t>‹#›</a:t>
             </a:fld>
             <a:endParaRPr lang="en-US"/>
@@ -2582,7 +3207,7 @@
     </p:spTree>
     <p:extLst>
       <p:ext uri="{BB962C8B-B14F-4D97-AF65-F5344CB8AC3E}">
-        <p14:creationId xmlns:p14="http://schemas.microsoft.com/office/powerpoint/2010/main" val="3566899855"/>
+        <p14:creationId xmlns:p14="http://schemas.microsoft.com/office/powerpoint/2010/main" val="3889236939"/>
       </p:ext>
     </p:extLst>
   </p:cSld>
@@ -2596,9 +3221,12 @@
 <p:sldMaster xmlns:a="http://schemas.openxmlformats.org/drawingml/2006/main" xmlns:p="http://schemas.openxmlformats.org/presentationml/2006/main" xmlns:r="http://schemas.openxmlformats.org/officeDocument/2006/relationships">
   <p:cSld>
     <p:bg>
-      <p:bgRef idx="1001">
-        <a:schemeClr val="bg1"/>
-      </p:bgRef>
+      <p:bgPr>
+        <a:solidFill>
+          <a:srgbClr val="FFFFFF"/>
+        </a:solidFill>
+        <a:effectLst/>
+      </p:bgPr>
     </p:bg>
     <p:spTree>
       <p:nvGrpSpPr>
@@ -2626,8 +3254,8 @@
         </p:nvSpPr>
         <p:spPr>
           <a:xfrm>
-            <a:off x="457200" y="205979"/>
-            <a:ext cx="8229600" cy="857250"/>
+            <a:off x="457200" y="274638"/>
+            <a:ext cx="8229600" cy="1143000"/>
           </a:xfrm>
           <a:prstGeom prst="rect">
             <a:avLst/>
@@ -2640,9 +3268,14 @@
           <a:lstStyle/>
           <a:p>
             <a:r>
-              <a:rPr lang="en-US"/>
+              <a:rPr lang="en-US" smtClean="0">
+                <a:solidFill>
+                  <a:srgbClr val="111111"/>
+                </a:solidFill>
+              </a:rPr>
               <a:t>Click to edit Master title style</a:t>
             </a:r>
+            <a:endParaRPr lang="en-US"/>
           </a:p>
         </p:txBody>
       </p:sp>
@@ -2658,8 +3291,8 @@
         </p:nvSpPr>
         <p:spPr>
           <a:xfrm>
-            <a:off x="457200" y="1200151"/>
-            <a:ext cx="8229600" cy="3394472"/>
+            <a:off x="457200" y="1600200"/>
+            <a:ext cx="8229600" cy="4525963"/>
           </a:xfrm>
           <a:prstGeom prst="rect">
             <a:avLst/>
@@ -2673,37 +3306,58 @@
           <a:p>
             <a:pPr lvl="0"/>
             <a:r>
-              <a:rPr lang="en-US"/>
+              <a:rPr lang="en-US" smtClean="0">
+                <a:solidFill>
+                  <a:srgbClr val="111111"/>
+                </a:solidFill>
+              </a:rPr>
               <a:t>Click to edit Master text styles</a:t>
             </a:r>
           </a:p>
           <a:p>
             <a:pPr lvl="1"/>
             <a:r>
-              <a:rPr lang="en-US"/>
+              <a:rPr lang="en-US" smtClean="0">
+                <a:solidFill>
+                  <a:srgbClr val="111111"/>
+                </a:solidFill>
+              </a:rPr>
               <a:t>Second level</a:t>
             </a:r>
           </a:p>
           <a:p>
             <a:pPr lvl="2"/>
             <a:r>
-              <a:rPr lang="en-US"/>
+              <a:rPr lang="en-US" smtClean="0">
+                <a:solidFill>
+                  <a:srgbClr val="111111"/>
+                </a:solidFill>
+              </a:rPr>
               <a:t>Third level</a:t>
             </a:r>
           </a:p>
           <a:p>
             <a:pPr lvl="3"/>
             <a:r>
-              <a:rPr lang="en-US"/>
+              <a:rPr lang="en-US" smtClean="0">
+                <a:solidFill>
+                  <a:srgbClr val="111111"/>
+                </a:solidFill>
+              </a:rPr>
               <a:t>Fourth level</a:t>
             </a:r>
           </a:p>
           <a:p>
             <a:pPr lvl="4"/>
             <a:r>
-              <a:rPr lang="en-US"/>
+              <a:rPr lang="en-US" smtClean="0">
+                <a:solidFill>
+                  <a:srgbClr val="111111"/>
+                </a:solidFill>
+              </a:rPr>
               <a:t>Fifth level</a:t>
             </a:r>
+            <a:endParaRPr lang="en-US"/>
           </a:p>
         </p:txBody>
       </p:sp>
@@ -2719,8 +3373,8 @@
         </p:nvSpPr>
         <p:spPr>
           <a:xfrm>
-            <a:off x="457200" y="4767263"/>
-            <a:ext cx="2133600" cy="273844"/>
+            <a:off x="457200" y="6356350"/>
+            <a:ext cx="2133600" cy="365125"/>
           </a:xfrm>
           <a:prstGeom prst="rect">
             <a:avLst/>
@@ -2730,19 +3384,21 @@
           <a:bodyPr anchor="ctr" bIns="45720" lIns="91440" rIns="91440" rtlCol="0" tIns="45720" vert="horz"/>
           <a:lstStyle>
             <a:lvl1pPr algn="l">
-              <a:defRPr sz="900">
-                <a:solidFill>
-                  <a:schemeClr val="tx1">
-                    <a:tint val="75000"/>
-                  </a:schemeClr>
+              <a:defRPr sz="1200">
+                <a:solidFill>
+                  <a:srgbClr val="111111"/>
                 </a:solidFill>
               </a:defRPr>
             </a:lvl1pPr>
           </a:lstStyle>
           <a:p>
-            <a:fld id="{241EB5C9-1307-BA42-ABA2-0BC069CD8E7F}" type="datetimeFigureOut">
-              <a:rPr lang="en-US" smtClean="0"/>
-              <a:t>1/2/22</a:t>
+            <a:fld id="{5BCAD085-E8A6-8845-BD4E-CB4CCA059FC4}" type="datetimeFigureOut">
+              <a:rPr lang="en-US" smtClean="0">
+                <a:solidFill>
+                  <a:srgbClr val="111111"/>
+                </a:solidFill>
+              </a:rPr>
+              <a:t>1/27/13</a:t>
             </a:fld>
             <a:endParaRPr lang="en-US"/>
           </a:p>
@@ -2760,8 +3416,8 @@
         </p:nvSpPr>
         <p:spPr>
           <a:xfrm>
-            <a:off x="3124200" y="4767263"/>
-            <a:ext cx="2895600" cy="273844"/>
+            <a:off x="3124200" y="6356350"/>
+            <a:ext cx="2895600" cy="365125"/>
           </a:xfrm>
           <a:prstGeom prst="rect">
             <a:avLst/>
@@ -2771,11 +3427,9 @@
           <a:bodyPr anchor="ctr" bIns="45720" lIns="91440" rIns="91440" rtlCol="0" tIns="45720" vert="horz"/>
           <a:lstStyle>
             <a:lvl1pPr algn="ctr">
-              <a:defRPr sz="900">
-                <a:solidFill>
-                  <a:schemeClr val="tx1">
-                    <a:tint val="75000"/>
-                  </a:schemeClr>
+              <a:defRPr sz="1200">
+                <a:solidFill>
+                  <a:srgbClr val="111111"/>
                 </a:solidFill>
               </a:defRPr>
             </a:lvl1pPr>
@@ -2797,8 +3451,8 @@
         </p:nvSpPr>
         <p:spPr>
           <a:xfrm>
-            <a:off x="6553200" y="4767263"/>
-            <a:ext cx="2133600" cy="273844"/>
+            <a:off x="6553200" y="6356350"/>
+            <a:ext cx="2133600" cy="365125"/>
           </a:xfrm>
           <a:prstGeom prst="rect">
             <a:avLst/>
@@ -2808,18 +3462,20 @@
           <a:bodyPr anchor="ctr" bIns="45720" lIns="91440" rIns="91440" rtlCol="0" tIns="45720" vert="horz"/>
           <a:lstStyle>
             <a:lvl1pPr algn="r">
-              <a:defRPr sz="900">
-                <a:solidFill>
-                  <a:schemeClr val="tx1">
-                    <a:tint val="75000"/>
-                  </a:schemeClr>
+              <a:defRPr sz="1200">
+                <a:solidFill>
+                  <a:srgbClr val="111111"/>
                 </a:solidFill>
               </a:defRPr>
             </a:lvl1pPr>
           </a:lstStyle>
           <a:p>
-            <a:fld id="{C5EF2332-01BF-834F-8236-50238282D533}" type="slidenum">
-              <a:rPr lang="en-US" smtClean="0"/>
+            <a:fld id="{C1FF6DA9-008F-8B48-92A6-B652298478BF}" type="slidenum">
+              <a:rPr lang="en-US" smtClean="0">
+                <a:solidFill>
+                  <a:srgbClr val="111111"/>
+                </a:solidFill>
+              </a:rPr>
               <a:t>‹#›</a:t>
             </a:fld>
             <a:endParaRPr lang="en-US"/>
@@ -2829,7 +3485,7 @@
     </p:spTree>
     <p:extLst>
       <p:ext uri="{BB962C8B-B14F-4D97-AF65-F5344CB8AC3E}">
-        <p14:creationId xmlns:p14="http://schemas.microsoft.com/office/powerpoint/2010/main" val="3676200875"/>
+        <p14:creationId xmlns:p14="http://schemas.microsoft.com/office/powerpoint/2010/main" val="2209977519"/>
       </p:ext>
     </p:extLst>
   </p:cSld>
@@ -2849,250 +3505,254 @@
   </p:sldLayoutIdLst>
   <p:txStyles>
     <p:titleStyle>
-      <a:lvl1pPr algn="ctr" defTabSz="342900" eaLnBrk="1" hangingPunct="1" latinLnBrk="0" rtl="0">
+      <a:lvl1pPr algn="ctr" defTabSz="457200" eaLnBrk="1" hangingPunct="1" latinLnBrk="0" rtl="0">
         <a:spcBef>
           <a:spcPct val="0"/>
         </a:spcBef>
         <a:buNone/>
-        <a:defRPr kern="1200" sz="3300">
-          <a:solidFill>
-            <a:schemeClr val="tx1"/>
-          </a:solidFill>
-          <a:latin typeface="+mj-lt"/>
+        <a:defRPr kern="1200" sz="4400">
+          <a:latin typeface="Cambria"/>
           <a:ea typeface="+mj-ea"/>
           <a:cs typeface="+mj-cs"/>
+          <a:solidFill>
+            <a:srgbClr val="111111"/>
+          </a:solidFill>
         </a:defRPr>
       </a:lvl1pPr>
     </p:titleStyle>
     <p:bodyStyle>
-      <a:lvl1pPr algn="l" defTabSz="342900" eaLnBrk="1" hangingPunct="1" indent="-342900" latinLnBrk="0" marL="342900" rtl="0">
+      <a:lvl1pPr algn="l" defTabSz="457200" eaLnBrk="1" hangingPunct="1" indent="-342900" latinLnBrk="0" marL="342900" rtl="0">
+        <a:spcBef>
+          <a:spcPct val="20000"/>
+        </a:spcBef>
+        <a:buFont typeface="Arial"/>
+        <a:buChar char="•"/>
+        <a:defRPr kern="1200" sz="3200">
+          <a:latin typeface="Cambria"/>
+          <a:ea typeface="+mn-ea"/>
+          <a:cs typeface="+mn-cs"/>
+          <a:solidFill>
+            <a:srgbClr val="111111"/>
+          </a:solidFill>
+        </a:defRPr>
+      </a:lvl1pPr>
+      <a:lvl2pPr algn="l" defTabSz="457200" eaLnBrk="1" hangingPunct="1" indent="-285750" latinLnBrk="0" marL="742950" rtl="0">
+        <a:spcBef>
+          <a:spcPct val="20000"/>
+        </a:spcBef>
+        <a:buFont typeface="Arial"/>
+        <a:buChar char="–"/>
+        <a:defRPr kern="1200" sz="2800">
+          <a:latin typeface="Cambria"/>
+          <a:ea typeface="+mn-ea"/>
+          <a:cs typeface="+mn-cs"/>
+          <a:solidFill>
+            <a:srgbClr val="111111"/>
+          </a:solidFill>
+        </a:defRPr>
+      </a:lvl2pPr>
+      <a:lvl3pPr algn="l" defTabSz="457200" eaLnBrk="1" hangingPunct="1" indent="-228600" latinLnBrk="0" marL="1143000" rtl="0">
         <a:spcBef>
           <a:spcPct val="20000"/>
         </a:spcBef>
         <a:buFont typeface="Arial"/>
         <a:buChar char="•"/>
         <a:defRPr kern="1200" sz="2400">
-          <a:solidFill>
-            <a:schemeClr val="tx1"/>
-          </a:solidFill>
-          <a:latin typeface="+mn-lt"/>
+          <a:latin typeface="Cambria"/>
           <a:ea typeface="+mn-ea"/>
           <a:cs typeface="+mn-cs"/>
+          <a:solidFill>
+            <a:srgbClr val="111111"/>
+          </a:solidFill>
         </a:defRPr>
-      </a:lvl1pPr>
-      <a:lvl2pPr algn="l" defTabSz="342900" eaLnBrk="1" hangingPunct="1" indent="-342900" latinLnBrk="0" marL="685800" rtl="0">
+      </a:lvl3pPr>
+      <a:lvl4pPr algn="l" defTabSz="457200" eaLnBrk="1" hangingPunct="1" indent="-228600" latinLnBrk="0" marL="1600200" rtl="0">
         <a:spcBef>
           <a:spcPct val="20000"/>
         </a:spcBef>
         <a:buFont typeface="Arial"/>
         <a:buChar char="–"/>
-        <a:defRPr kern="1200" sz="2100">
-          <a:solidFill>
-            <a:schemeClr val="tx1"/>
-          </a:solidFill>
-          <a:latin typeface="+mn-lt"/>
+        <a:defRPr kern="1200" sz="2000">
+          <a:latin typeface="Cambria"/>
           <a:ea typeface="+mn-ea"/>
           <a:cs typeface="+mn-cs"/>
+          <a:solidFill>
+            <a:srgbClr val="111111"/>
+          </a:solidFill>
         </a:defRPr>
-      </a:lvl2pPr>
-      <a:lvl3pPr algn="l" defTabSz="342900" eaLnBrk="1" hangingPunct="1" indent="-342900" latinLnBrk="0" marL="1028700" rtl="0">
+      </a:lvl4pPr>
+      <a:lvl5pPr algn="l" defTabSz="457200" eaLnBrk="1" hangingPunct="1" indent="-228600" latinLnBrk="0" marL="2057400" rtl="0">
+        <a:spcBef>
+          <a:spcPct val="20000"/>
+        </a:spcBef>
+        <a:buFont typeface="Arial"/>
+        <a:buChar char="»"/>
+        <a:defRPr kern="1200" sz="2000">
+          <a:latin typeface="Cambria"/>
+          <a:ea typeface="+mn-ea"/>
+          <a:cs typeface="+mn-cs"/>
+          <a:solidFill>
+            <a:srgbClr val="111111"/>
+          </a:solidFill>
+        </a:defRPr>
+      </a:lvl5pPr>
+      <a:lvl6pPr algn="l" defTabSz="457200" eaLnBrk="1" hangingPunct="1" indent="-228600" latinLnBrk="0" marL="2514600" rtl="0">
         <a:spcBef>
           <a:spcPct val="20000"/>
         </a:spcBef>
         <a:buFont typeface="Arial"/>
         <a:buChar char="•"/>
-        <a:defRPr kern="1200" sz="1800">
-          <a:solidFill>
-            <a:schemeClr val="tx1"/>
-          </a:solidFill>
-          <a:latin typeface="+mn-lt"/>
+        <a:defRPr kern="1200" sz="2000">
+          <a:latin typeface="Cambria"/>
           <a:ea typeface="+mn-ea"/>
           <a:cs typeface="+mn-cs"/>
+          <a:solidFill>
+            <a:srgbClr val="111111"/>
+          </a:solidFill>
         </a:defRPr>
-      </a:lvl3pPr>
-      <a:lvl4pPr algn="l" defTabSz="342900" eaLnBrk="1" hangingPunct="1" indent="-342900" latinLnBrk="0" marL="1371600" rtl="0">
-        <a:spcBef>
-          <a:spcPct val="20000"/>
-        </a:spcBef>
-        <a:buFont typeface="Arial"/>
-        <a:buChar char="–"/>
-        <a:defRPr kern="1200" sz="1500">
-          <a:solidFill>
-            <a:schemeClr val="tx1"/>
-          </a:solidFill>
-          <a:latin typeface="+mn-lt"/>
-          <a:ea typeface="+mn-ea"/>
-          <a:cs typeface="+mn-cs"/>
-        </a:defRPr>
-      </a:lvl4pPr>
-      <a:lvl5pPr algn="l" defTabSz="342900" eaLnBrk="1" hangingPunct="1" indent="-342900" latinLnBrk="0" marL="1714500" rtl="0">
-        <a:spcBef>
-          <a:spcPct val="20000"/>
-        </a:spcBef>
-        <a:buFont typeface="Arial"/>
-        <a:buChar char="»"/>
-        <a:defRPr kern="1200" sz="1500">
-          <a:solidFill>
-            <a:schemeClr val="tx1"/>
-          </a:solidFill>
-          <a:latin typeface="+mn-lt"/>
-          <a:ea typeface="+mn-ea"/>
-          <a:cs typeface="+mn-cs"/>
-        </a:defRPr>
-      </a:lvl5pPr>
-      <a:lvl6pPr algn="l" defTabSz="342900" eaLnBrk="1" hangingPunct="1" indent="-342900" latinLnBrk="0" marL="2057400" rtl="0">
+      </a:lvl6pPr>
+      <a:lvl7pPr algn="l" defTabSz="457200" eaLnBrk="1" hangingPunct="1" indent="-228600" latinLnBrk="0" marL="2971800" rtl="0">
         <a:spcBef>
           <a:spcPct val="20000"/>
         </a:spcBef>
         <a:buFont typeface="Arial"/>
         <a:buChar char="•"/>
-        <a:defRPr kern="1200" sz="1500">
-          <a:solidFill>
-            <a:schemeClr val="tx1"/>
-          </a:solidFill>
-          <a:latin typeface="+mn-lt"/>
+        <a:defRPr kern="1200" sz="2000">
+          <a:latin typeface="Cambria"/>
           <a:ea typeface="+mn-ea"/>
           <a:cs typeface="+mn-cs"/>
+          <a:solidFill>
+            <a:srgbClr val="111111"/>
+          </a:solidFill>
         </a:defRPr>
-      </a:lvl6pPr>
-      <a:lvl7pPr algn="l" defTabSz="342900" eaLnBrk="1" hangingPunct="1" indent="-342900" latinLnBrk="0" marL="2400300" rtl="0">
+      </a:lvl7pPr>
+      <a:lvl8pPr algn="l" defTabSz="457200" eaLnBrk="1" hangingPunct="1" indent="-228600" latinLnBrk="0" marL="3429000" rtl="0">
         <a:spcBef>
           <a:spcPct val="20000"/>
         </a:spcBef>
         <a:buFont typeface="Arial"/>
         <a:buChar char="•"/>
-        <a:defRPr kern="1200" sz="1500">
-          <a:solidFill>
-            <a:schemeClr val="tx1"/>
-          </a:solidFill>
-          <a:latin typeface="+mn-lt"/>
+        <a:defRPr kern="1200" sz="2000">
+          <a:latin typeface="Cambria"/>
           <a:ea typeface="+mn-ea"/>
           <a:cs typeface="+mn-cs"/>
+          <a:solidFill>
+            <a:srgbClr val="111111"/>
+          </a:solidFill>
         </a:defRPr>
-      </a:lvl7pPr>
-      <a:lvl8pPr algn="l" defTabSz="342900" eaLnBrk="1" hangingPunct="1" indent="-342900" latinLnBrk="0" marL="2743200" rtl="0">
+      </a:lvl8pPr>
+      <a:lvl9pPr algn="l" defTabSz="457200" eaLnBrk="1" hangingPunct="1" indent="-228600" latinLnBrk="0" marL="3886200" rtl="0">
         <a:spcBef>
           <a:spcPct val="20000"/>
         </a:spcBef>
         <a:buFont typeface="Arial"/>
         <a:buChar char="•"/>
-        <a:defRPr kern="1200" sz="1500">
-          <a:solidFill>
-            <a:schemeClr val="tx1"/>
-          </a:solidFill>
-          <a:latin typeface="+mn-lt"/>
+        <a:defRPr kern="1200" sz="2000">
+          <a:latin typeface="Cambria"/>
           <a:ea typeface="+mn-ea"/>
           <a:cs typeface="+mn-cs"/>
-        </a:defRPr>
-      </a:lvl8pPr>
-      <a:lvl9pPr algn="l" defTabSz="342900" eaLnBrk="1" hangingPunct="1" indent="-342900" latinLnBrk="0" marL="3086100" rtl="0">
-        <a:spcBef>
-          <a:spcPct val="20000"/>
-        </a:spcBef>
-        <a:buFont typeface="Arial"/>
-        <a:buChar char="•"/>
-        <a:defRPr kern="1200" sz="1500">
           <a:solidFill>
-            <a:schemeClr val="tx1"/>
+            <a:srgbClr val="111111"/>
           </a:solidFill>
-          <a:latin typeface="+mn-lt"/>
-          <a:ea typeface="+mn-ea"/>
-          <a:cs typeface="+mn-cs"/>
         </a:defRPr>
       </a:lvl9pPr>
     </p:bodyStyle>
     <p:otherStyle>
       <a:defPPr>
-        <a:defRPr lang="en-US"/>
+        <a:defRPr lang="en-US">
+          <a:solidFill>
+            <a:srgbClr val="111111"/>
+          </a:solidFill>
+        </a:defRPr>
       </a:defPPr>
-      <a:lvl1pPr algn="l" defTabSz="342900" eaLnBrk="1" hangingPunct="1" latinLnBrk="0" marL="0" rtl="0">
-        <a:defRPr kern="1200" sz="1350">
-          <a:solidFill>
-            <a:schemeClr val="tx1"/>
-          </a:solidFill>
-          <a:latin typeface="+mn-lt"/>
+      <a:lvl1pPr algn="l" defTabSz="457200" eaLnBrk="1" hangingPunct="1" latinLnBrk="0" marL="0" rtl="0">
+        <a:defRPr kern="1200" sz="1800">
+          <a:latin typeface="Cambria"/>
           <a:ea typeface="+mn-ea"/>
           <a:cs typeface="+mn-cs"/>
+          <a:solidFill>
+            <a:srgbClr val="111111"/>
+          </a:solidFill>
         </a:defRPr>
       </a:lvl1pPr>
-      <a:lvl2pPr algn="l" defTabSz="342900" eaLnBrk="1" hangingPunct="1" latinLnBrk="0" marL="342900" rtl="0">
-        <a:defRPr kern="1200" sz="1350">
-          <a:solidFill>
-            <a:schemeClr val="tx1"/>
-          </a:solidFill>
-          <a:latin typeface="+mn-lt"/>
+      <a:lvl2pPr algn="l" defTabSz="457200" eaLnBrk="1" hangingPunct="1" latinLnBrk="0" marL="457200" rtl="0">
+        <a:defRPr kern="1200" sz="1800">
+          <a:latin typeface="Cambria"/>
           <a:ea typeface="+mn-ea"/>
           <a:cs typeface="+mn-cs"/>
+          <a:solidFill>
+            <a:srgbClr val="111111"/>
+          </a:solidFill>
         </a:defRPr>
       </a:lvl2pPr>
-      <a:lvl3pPr algn="l" defTabSz="342900" eaLnBrk="1" hangingPunct="1" latinLnBrk="0" marL="685800" rtl="0">
-        <a:defRPr kern="1200" sz="1350">
-          <a:solidFill>
-            <a:schemeClr val="tx1"/>
-          </a:solidFill>
-          <a:latin typeface="+mn-lt"/>
+      <a:lvl3pPr algn="l" defTabSz="457200" eaLnBrk="1" hangingPunct="1" latinLnBrk="0" marL="914400" rtl="0">
+        <a:defRPr kern="1200" sz="1800">
+          <a:latin typeface="Cambria"/>
           <a:ea typeface="+mn-ea"/>
           <a:cs typeface="+mn-cs"/>
+          <a:solidFill>
+            <a:srgbClr val="111111"/>
+          </a:solidFill>
         </a:defRPr>
       </a:lvl3pPr>
-      <a:lvl4pPr algn="l" defTabSz="342900" eaLnBrk="1" hangingPunct="1" latinLnBrk="0" marL="1028700" rtl="0">
-        <a:defRPr kern="1200" sz="1350">
-          <a:solidFill>
-            <a:schemeClr val="tx1"/>
-          </a:solidFill>
-          <a:latin typeface="+mn-lt"/>
+      <a:lvl4pPr algn="l" defTabSz="457200" eaLnBrk="1" hangingPunct="1" latinLnBrk="0" marL="1371600" rtl="0">
+        <a:defRPr kern="1200" sz="1800">
+          <a:latin typeface="Cambria"/>
           <a:ea typeface="+mn-ea"/>
           <a:cs typeface="+mn-cs"/>
+          <a:solidFill>
+            <a:srgbClr val="111111"/>
+          </a:solidFill>
         </a:defRPr>
       </a:lvl4pPr>
-      <a:lvl5pPr algn="l" defTabSz="342900" eaLnBrk="1" hangingPunct="1" latinLnBrk="0" marL="1371600" rtl="0">
-        <a:defRPr kern="1200" sz="1350">
-          <a:solidFill>
-            <a:schemeClr val="tx1"/>
-          </a:solidFill>
-          <a:latin typeface="+mn-lt"/>
+      <a:lvl5pPr algn="l" defTabSz="457200" eaLnBrk="1" hangingPunct="1" latinLnBrk="0" marL="1828800" rtl="0">
+        <a:defRPr kern="1200" sz="1800">
+          <a:latin typeface="Cambria"/>
           <a:ea typeface="+mn-ea"/>
           <a:cs typeface="+mn-cs"/>
+          <a:solidFill>
+            <a:srgbClr val="111111"/>
+          </a:solidFill>
         </a:defRPr>
       </a:lvl5pPr>
-      <a:lvl6pPr algn="l" defTabSz="342900" eaLnBrk="1" hangingPunct="1" latinLnBrk="0" marL="1714500" rtl="0">
-        <a:defRPr kern="1200" sz="1350">
-          <a:solidFill>
-            <a:schemeClr val="tx1"/>
-          </a:solidFill>
-          <a:latin typeface="+mn-lt"/>
+      <a:lvl6pPr algn="l" defTabSz="457200" eaLnBrk="1" hangingPunct="1" latinLnBrk="0" marL="2286000" rtl="0">
+        <a:defRPr kern="1200" sz="1800">
+          <a:latin typeface="Cambria"/>
           <a:ea typeface="+mn-ea"/>
           <a:cs typeface="+mn-cs"/>
+          <a:solidFill>
+            <a:srgbClr val="111111"/>
+          </a:solidFill>
         </a:defRPr>
       </a:lvl6pPr>
-      <a:lvl7pPr algn="l" defTabSz="342900" eaLnBrk="1" hangingPunct="1" latinLnBrk="0" marL="2057400" rtl="0">
-        <a:defRPr kern="1200" sz="1350">
-          <a:solidFill>
-            <a:schemeClr val="tx1"/>
-          </a:solidFill>
-          <a:latin typeface="+mn-lt"/>
+      <a:lvl7pPr algn="l" defTabSz="457200" eaLnBrk="1" hangingPunct="1" latinLnBrk="0" marL="2743200" rtl="0">
+        <a:defRPr kern="1200" sz="1800">
+          <a:latin typeface="Cambria"/>
           <a:ea typeface="+mn-ea"/>
           <a:cs typeface="+mn-cs"/>
+          <a:solidFill>
+            <a:srgbClr val="111111"/>
+          </a:solidFill>
         </a:defRPr>
       </a:lvl7pPr>
-      <a:lvl8pPr algn="l" defTabSz="342900" eaLnBrk="1" hangingPunct="1" latinLnBrk="0" marL="2400300" rtl="0">
-        <a:defRPr kern="1200" sz="1350">
-          <a:solidFill>
-            <a:schemeClr val="tx1"/>
-          </a:solidFill>
-          <a:latin typeface="+mn-lt"/>
+      <a:lvl8pPr algn="l" defTabSz="457200" eaLnBrk="1" hangingPunct="1" latinLnBrk="0" marL="3200400" rtl="0">
+        <a:defRPr kern="1200" sz="1800">
+          <a:latin typeface="Cambria"/>
           <a:ea typeface="+mn-ea"/>
           <a:cs typeface="+mn-cs"/>
+          <a:solidFill>
+            <a:srgbClr val="111111"/>
+          </a:solidFill>
         </a:defRPr>
       </a:lvl8pPr>
-      <a:lvl9pPr algn="l" defTabSz="342900" eaLnBrk="1" hangingPunct="1" latinLnBrk="0" marL="2743200" rtl="0">
-        <a:defRPr kern="1200" sz="1350">
-          <a:solidFill>
-            <a:schemeClr val="tx1"/>
-          </a:solidFill>
-          <a:latin typeface="+mn-lt"/>
+      <a:lvl9pPr algn="l" defTabSz="457200" eaLnBrk="1" hangingPunct="1" latinLnBrk="0" marL="3657600" rtl="0">
+        <a:defRPr kern="1200" sz="1800">
+          <a:latin typeface="Cambria"/>
           <a:ea typeface="+mn-ea"/>
           <a:cs typeface="+mn-cs"/>
+          <a:solidFill>
+            <a:srgbClr val="111111"/>
+          </a:solidFill>
         </a:defRPr>
       </a:lvl9pPr>
     </p:otherStyle>
@@ -3129,8 +3789,8 @@
         </p:nvSpPr>
         <p:spPr>
           <a:xfrm>
-            <a:off x="685800" y="1597819"/>
-            <a:ext cx="7772400" cy="1102519"/>
+            <a:off x="685800" y="2130425"/>
+            <a:ext cx="7772400" cy="1470025"/>
           </a:xfrm>
         </p:spPr>
         <p:txBody>
@@ -3159,8 +3819,8 @@
         </p:nvSpPr>
         <p:spPr>
           <a:xfrm>
-            <a:off x="1371600" y="2914650"/>
-            <a:ext cx="6400800" cy="1314450"/>
+            <a:off x="1371600" y="3886200"/>
+            <a:ext cx="6400800" cy="1752600"/>
           </a:xfrm>
         </p:spPr>
         <p:txBody>
@@ -10466,8 +11126,8 @@
         </p:nvSpPr>
         <p:spPr>
           <a:xfrm>
-            <a:off x="722313" y="3305176"/>
-            <a:ext cx="7772400" cy="1021556"/>
+            <a:off x="722313" y="4406900"/>
+            <a:ext cx="7772400" cy="1362075"/>
           </a:xfrm>
         </p:spPr>
         <p:txBody>
@@ -12350,8 +13010,8 @@
         </p:nvSpPr>
         <p:spPr>
           <a:xfrm>
-            <a:off x="722313" y="3305176"/>
-            <a:ext cx="7772400" cy="1021556"/>
+            <a:off x="722313" y="4406900"/>
+            <a:ext cx="7772400" cy="1362075"/>
           </a:xfrm>
         </p:spPr>
         <p:txBody>
@@ -12442,7 +13102,7 @@
             </a:r>
           </a:p>
           <a:p>
-            <a:pPr lvl="0" indent="-342900" marL="342900">
+            <a:pPr lvl="0" indent="-457200" marL="457200">
               <a:buAutoNum type="alphaLcPeriod"/>
             </a:pPr>
             <a:r>
@@ -12475,7 +13135,7 @@
             </a:r>
           </a:p>
           <a:p>
-            <a:pPr lvl="0" indent="-342900" marL="342900">
+            <a:pPr lvl="0" indent="-457200" marL="457200">
               <a:buAutoNum type="alphaLcPeriod"/>
             </a:pPr>
             <a:r>
@@ -12488,7 +13148,7 @@
             </a:r>
           </a:p>
           <a:p>
-            <a:pPr lvl="0" indent="-342900" marL="342900">
+            <a:pPr lvl="0" indent="-457200" marL="457200">
               <a:buAutoNum type="alphaLcPeriod"/>
             </a:pPr>
             <a:r>
@@ -12521,7 +13181,7 @@
             </a:r>
           </a:p>
           <a:p>
-            <a:pPr lvl="0" indent="-342900" marL="342900">
+            <a:pPr lvl="0" indent="-457200" marL="457200">
               <a:buAutoNum type="alphaLcPeriod"/>
             </a:pPr>
             <a:r>
@@ -12590,7 +13250,7 @@
             </a:r>
           </a:p>
           <a:p>
-            <a:pPr lvl="0" indent="-342900" marL="342900">
+            <a:pPr lvl="0" indent="-457200" marL="457200">
               <a:buAutoNum type="alphaLcPeriod"/>
             </a:pPr>
             <a:r>
@@ -12611,7 +13271,7 @@
             </a:r>
           </a:p>
           <a:p>
-            <a:pPr lvl="0" indent="-342900" marL="342900">
+            <a:pPr lvl="0" indent="-457200" marL="457200">
               <a:buAutoNum type="alphaLcPeriod"/>
             </a:pPr>
             <a:r>
@@ -12670,7 +13330,7 @@
             </a:r>
           </a:p>
           <a:p>
-            <a:pPr lvl="0" indent="-342900" marL="342900">
+            <a:pPr lvl="0" indent="-457200" marL="457200">
               <a:buAutoNum type="alphaLcPeriod"/>
             </a:pPr>
             <a:r>
@@ -12691,7 +13351,7 @@
             </a:r>
           </a:p>
           <a:p>
-            <a:pPr lvl="0" indent="-342900" marL="342900">
+            <a:pPr lvl="0" indent="-457200" marL="457200">
               <a:buAutoNum type="alphaLcPeriod"/>
             </a:pPr>
             <a:r>
@@ -12704,7 +13364,7 @@
             </a:r>
           </a:p>
           <a:p>
-            <a:pPr lvl="0" indent="-342900" marL="342900">
+            <a:pPr lvl="0" indent="-457200" marL="457200">
               <a:buAutoNum type="alphaLcPeriod"/>
             </a:pPr>
             <a:r>
@@ -12717,7 +13377,7 @@
             </a:r>
           </a:p>
           <a:p>
-            <a:pPr lvl="0" indent="-342900" marL="342900">
+            <a:pPr lvl="0" indent="-457200" marL="457200">
               <a:buAutoNum type="alphaLcPeriod"/>
             </a:pPr>
             <a:r>
@@ -12764,7 +13424,7 @@
             </a:r>
           </a:p>
           <a:p>
-            <a:pPr lvl="0" indent="-342900" marL="342900">
+            <a:pPr lvl="0" indent="-457200" marL="457200">
               <a:buAutoNum type="alphaLcPeriod"/>
             </a:pPr>
             <a:r>
@@ -12895,7 +13555,7 @@
             </a:r>
           </a:p>
           <a:p>
-            <a:pPr lvl="0" indent="-342900" marL="342900">
+            <a:pPr lvl="0" indent="-457200" marL="457200">
               <a:buAutoNum type="arabicPeriod"/>
             </a:pPr>
             <a:r>
@@ -12922,7 +13582,7 @@
             </a:r>
           </a:p>
           <a:p>
-            <a:pPr lvl="0" indent="-342900" marL="342900">
+            <a:pPr lvl="0" indent="-457200" marL="457200">
               <a:buAutoNum type="arabicPeriod"/>
             </a:pPr>
             <a:r>
@@ -13103,8 +13763,8 @@
         </p:nvSpPr>
         <p:spPr>
           <a:xfrm>
-            <a:off x="722313" y="3305176"/>
-            <a:ext cx="7772400" cy="1021556"/>
+            <a:off x="722313" y="4406900"/>
+            <a:ext cx="7772400" cy="1362075"/>
           </a:xfrm>
         </p:spPr>
         <p:txBody>
@@ -13460,7 +14120,7 @@
           <a:bodyPr/>
           <a:lstStyle/>
           <a:p>
-            <a:pPr lvl="0" indent="-342900" marL="342900">
+            <a:pPr lvl="0" indent="-457200" marL="457200">
               <a:buAutoNum type="arabicPeriod"/>
             </a:pPr>
             <a:r>
@@ -13743,8 +14403,8 @@
           </p:nvPr>
         </p:nvGraphicFramePr>
         <p:xfrm>
-          <a:off x="457200" y="1193800"/>
-          <a:ext cx="8229600" cy="3390900"/>
+          <a:off x="457200" y="1600200"/>
+          <a:ext cx="8229600" cy="4521200"/>
         </p:xfrm>
         <a:graphic>
           <a:graphicData uri="http://schemas.openxmlformats.org/drawingml/2006/table">
@@ -14350,8 +15010,8 @@
         </p:nvSpPr>
         <p:spPr>
           <a:xfrm>
-            <a:off x="722313" y="3305176"/>
-            <a:ext cx="7772400" cy="1021556"/>
+            <a:off x="722313" y="4406900"/>
+            <a:ext cx="7772400" cy="1362075"/>
           </a:xfrm>
         </p:spPr>
         <p:txBody>

--- a/courses/research-in-finance/lectures/lecture-03-statistical-analysis/slides.pptx
+++ b/courses/research-in-finance/lectures/lecture-03-statistical-analysis/slides.pptx
@@ -4,7 +4,37 @@
   <p:sldMasterIdLst>
     <p:sldMasterId id="2147483648" r:id="rId1"/>
   </p:sldMasterIdLst>
-  <p:sldSz cx="12191695" cy="6858000" type="screen4x3"/>
+  <p:sldIdLst>
+    <p:sldId id="256" r:id="rId2"/>
+    <p:sldId id="257" r:id="rId3"/>
+    <p:sldId id="258" r:id="rId4"/>
+    <p:sldId id="259" r:id="rId5"/>
+    <p:sldId id="260" r:id="rId6"/>
+    <p:sldId id="261" r:id="rId7"/>
+    <p:sldId id="262" r:id="rId8"/>
+    <p:sldId id="263" r:id="rId9"/>
+    <p:sldId id="264" r:id="rId10"/>
+    <p:sldId id="265" r:id="rId11"/>
+    <p:sldId id="266" r:id="rId12"/>
+    <p:sldId id="267" r:id="rId13"/>
+    <p:sldId id="268" r:id="rId14"/>
+    <p:sldId id="269" r:id="rId15"/>
+    <p:sldId id="270" r:id="rId16"/>
+    <p:sldId id="271" r:id="rId17"/>
+    <p:sldId id="272" r:id="rId18"/>
+    <p:sldId id="273" r:id="rId19"/>
+    <p:sldId id="274" r:id="rId20"/>
+    <p:sldId id="275" r:id="rId21"/>
+    <p:sldId id="276" r:id="rId22"/>
+    <p:sldId id="277" r:id="rId23"/>
+    <p:sldId id="278" r:id="rId24"/>
+    <p:sldId id="279" r:id="rId25"/>
+    <p:sldId id="280" r:id="rId26"/>
+    <p:sldId id="281" r:id="rId27"/>
+    <p:sldId id="282" r:id="rId28"/>
+    <p:sldId id="283" r:id="rId29"/>
+  </p:sldIdLst>
+  <p:sldSz cx="9144000" cy="5143500" type="screen16x9"/>
   <p:notesSz cx="6858000" cy="9144000"/>
   <p:defaultTextStyle>
     <a:defPPr>
@@ -101,6 +131,22 @@
       </a:defRPr>
     </a:lvl9pPr>
   </p:defaultTextStyle>
+  <p:extLst>
+    <p:ext uri="{EFAFB233-063F-42B5-8137-9DF3F51BA10A}">
+      <p15:sldGuideLst xmlns:p15="http://schemas.microsoft.com/office/powerpoint/2012/main">
+        <p15:guide id="1" orient="horz" pos="1620" userDrawn="1">
+          <p15:clr>
+            <a:srgbClr val="A4A3A4"/>
+          </p15:clr>
+        </p15:guide>
+        <p15:guide id="2" pos="2880" userDrawn="1">
+          <p15:clr>
+            <a:srgbClr val="A4A3A4"/>
+          </p15:clr>
+        </p15:guide>
+      </p15:sldGuideLst>
+    </p:ext>
+  </p:extLst>
 </p:presentation>
 </file>
 
@@ -133,8 +179,8 @@
         </p:nvSpPr>
         <p:spPr>
           <a:xfrm>
-            <a:off x="685800" y="2130425"/>
-            <a:ext cx="7772400" cy="1470025"/>
+            <a:off x="685800" y="1597819"/>
+            <a:ext cx="7772400" cy="1102519"/>
           </a:xfrm>
         </p:spPr>
         <p:txBody>
@@ -142,14 +188,13 @@
           <a:lstStyle/>
           <a:p>
             <a:r>
-              <a:rPr lang="en-US" smtClean="0">
+              <a:rPr lang="en-US">
                 <a:solidFill>
                   <a:srgbClr val="111111"/>
                 </a:solidFill>
               </a:rPr>
               <a:t>Click to edit Master title style</a:t>
             </a:r>
-            <a:endParaRPr lang="en-US"/>
           </a:p>
         </p:txBody>
       </p:sp>
@@ -165,8 +210,8 @@
         </p:nvSpPr>
         <p:spPr>
           <a:xfrm>
-            <a:off x="1371600" y="3886200"/>
-            <a:ext cx="6400800" cy="1752600"/>
+            <a:off x="1371600" y="2914650"/>
+            <a:ext cx="6400800" cy="1314450"/>
           </a:xfrm>
         </p:spPr>
         <p:txBody>
@@ -180,7 +225,7 @@
                 </a:solidFill>
               </a:defRPr>
             </a:lvl1pPr>
-            <a:lvl2pPr marL="457200" indent="0" algn="ctr">
+            <a:lvl2pPr marL="342900" indent="0" algn="ctr">
               <a:buNone/>
               <a:defRPr>
                 <a:solidFill>
@@ -188,7 +233,7 @@
                 </a:solidFill>
               </a:defRPr>
             </a:lvl2pPr>
-            <a:lvl3pPr marL="914400" indent="0" algn="ctr">
+            <a:lvl3pPr marL="685800" indent="0" algn="ctr">
               <a:buNone/>
               <a:defRPr>
                 <a:solidFill>
@@ -196,7 +241,7 @@
                 </a:solidFill>
               </a:defRPr>
             </a:lvl3pPr>
-            <a:lvl4pPr marL="1371600" indent="0" algn="ctr">
+            <a:lvl4pPr marL="1028700" indent="0" algn="ctr">
               <a:buNone/>
               <a:defRPr>
                 <a:solidFill>
@@ -204,7 +249,7 @@
                 </a:solidFill>
               </a:defRPr>
             </a:lvl4pPr>
-            <a:lvl5pPr marL="1828800" indent="0" algn="ctr">
+            <a:lvl5pPr marL="1371600" indent="0" algn="ctr">
               <a:buNone/>
               <a:defRPr>
                 <a:solidFill>
@@ -212,7 +257,7 @@
                 </a:solidFill>
               </a:defRPr>
             </a:lvl5pPr>
-            <a:lvl6pPr marL="2286000" indent="0" algn="ctr">
+            <a:lvl6pPr marL="1714500" indent="0" algn="ctr">
               <a:buNone/>
               <a:defRPr>
                 <a:solidFill>
@@ -220,7 +265,7 @@
                 </a:solidFill>
               </a:defRPr>
             </a:lvl6pPr>
-            <a:lvl7pPr marL="2743200" indent="0" algn="ctr">
+            <a:lvl7pPr marL="2057400" indent="0" algn="ctr">
               <a:buNone/>
               <a:defRPr>
                 <a:solidFill>
@@ -228,7 +273,7 @@
                 </a:solidFill>
               </a:defRPr>
             </a:lvl7pPr>
-            <a:lvl8pPr marL="3200400" indent="0" algn="ctr">
+            <a:lvl8pPr marL="2400300" indent="0" algn="ctr">
               <a:buNone/>
               <a:defRPr>
                 <a:solidFill>
@@ -236,7 +281,7 @@
                 </a:solidFill>
               </a:defRPr>
             </a:lvl8pPr>
-            <a:lvl9pPr marL="3657600" indent="0" algn="ctr">
+            <a:lvl9pPr marL="2743200" indent="0" algn="ctr">
               <a:buNone/>
               <a:defRPr>
                 <a:solidFill>
@@ -247,14 +292,13 @@
           </a:lstStyle>
           <a:p>
             <a:r>
-              <a:rPr lang="en-US" smtClean="0">
+              <a:rPr lang="en-US">
                 <a:solidFill>
                   <a:srgbClr val="111111"/>
                 </a:solidFill>
               </a:rPr>
               <a:t>Click to edit Master subtitle style</a:t>
             </a:r>
-            <a:endParaRPr lang="en-US"/>
           </a:p>
         </p:txBody>
       </p:sp>
@@ -273,15 +317,19 @@
           <a:bodyPr/>
           <a:lstStyle/>
           <a:p>
-            <a:fld id="{5BCAD085-E8A6-8845-BD4E-CB4CCA059FC4}" type="datetimeFigureOut">
+            <a:fld id="{241EB5C9-1307-BA42-ABA2-0BC069CD8E7F}" type="datetimeFigureOut">
               <a:rPr lang="en-US" smtClean="0">
                 <a:solidFill>
                   <a:srgbClr val="111111"/>
                 </a:solidFill>
               </a:rPr>
-              <a:t>1/27/13</a:t>
+              <a:t>1/2/22</a:t>
             </a:fld>
-            <a:endParaRPr lang="en-US"/>
+            <a:endParaRPr lang="en-US">
+              <a:solidFill>
+                <a:srgbClr val="111111"/>
+              </a:solidFill>
+            </a:endParaRPr>
           </a:p>
         </p:txBody>
       </p:sp>
@@ -300,7 +348,11 @@
           <a:bodyPr/>
           <a:lstStyle/>
           <a:p>
-            <a:endParaRPr lang="en-US"/>
+            <a:endParaRPr lang="en-US">
+              <a:solidFill>
+                <a:srgbClr val="111111"/>
+              </a:solidFill>
+            </a:endParaRPr>
           </a:p>
         </p:txBody>
       </p:sp>
@@ -319,7 +371,7 @@
           <a:bodyPr/>
           <a:lstStyle/>
           <a:p>
-            <a:fld id="{C1FF6DA9-008F-8B48-92A6-B652298478BF}" type="slidenum">
+            <a:fld id="{C5EF2332-01BF-834F-8236-50238282D533}" type="slidenum">
               <a:rPr lang="en-US" smtClean="0">
                 <a:solidFill>
                   <a:srgbClr val="111111"/>
@@ -327,14 +379,18 @@
               </a:rPr>
               <a:t>‹#›</a:t>
             </a:fld>
-            <a:endParaRPr lang="en-US"/>
+            <a:endParaRPr lang="en-US">
+              <a:solidFill>
+                <a:srgbClr val="111111"/>
+              </a:solidFill>
+            </a:endParaRPr>
           </a:p>
         </p:txBody>
       </p:sp>
     </p:spTree>
     <p:extLst>
       <p:ext uri="{BB962C8B-B14F-4D97-AF65-F5344CB8AC3E}">
-        <p14:creationId xmlns:p14="http://schemas.microsoft.com/office/powerpoint/2010/main" val="3168075583"/>
+        <p14:creationId xmlns:p14="http://schemas.microsoft.com/office/powerpoint/2010/main" val="1444357513"/>
       </p:ext>
     </p:extLst>
   </p:cSld>
@@ -377,14 +433,13 @@
           <a:lstStyle/>
           <a:p>
             <a:r>
-              <a:rPr lang="en-US" smtClean="0">
+              <a:rPr lang="en-US">
                 <a:solidFill>
                   <a:srgbClr val="111111"/>
                 </a:solidFill>
               </a:rPr>
               <a:t>Click to edit Master title style</a:t>
             </a:r>
-            <a:endParaRPr lang="en-US"/>
           </a:p>
         </p:txBody>
       </p:sp>
@@ -405,7 +460,7 @@
           <a:p>
             <a:pPr lvl="0"/>
             <a:r>
-              <a:rPr lang="en-US" smtClean="0">
+              <a:rPr lang="en-US">
                 <a:solidFill>
                   <a:srgbClr val="111111"/>
                 </a:solidFill>
@@ -416,7 +471,7 @@
           <a:p>
             <a:pPr lvl="1"/>
             <a:r>
-              <a:rPr lang="en-US" smtClean="0">
+              <a:rPr lang="en-US">
                 <a:solidFill>
                   <a:srgbClr val="111111"/>
                 </a:solidFill>
@@ -427,7 +482,7 @@
           <a:p>
             <a:pPr lvl="2"/>
             <a:r>
-              <a:rPr lang="en-US" smtClean="0">
+              <a:rPr lang="en-US">
                 <a:solidFill>
                   <a:srgbClr val="111111"/>
                 </a:solidFill>
@@ -438,7 +493,7 @@
           <a:p>
             <a:pPr lvl="3"/>
             <a:r>
-              <a:rPr lang="en-US" smtClean="0">
+              <a:rPr lang="en-US">
                 <a:solidFill>
                   <a:srgbClr val="111111"/>
                 </a:solidFill>
@@ -449,14 +504,13 @@
           <a:p>
             <a:pPr lvl="4"/>
             <a:r>
-              <a:rPr lang="en-US" smtClean="0">
+              <a:rPr lang="en-US">
                 <a:solidFill>
                   <a:srgbClr val="111111"/>
                 </a:solidFill>
               </a:rPr>
               <a:t>Fifth level</a:t>
             </a:r>
-            <a:endParaRPr lang="en-US"/>
           </a:p>
         </p:txBody>
       </p:sp>
@@ -475,15 +529,19 @@
           <a:bodyPr/>
           <a:lstStyle/>
           <a:p>
-            <a:fld id="{5BCAD085-E8A6-8845-BD4E-CB4CCA059FC4}" type="datetimeFigureOut">
+            <a:fld id="{241EB5C9-1307-BA42-ABA2-0BC069CD8E7F}" type="datetimeFigureOut">
               <a:rPr lang="en-US" smtClean="0">
                 <a:solidFill>
                   <a:srgbClr val="111111"/>
                 </a:solidFill>
               </a:rPr>
-              <a:t>1/27/13</a:t>
+              <a:t>1/2/22</a:t>
             </a:fld>
-            <a:endParaRPr lang="en-US"/>
+            <a:endParaRPr lang="en-US">
+              <a:solidFill>
+                <a:srgbClr val="111111"/>
+              </a:solidFill>
+            </a:endParaRPr>
           </a:p>
         </p:txBody>
       </p:sp>
@@ -502,7 +560,11 @@
           <a:bodyPr/>
           <a:lstStyle/>
           <a:p>
-            <a:endParaRPr lang="en-US"/>
+            <a:endParaRPr lang="en-US">
+              <a:solidFill>
+                <a:srgbClr val="111111"/>
+              </a:solidFill>
+            </a:endParaRPr>
           </a:p>
         </p:txBody>
       </p:sp>
@@ -521,7 +583,7 @@
           <a:bodyPr/>
           <a:lstStyle/>
           <a:p>
-            <a:fld id="{C1FF6DA9-008F-8B48-92A6-B652298478BF}" type="slidenum">
+            <a:fld id="{C5EF2332-01BF-834F-8236-50238282D533}" type="slidenum">
               <a:rPr lang="en-US" smtClean="0">
                 <a:solidFill>
                   <a:srgbClr val="111111"/>
@@ -529,14 +591,18 @@
               </a:rPr>
               <a:t>‹#›</a:t>
             </a:fld>
-            <a:endParaRPr lang="en-US"/>
+            <a:endParaRPr lang="en-US">
+              <a:solidFill>
+                <a:srgbClr val="111111"/>
+              </a:solidFill>
+            </a:endParaRPr>
           </a:p>
         </p:txBody>
       </p:sp>
     </p:spTree>
     <p:extLst>
       <p:ext uri="{BB962C8B-B14F-4D97-AF65-F5344CB8AC3E}">
-        <p14:creationId xmlns:p14="http://schemas.microsoft.com/office/powerpoint/2010/main" val="2910927964"/>
+        <p14:creationId xmlns:p14="http://schemas.microsoft.com/office/powerpoint/2010/main" val="313914798"/>
       </p:ext>
     </p:extLst>
   </p:cSld>
@@ -575,8 +641,8 @@
         </p:nvSpPr>
         <p:spPr>
           <a:xfrm>
-            <a:off x="6629400" y="274638"/>
-            <a:ext cx="2057400" cy="5851525"/>
+            <a:off x="6629400" y="205979"/>
+            <a:ext cx="2057400" cy="4388644"/>
           </a:xfrm>
         </p:spPr>
         <p:txBody>
@@ -584,14 +650,13 @@
           <a:lstStyle/>
           <a:p>
             <a:r>
-              <a:rPr lang="en-US" smtClean="0">
+              <a:rPr lang="en-US">
                 <a:solidFill>
                   <a:srgbClr val="111111"/>
                 </a:solidFill>
               </a:rPr>
               <a:t>Click to edit Master title style</a:t>
             </a:r>
-            <a:endParaRPr lang="en-US"/>
           </a:p>
         </p:txBody>
       </p:sp>
@@ -607,8 +672,8 @@
         </p:nvSpPr>
         <p:spPr>
           <a:xfrm>
-            <a:off x="457200" y="274638"/>
-            <a:ext cx="6019800" cy="5851525"/>
+            <a:off x="457200" y="205979"/>
+            <a:ext cx="6019800" cy="4388644"/>
           </a:xfrm>
         </p:spPr>
         <p:txBody>
@@ -617,7 +682,7 @@
           <a:p>
             <a:pPr lvl="0"/>
             <a:r>
-              <a:rPr lang="en-US" smtClean="0">
+              <a:rPr lang="en-US">
                 <a:solidFill>
                   <a:srgbClr val="111111"/>
                 </a:solidFill>
@@ -628,7 +693,7 @@
           <a:p>
             <a:pPr lvl="1"/>
             <a:r>
-              <a:rPr lang="en-US" smtClean="0">
+              <a:rPr lang="en-US">
                 <a:solidFill>
                   <a:srgbClr val="111111"/>
                 </a:solidFill>
@@ -639,7 +704,7 @@
           <a:p>
             <a:pPr lvl="2"/>
             <a:r>
-              <a:rPr lang="en-US" smtClean="0">
+              <a:rPr lang="en-US">
                 <a:solidFill>
                   <a:srgbClr val="111111"/>
                 </a:solidFill>
@@ -650,7 +715,7 @@
           <a:p>
             <a:pPr lvl="3"/>
             <a:r>
-              <a:rPr lang="en-US" smtClean="0">
+              <a:rPr lang="en-US">
                 <a:solidFill>
                   <a:srgbClr val="111111"/>
                 </a:solidFill>
@@ -661,14 +726,13 @@
           <a:p>
             <a:pPr lvl="4"/>
             <a:r>
-              <a:rPr lang="en-US" smtClean="0">
+              <a:rPr lang="en-US">
                 <a:solidFill>
                   <a:srgbClr val="111111"/>
                 </a:solidFill>
               </a:rPr>
               <a:t>Fifth level</a:t>
             </a:r>
-            <a:endParaRPr lang="en-US"/>
           </a:p>
         </p:txBody>
       </p:sp>
@@ -687,15 +751,19 @@
           <a:bodyPr/>
           <a:lstStyle/>
           <a:p>
-            <a:fld id="{5BCAD085-E8A6-8845-BD4E-CB4CCA059FC4}" type="datetimeFigureOut">
+            <a:fld id="{241EB5C9-1307-BA42-ABA2-0BC069CD8E7F}" type="datetimeFigureOut">
               <a:rPr lang="en-US" smtClean="0">
                 <a:solidFill>
                   <a:srgbClr val="111111"/>
                 </a:solidFill>
               </a:rPr>
-              <a:t>1/27/13</a:t>
+              <a:t>1/2/22</a:t>
             </a:fld>
-            <a:endParaRPr lang="en-US"/>
+            <a:endParaRPr lang="en-US">
+              <a:solidFill>
+                <a:srgbClr val="111111"/>
+              </a:solidFill>
+            </a:endParaRPr>
           </a:p>
         </p:txBody>
       </p:sp>
@@ -714,7 +782,11 @@
           <a:bodyPr/>
           <a:lstStyle/>
           <a:p>
-            <a:endParaRPr lang="en-US"/>
+            <a:endParaRPr lang="en-US">
+              <a:solidFill>
+                <a:srgbClr val="111111"/>
+              </a:solidFill>
+            </a:endParaRPr>
           </a:p>
         </p:txBody>
       </p:sp>
@@ -733,7 +805,7 @@
           <a:bodyPr/>
           <a:lstStyle/>
           <a:p>
-            <a:fld id="{C1FF6DA9-008F-8B48-92A6-B652298478BF}" type="slidenum">
+            <a:fld id="{C5EF2332-01BF-834F-8236-50238282D533}" type="slidenum">
               <a:rPr lang="en-US" smtClean="0">
                 <a:solidFill>
                   <a:srgbClr val="111111"/>
@@ -741,14 +813,18 @@
               </a:rPr>
               <a:t>‹#›</a:t>
             </a:fld>
-            <a:endParaRPr lang="en-US"/>
+            <a:endParaRPr lang="en-US">
+              <a:solidFill>
+                <a:srgbClr val="111111"/>
+              </a:solidFill>
+            </a:endParaRPr>
           </a:p>
         </p:txBody>
       </p:sp>
     </p:spTree>
     <p:extLst>
       <p:ext uri="{BB962C8B-B14F-4D97-AF65-F5344CB8AC3E}">
-        <p14:creationId xmlns:p14="http://schemas.microsoft.com/office/powerpoint/2010/main" val="3612223792"/>
+        <p14:creationId xmlns:p14="http://schemas.microsoft.com/office/powerpoint/2010/main" val="2581529045"/>
       </p:ext>
     </p:extLst>
   </p:cSld>
@@ -791,14 +867,13 @@
           <a:lstStyle/>
           <a:p>
             <a:r>
-              <a:rPr lang="en-US" smtClean="0">
+              <a:rPr lang="en-US">
                 <a:solidFill>
                   <a:srgbClr val="111111"/>
                 </a:solidFill>
               </a:rPr>
               <a:t>Click to edit Master title style</a:t>
             </a:r>
-            <a:endParaRPr lang="en-US"/>
           </a:p>
         </p:txBody>
       </p:sp>
@@ -819,7 +894,7 @@
           <a:p>
             <a:pPr lvl="0"/>
             <a:r>
-              <a:rPr lang="en-US" smtClean="0">
+              <a:rPr lang="en-US">
                 <a:solidFill>
                   <a:srgbClr val="111111"/>
                 </a:solidFill>
@@ -830,7 +905,7 @@
           <a:p>
             <a:pPr lvl="1"/>
             <a:r>
-              <a:rPr lang="en-US" smtClean="0">
+              <a:rPr lang="en-US">
                 <a:solidFill>
                   <a:srgbClr val="111111"/>
                 </a:solidFill>
@@ -841,7 +916,7 @@
           <a:p>
             <a:pPr lvl="2"/>
             <a:r>
-              <a:rPr lang="en-US" smtClean="0">
+              <a:rPr lang="en-US">
                 <a:solidFill>
                   <a:srgbClr val="111111"/>
                 </a:solidFill>
@@ -852,7 +927,7 @@
           <a:p>
             <a:pPr lvl="3"/>
             <a:r>
-              <a:rPr lang="en-US" smtClean="0">
+              <a:rPr lang="en-US">
                 <a:solidFill>
                   <a:srgbClr val="111111"/>
                 </a:solidFill>
@@ -863,14 +938,13 @@
           <a:p>
             <a:pPr lvl="4"/>
             <a:r>
-              <a:rPr lang="en-US" smtClean="0">
+              <a:rPr lang="en-US">
                 <a:solidFill>
                   <a:srgbClr val="111111"/>
                 </a:solidFill>
               </a:rPr>
               <a:t>Fifth level</a:t>
             </a:r>
-            <a:endParaRPr lang="en-US"/>
           </a:p>
         </p:txBody>
       </p:sp>
@@ -889,15 +963,19 @@
           <a:bodyPr/>
           <a:lstStyle/>
           <a:p>
-            <a:fld id="{5BCAD085-E8A6-8845-BD4E-CB4CCA059FC4}" type="datetimeFigureOut">
+            <a:fld id="{241EB5C9-1307-BA42-ABA2-0BC069CD8E7F}" type="datetimeFigureOut">
               <a:rPr lang="en-US" smtClean="0">
                 <a:solidFill>
                   <a:srgbClr val="111111"/>
                 </a:solidFill>
               </a:rPr>
-              <a:t>1/27/13</a:t>
+              <a:t>1/2/22</a:t>
             </a:fld>
-            <a:endParaRPr lang="en-US"/>
+            <a:endParaRPr lang="en-US">
+              <a:solidFill>
+                <a:srgbClr val="111111"/>
+              </a:solidFill>
+            </a:endParaRPr>
           </a:p>
         </p:txBody>
       </p:sp>
@@ -916,7 +994,11 @@
           <a:bodyPr/>
           <a:lstStyle/>
           <a:p>
-            <a:endParaRPr lang="en-US"/>
+            <a:endParaRPr lang="en-US">
+              <a:solidFill>
+                <a:srgbClr val="111111"/>
+              </a:solidFill>
+            </a:endParaRPr>
           </a:p>
         </p:txBody>
       </p:sp>
@@ -935,7 +1017,7 @@
           <a:bodyPr/>
           <a:lstStyle/>
           <a:p>
-            <a:fld id="{C1FF6DA9-008F-8B48-92A6-B652298478BF}" type="slidenum">
+            <a:fld id="{C5EF2332-01BF-834F-8236-50238282D533}" type="slidenum">
               <a:rPr lang="en-US" smtClean="0">
                 <a:solidFill>
                   <a:srgbClr val="111111"/>
@@ -943,14 +1025,18 @@
               </a:rPr>
               <a:t>‹#›</a:t>
             </a:fld>
-            <a:endParaRPr lang="en-US"/>
+            <a:endParaRPr lang="en-US">
+              <a:solidFill>
+                <a:srgbClr val="111111"/>
+              </a:solidFill>
+            </a:endParaRPr>
           </a:p>
         </p:txBody>
       </p:sp>
     </p:spTree>
     <p:extLst>
       <p:ext uri="{BB962C8B-B14F-4D97-AF65-F5344CB8AC3E}">
-        <p14:creationId xmlns:p14="http://schemas.microsoft.com/office/powerpoint/2010/main" val="2614314258"/>
+        <p14:creationId xmlns:p14="http://schemas.microsoft.com/office/powerpoint/2010/main" val="338346009"/>
       </p:ext>
     </p:extLst>
   </p:cSld>
@@ -989,15 +1075,15 @@
         </p:nvSpPr>
         <p:spPr>
           <a:xfrm>
-            <a:off x="722313" y="4406900"/>
-            <a:ext cx="7772400" cy="1362075"/>
+            <a:off x="722313" y="3305176"/>
+            <a:ext cx="7772400" cy="1021556"/>
           </a:xfrm>
         </p:spPr>
         <p:txBody>
           <a:bodyPr anchor="t"/>
           <a:lstStyle>
             <a:lvl1pPr algn="l">
-              <a:defRPr sz="4000" b="1" cap="all">
+              <a:defRPr sz="3000" b="1" cap="all">
                 <a:solidFill>
                   <a:srgbClr val="111111"/>
                 </a:solidFill>
@@ -1006,14 +1092,13 @@
           </a:lstStyle>
           <a:p>
             <a:r>
-              <a:rPr lang="en-US" smtClean="0">
+              <a:rPr lang="en-US">
                 <a:solidFill>
                   <a:srgbClr val="111111"/>
                 </a:solidFill>
               </a:rPr>
               <a:t>Click to edit Master title style</a:t>
             </a:r>
-            <a:endParaRPr lang="en-US"/>
           </a:p>
         </p:txBody>
       </p:sp>
@@ -1029,8 +1114,8 @@
         </p:nvSpPr>
         <p:spPr>
           <a:xfrm>
-            <a:off x="722313" y="2906713"/>
-            <a:ext cx="7772400" cy="1500187"/>
+            <a:off x="722313" y="2180035"/>
+            <a:ext cx="7772400" cy="1125140"/>
           </a:xfrm>
         </p:spPr>
         <p:txBody>
@@ -1038,71 +1123,71 @@
           <a:lstStyle>
             <a:lvl1pPr marL="0" indent="0">
               <a:buNone/>
-              <a:defRPr sz="2000">
+              <a:defRPr sz="1500">
                 <a:solidFill>
                   <a:srgbClr val="111111"/>
                 </a:solidFill>
               </a:defRPr>
             </a:lvl1pPr>
-            <a:lvl2pPr marL="457200" indent="0">
+            <a:lvl2pPr marL="342900" indent="0">
               <a:buNone/>
-              <a:defRPr sz="1800">
+              <a:defRPr sz="1350">
                 <a:solidFill>
                   <a:srgbClr val="111111"/>
                 </a:solidFill>
               </a:defRPr>
             </a:lvl2pPr>
-            <a:lvl3pPr marL="914400" indent="0">
+            <a:lvl3pPr marL="685800" indent="0">
               <a:buNone/>
-              <a:defRPr sz="1600">
+              <a:defRPr sz="1200">
                 <a:solidFill>
                   <a:srgbClr val="111111"/>
                 </a:solidFill>
               </a:defRPr>
             </a:lvl3pPr>
-            <a:lvl4pPr marL="1371600" indent="0">
+            <a:lvl4pPr marL="1028700" indent="0">
               <a:buNone/>
-              <a:defRPr sz="1400">
+              <a:defRPr sz="1050">
                 <a:solidFill>
                   <a:srgbClr val="111111"/>
                 </a:solidFill>
               </a:defRPr>
             </a:lvl4pPr>
-            <a:lvl5pPr marL="1828800" indent="0">
+            <a:lvl5pPr marL="1371600" indent="0">
               <a:buNone/>
-              <a:defRPr sz="1400">
+              <a:defRPr sz="1050">
                 <a:solidFill>
                   <a:srgbClr val="111111"/>
                 </a:solidFill>
               </a:defRPr>
             </a:lvl5pPr>
-            <a:lvl6pPr marL="2286000" indent="0">
+            <a:lvl6pPr marL="1714500" indent="0">
               <a:buNone/>
-              <a:defRPr sz="1400">
+              <a:defRPr sz="1050">
                 <a:solidFill>
                   <a:srgbClr val="111111"/>
                 </a:solidFill>
               </a:defRPr>
             </a:lvl6pPr>
-            <a:lvl7pPr marL="2743200" indent="0">
+            <a:lvl7pPr marL="2057400" indent="0">
               <a:buNone/>
-              <a:defRPr sz="1400">
+              <a:defRPr sz="1050">
                 <a:solidFill>
                   <a:srgbClr val="111111"/>
                 </a:solidFill>
               </a:defRPr>
             </a:lvl7pPr>
-            <a:lvl8pPr marL="3200400" indent="0">
+            <a:lvl8pPr marL="2400300" indent="0">
               <a:buNone/>
-              <a:defRPr sz="1400">
+              <a:defRPr sz="1050">
                 <a:solidFill>
                   <a:srgbClr val="111111"/>
                 </a:solidFill>
               </a:defRPr>
             </a:lvl8pPr>
-            <a:lvl9pPr marL="3657600" indent="0">
+            <a:lvl9pPr marL="2743200" indent="0">
               <a:buNone/>
-              <a:defRPr sz="1400">
+              <a:defRPr sz="1050">
                 <a:solidFill>
                   <a:srgbClr val="111111"/>
                 </a:solidFill>
@@ -1112,7 +1197,7 @@
           <a:p>
             <a:pPr lvl="0"/>
             <a:r>
-              <a:rPr lang="en-US" smtClean="0">
+              <a:rPr lang="en-US">
                 <a:solidFill>
                   <a:srgbClr val="111111"/>
                 </a:solidFill>
@@ -1137,15 +1222,19 @@
           <a:bodyPr/>
           <a:lstStyle/>
           <a:p>
-            <a:fld id="{5BCAD085-E8A6-8845-BD4E-CB4CCA059FC4}" type="datetimeFigureOut">
+            <a:fld id="{241EB5C9-1307-BA42-ABA2-0BC069CD8E7F}" type="datetimeFigureOut">
               <a:rPr lang="en-US" smtClean="0">
                 <a:solidFill>
                   <a:srgbClr val="111111"/>
                 </a:solidFill>
               </a:rPr>
-              <a:t>1/27/13</a:t>
+              <a:t>1/2/22</a:t>
             </a:fld>
-            <a:endParaRPr lang="en-US"/>
+            <a:endParaRPr lang="en-US">
+              <a:solidFill>
+                <a:srgbClr val="111111"/>
+              </a:solidFill>
+            </a:endParaRPr>
           </a:p>
         </p:txBody>
       </p:sp>
@@ -1164,7 +1253,11 @@
           <a:bodyPr/>
           <a:lstStyle/>
           <a:p>
-            <a:endParaRPr lang="en-US"/>
+            <a:endParaRPr lang="en-US">
+              <a:solidFill>
+                <a:srgbClr val="111111"/>
+              </a:solidFill>
+            </a:endParaRPr>
           </a:p>
         </p:txBody>
       </p:sp>
@@ -1183,7 +1276,7 @@
           <a:bodyPr/>
           <a:lstStyle/>
           <a:p>
-            <a:fld id="{C1FF6DA9-008F-8B48-92A6-B652298478BF}" type="slidenum">
+            <a:fld id="{C5EF2332-01BF-834F-8236-50238282D533}" type="slidenum">
               <a:rPr lang="en-US" smtClean="0">
                 <a:solidFill>
                   <a:srgbClr val="111111"/>
@@ -1191,14 +1284,18 @@
               </a:rPr>
               <a:t>‹#›</a:t>
             </a:fld>
-            <a:endParaRPr lang="en-US"/>
+            <a:endParaRPr lang="en-US">
+              <a:solidFill>
+                <a:srgbClr val="111111"/>
+              </a:solidFill>
+            </a:endParaRPr>
           </a:p>
         </p:txBody>
       </p:sp>
     </p:spTree>
     <p:extLst>
       <p:ext uri="{BB962C8B-B14F-4D97-AF65-F5344CB8AC3E}">
-        <p14:creationId xmlns:p14="http://schemas.microsoft.com/office/powerpoint/2010/main" val="960648375"/>
+        <p14:creationId xmlns:p14="http://schemas.microsoft.com/office/powerpoint/2010/main" val="1073069076"/>
       </p:ext>
     </p:extLst>
   </p:cSld>
@@ -1241,14 +1338,13 @@
           <a:lstStyle/>
           <a:p>
             <a:r>
-              <a:rPr lang="en-US" smtClean="0">
+              <a:rPr lang="en-US">
                 <a:solidFill>
                   <a:srgbClr val="111111"/>
                 </a:solidFill>
               </a:rPr>
               <a:t>Click to edit Master title style</a:t>
             </a:r>
-            <a:endParaRPr lang="en-US"/>
           </a:p>
         </p:txBody>
       </p:sp>
@@ -1264,71 +1360,71 @@
         </p:nvSpPr>
         <p:spPr>
           <a:xfrm>
-            <a:off x="457200" y="1600200"/>
-            <a:ext cx="4038600" cy="4525963"/>
+            <a:off x="457200" y="1200151"/>
+            <a:ext cx="4038600" cy="3394472"/>
           </a:xfrm>
         </p:spPr>
         <p:txBody>
           <a:bodyPr/>
           <a:lstStyle>
             <a:lvl1pPr>
-              <a:defRPr sz="2800">
+              <a:defRPr sz="2100">
                 <a:solidFill>
                   <a:srgbClr val="111111"/>
                 </a:solidFill>
               </a:defRPr>
             </a:lvl1pPr>
             <a:lvl2pPr>
-              <a:defRPr sz="2400">
+              <a:defRPr sz="1800">
                 <a:solidFill>
                   <a:srgbClr val="111111"/>
                 </a:solidFill>
               </a:defRPr>
             </a:lvl2pPr>
             <a:lvl3pPr>
-              <a:defRPr sz="2000">
+              <a:defRPr sz="1500">
                 <a:solidFill>
                   <a:srgbClr val="111111"/>
                 </a:solidFill>
               </a:defRPr>
             </a:lvl3pPr>
             <a:lvl4pPr>
-              <a:defRPr sz="1800">
+              <a:defRPr sz="1350">
                 <a:solidFill>
                   <a:srgbClr val="111111"/>
                 </a:solidFill>
               </a:defRPr>
             </a:lvl4pPr>
             <a:lvl5pPr>
-              <a:defRPr sz="1800">
+              <a:defRPr sz="1350">
                 <a:solidFill>
                   <a:srgbClr val="111111"/>
                 </a:solidFill>
               </a:defRPr>
             </a:lvl5pPr>
             <a:lvl6pPr>
-              <a:defRPr sz="1800">
+              <a:defRPr sz="1350">
                 <a:solidFill>
                   <a:srgbClr val="111111"/>
                 </a:solidFill>
               </a:defRPr>
             </a:lvl6pPr>
             <a:lvl7pPr>
-              <a:defRPr sz="1800">
+              <a:defRPr sz="1350">
                 <a:solidFill>
                   <a:srgbClr val="111111"/>
                 </a:solidFill>
               </a:defRPr>
             </a:lvl7pPr>
             <a:lvl8pPr>
-              <a:defRPr sz="1800">
+              <a:defRPr sz="1350">
                 <a:solidFill>
                   <a:srgbClr val="111111"/>
                 </a:solidFill>
               </a:defRPr>
             </a:lvl8pPr>
             <a:lvl9pPr>
-              <a:defRPr sz="1800">
+              <a:defRPr sz="1350">
                 <a:solidFill>
                   <a:srgbClr val="111111"/>
                 </a:solidFill>
@@ -1338,7 +1434,7 @@
           <a:p>
             <a:pPr lvl="0"/>
             <a:r>
-              <a:rPr lang="en-US" smtClean="0">
+              <a:rPr lang="en-US">
                 <a:solidFill>
                   <a:srgbClr val="111111"/>
                 </a:solidFill>
@@ -1349,7 +1445,7 @@
           <a:p>
             <a:pPr lvl="1"/>
             <a:r>
-              <a:rPr lang="en-US" smtClean="0">
+              <a:rPr lang="en-US">
                 <a:solidFill>
                   <a:srgbClr val="111111"/>
                 </a:solidFill>
@@ -1360,7 +1456,7 @@
           <a:p>
             <a:pPr lvl="2"/>
             <a:r>
-              <a:rPr lang="en-US" smtClean="0">
+              <a:rPr lang="en-US">
                 <a:solidFill>
                   <a:srgbClr val="111111"/>
                 </a:solidFill>
@@ -1371,7 +1467,7 @@
           <a:p>
             <a:pPr lvl="3"/>
             <a:r>
-              <a:rPr lang="en-US" smtClean="0">
+              <a:rPr lang="en-US">
                 <a:solidFill>
                   <a:srgbClr val="111111"/>
                 </a:solidFill>
@@ -1382,14 +1478,13 @@
           <a:p>
             <a:pPr lvl="4"/>
             <a:r>
-              <a:rPr lang="en-US" smtClean="0">
+              <a:rPr lang="en-US">
                 <a:solidFill>
                   <a:srgbClr val="111111"/>
                 </a:solidFill>
               </a:rPr>
               <a:t>Fifth level</a:t>
             </a:r>
-            <a:endParaRPr lang="en-US"/>
           </a:p>
         </p:txBody>
       </p:sp>
@@ -1405,71 +1500,71 @@
         </p:nvSpPr>
         <p:spPr>
           <a:xfrm>
-            <a:off x="4648200" y="1600200"/>
-            <a:ext cx="4038600" cy="4525963"/>
+            <a:off x="4648200" y="1200151"/>
+            <a:ext cx="4038600" cy="3394472"/>
           </a:xfrm>
         </p:spPr>
         <p:txBody>
           <a:bodyPr/>
           <a:lstStyle>
             <a:lvl1pPr>
-              <a:defRPr sz="2800">
+              <a:defRPr sz="2100">
                 <a:solidFill>
                   <a:srgbClr val="111111"/>
                 </a:solidFill>
               </a:defRPr>
             </a:lvl1pPr>
             <a:lvl2pPr>
-              <a:defRPr sz="2400">
+              <a:defRPr sz="1800">
                 <a:solidFill>
                   <a:srgbClr val="111111"/>
                 </a:solidFill>
               </a:defRPr>
             </a:lvl2pPr>
             <a:lvl3pPr>
-              <a:defRPr sz="2000">
+              <a:defRPr sz="1500">
                 <a:solidFill>
                   <a:srgbClr val="111111"/>
                 </a:solidFill>
               </a:defRPr>
             </a:lvl3pPr>
             <a:lvl4pPr>
-              <a:defRPr sz="1800">
+              <a:defRPr sz="1350">
                 <a:solidFill>
                   <a:srgbClr val="111111"/>
                 </a:solidFill>
               </a:defRPr>
             </a:lvl4pPr>
             <a:lvl5pPr>
-              <a:defRPr sz="1800">
+              <a:defRPr sz="1350">
                 <a:solidFill>
                   <a:srgbClr val="111111"/>
                 </a:solidFill>
               </a:defRPr>
             </a:lvl5pPr>
             <a:lvl6pPr>
-              <a:defRPr sz="1800">
+              <a:defRPr sz="1350">
                 <a:solidFill>
                   <a:srgbClr val="111111"/>
                 </a:solidFill>
               </a:defRPr>
             </a:lvl6pPr>
             <a:lvl7pPr>
-              <a:defRPr sz="1800">
+              <a:defRPr sz="1350">
                 <a:solidFill>
                   <a:srgbClr val="111111"/>
                 </a:solidFill>
               </a:defRPr>
             </a:lvl7pPr>
             <a:lvl8pPr>
-              <a:defRPr sz="1800">
+              <a:defRPr sz="1350">
                 <a:solidFill>
                   <a:srgbClr val="111111"/>
                 </a:solidFill>
               </a:defRPr>
             </a:lvl8pPr>
             <a:lvl9pPr>
-              <a:defRPr sz="1800">
+              <a:defRPr sz="1350">
                 <a:solidFill>
                   <a:srgbClr val="111111"/>
                 </a:solidFill>
@@ -1479,7 +1574,7 @@
           <a:p>
             <a:pPr lvl="0"/>
             <a:r>
-              <a:rPr lang="en-US" smtClean="0">
+              <a:rPr lang="en-US">
                 <a:solidFill>
                   <a:srgbClr val="111111"/>
                 </a:solidFill>
@@ -1490,7 +1585,7 @@
           <a:p>
             <a:pPr lvl="1"/>
             <a:r>
-              <a:rPr lang="en-US" smtClean="0">
+              <a:rPr lang="en-US">
                 <a:solidFill>
                   <a:srgbClr val="111111"/>
                 </a:solidFill>
@@ -1501,7 +1596,7 @@
           <a:p>
             <a:pPr lvl="2"/>
             <a:r>
-              <a:rPr lang="en-US" smtClean="0">
+              <a:rPr lang="en-US">
                 <a:solidFill>
                   <a:srgbClr val="111111"/>
                 </a:solidFill>
@@ -1512,7 +1607,7 @@
           <a:p>
             <a:pPr lvl="3"/>
             <a:r>
-              <a:rPr lang="en-US" smtClean="0">
+              <a:rPr lang="en-US">
                 <a:solidFill>
                   <a:srgbClr val="111111"/>
                 </a:solidFill>
@@ -1523,14 +1618,13 @@
           <a:p>
             <a:pPr lvl="4"/>
             <a:r>
-              <a:rPr lang="en-US" smtClean="0">
+              <a:rPr lang="en-US">
                 <a:solidFill>
                   <a:srgbClr val="111111"/>
                 </a:solidFill>
               </a:rPr>
               <a:t>Fifth level</a:t>
             </a:r>
-            <a:endParaRPr lang="en-US"/>
           </a:p>
         </p:txBody>
       </p:sp>
@@ -1549,15 +1643,19 @@
           <a:bodyPr/>
           <a:lstStyle/>
           <a:p>
-            <a:fld id="{5BCAD085-E8A6-8845-BD4E-CB4CCA059FC4}" type="datetimeFigureOut">
+            <a:fld id="{241EB5C9-1307-BA42-ABA2-0BC069CD8E7F}" type="datetimeFigureOut">
               <a:rPr lang="en-US" smtClean="0">
                 <a:solidFill>
                   <a:srgbClr val="111111"/>
                 </a:solidFill>
               </a:rPr>
-              <a:t>1/27/13</a:t>
+              <a:t>1/2/22</a:t>
             </a:fld>
-            <a:endParaRPr lang="en-US"/>
+            <a:endParaRPr lang="en-US">
+              <a:solidFill>
+                <a:srgbClr val="111111"/>
+              </a:solidFill>
+            </a:endParaRPr>
           </a:p>
         </p:txBody>
       </p:sp>
@@ -1576,7 +1674,11 @@
           <a:bodyPr/>
           <a:lstStyle/>
           <a:p>
-            <a:endParaRPr lang="en-US"/>
+            <a:endParaRPr lang="en-US">
+              <a:solidFill>
+                <a:srgbClr val="111111"/>
+              </a:solidFill>
+            </a:endParaRPr>
           </a:p>
         </p:txBody>
       </p:sp>
@@ -1595,7 +1697,7 @@
           <a:bodyPr/>
           <a:lstStyle/>
           <a:p>
-            <a:fld id="{C1FF6DA9-008F-8B48-92A6-B652298478BF}" type="slidenum">
+            <a:fld id="{C5EF2332-01BF-834F-8236-50238282D533}" type="slidenum">
               <a:rPr lang="en-US" smtClean="0">
                 <a:solidFill>
                   <a:srgbClr val="111111"/>
@@ -1603,14 +1705,18 @@
               </a:rPr>
               <a:t>‹#›</a:t>
             </a:fld>
-            <a:endParaRPr lang="en-US"/>
+            <a:endParaRPr lang="en-US">
+              <a:solidFill>
+                <a:srgbClr val="111111"/>
+              </a:solidFill>
+            </a:endParaRPr>
           </a:p>
         </p:txBody>
       </p:sp>
     </p:spTree>
     <p:extLst>
       <p:ext uri="{BB962C8B-B14F-4D97-AF65-F5344CB8AC3E}">
-        <p14:creationId xmlns:p14="http://schemas.microsoft.com/office/powerpoint/2010/main" val="2782244947"/>
+        <p14:creationId xmlns:p14="http://schemas.microsoft.com/office/powerpoint/2010/main" val="2619886245"/>
       </p:ext>
     </p:extLst>
   </p:cSld>
@@ -1661,14 +1767,13 @@
           </a:lstStyle>
           <a:p>
             <a:r>
-              <a:rPr lang="en-US" smtClean="0">
+              <a:rPr lang="en-US">
                 <a:solidFill>
                   <a:srgbClr val="111111"/>
                 </a:solidFill>
               </a:rPr>
               <a:t>Click to edit Master title style</a:t>
             </a:r>
-            <a:endParaRPr lang="en-US"/>
           </a:p>
         </p:txBody>
       </p:sp>
@@ -1684,8 +1789,8 @@
         </p:nvSpPr>
         <p:spPr>
           <a:xfrm>
-            <a:off x="457200" y="1535113"/>
-            <a:ext cx="4040188" cy="639762"/>
+            <a:off x="457200" y="1151335"/>
+            <a:ext cx="4040188" cy="479822"/>
           </a:xfrm>
         </p:spPr>
         <p:txBody>
@@ -1693,71 +1798,71 @@
           <a:lstStyle>
             <a:lvl1pPr marL="0" indent="0">
               <a:buNone/>
-              <a:defRPr sz="2400" b="1">
+              <a:defRPr sz="1800" b="1">
                 <a:solidFill>
                   <a:srgbClr val="111111"/>
                 </a:solidFill>
               </a:defRPr>
             </a:lvl1pPr>
-            <a:lvl2pPr marL="457200" indent="0">
+            <a:lvl2pPr marL="342900" indent="0">
               <a:buNone/>
-              <a:defRPr sz="2000" b="1">
+              <a:defRPr sz="1500" b="1">
                 <a:solidFill>
                   <a:srgbClr val="111111"/>
                 </a:solidFill>
               </a:defRPr>
             </a:lvl2pPr>
-            <a:lvl3pPr marL="914400" indent="0">
+            <a:lvl3pPr marL="685800" indent="0">
               <a:buNone/>
-              <a:defRPr sz="1800" b="1">
+              <a:defRPr sz="1350" b="1">
                 <a:solidFill>
                   <a:srgbClr val="111111"/>
                 </a:solidFill>
               </a:defRPr>
             </a:lvl3pPr>
-            <a:lvl4pPr marL="1371600" indent="0">
+            <a:lvl4pPr marL="1028700" indent="0">
               <a:buNone/>
-              <a:defRPr sz="1600" b="1">
+              <a:defRPr sz="1200" b="1">
                 <a:solidFill>
                   <a:srgbClr val="111111"/>
                 </a:solidFill>
               </a:defRPr>
             </a:lvl4pPr>
-            <a:lvl5pPr marL="1828800" indent="0">
+            <a:lvl5pPr marL="1371600" indent="0">
               <a:buNone/>
-              <a:defRPr sz="1600" b="1">
+              <a:defRPr sz="1200" b="1">
                 <a:solidFill>
                   <a:srgbClr val="111111"/>
                 </a:solidFill>
               </a:defRPr>
             </a:lvl5pPr>
-            <a:lvl6pPr marL="2286000" indent="0">
+            <a:lvl6pPr marL="1714500" indent="0">
               <a:buNone/>
-              <a:defRPr sz="1600" b="1">
+              <a:defRPr sz="1200" b="1">
                 <a:solidFill>
                   <a:srgbClr val="111111"/>
                 </a:solidFill>
               </a:defRPr>
             </a:lvl6pPr>
-            <a:lvl7pPr marL="2743200" indent="0">
+            <a:lvl7pPr marL="2057400" indent="0">
               <a:buNone/>
-              <a:defRPr sz="1600" b="1">
+              <a:defRPr sz="1200" b="1">
                 <a:solidFill>
                   <a:srgbClr val="111111"/>
                 </a:solidFill>
               </a:defRPr>
             </a:lvl7pPr>
-            <a:lvl8pPr marL="3200400" indent="0">
+            <a:lvl8pPr marL="2400300" indent="0">
               <a:buNone/>
-              <a:defRPr sz="1600" b="1">
+              <a:defRPr sz="1200" b="1">
                 <a:solidFill>
                   <a:srgbClr val="111111"/>
                 </a:solidFill>
               </a:defRPr>
             </a:lvl8pPr>
-            <a:lvl9pPr marL="3657600" indent="0">
+            <a:lvl9pPr marL="2743200" indent="0">
               <a:buNone/>
-              <a:defRPr sz="1600" b="1">
+              <a:defRPr sz="1200" b="1">
                 <a:solidFill>
                   <a:srgbClr val="111111"/>
                 </a:solidFill>
@@ -1767,7 +1872,7 @@
           <a:p>
             <a:pPr lvl="0"/>
             <a:r>
-              <a:rPr lang="en-US" smtClean="0">
+              <a:rPr lang="en-US">
                 <a:solidFill>
                   <a:srgbClr val="111111"/>
                 </a:solidFill>
@@ -1789,71 +1894,71 @@
         </p:nvSpPr>
         <p:spPr>
           <a:xfrm>
-            <a:off x="457200" y="2174875"/>
-            <a:ext cx="4040188" cy="3951288"/>
+            <a:off x="457200" y="1631156"/>
+            <a:ext cx="4040188" cy="2963466"/>
           </a:xfrm>
         </p:spPr>
         <p:txBody>
           <a:bodyPr/>
           <a:lstStyle>
             <a:lvl1pPr>
-              <a:defRPr sz="2400">
+              <a:defRPr sz="1800">
                 <a:solidFill>
                   <a:srgbClr val="111111"/>
                 </a:solidFill>
               </a:defRPr>
             </a:lvl1pPr>
             <a:lvl2pPr>
-              <a:defRPr sz="2000">
+              <a:defRPr sz="1500">
                 <a:solidFill>
                   <a:srgbClr val="111111"/>
                 </a:solidFill>
               </a:defRPr>
             </a:lvl2pPr>
             <a:lvl3pPr>
-              <a:defRPr sz="1800">
+              <a:defRPr sz="1350">
                 <a:solidFill>
                   <a:srgbClr val="111111"/>
                 </a:solidFill>
               </a:defRPr>
             </a:lvl3pPr>
             <a:lvl4pPr>
-              <a:defRPr sz="1600">
+              <a:defRPr sz="1200">
                 <a:solidFill>
                   <a:srgbClr val="111111"/>
                 </a:solidFill>
               </a:defRPr>
             </a:lvl4pPr>
             <a:lvl5pPr>
-              <a:defRPr sz="1600">
+              <a:defRPr sz="1200">
                 <a:solidFill>
                   <a:srgbClr val="111111"/>
                 </a:solidFill>
               </a:defRPr>
             </a:lvl5pPr>
             <a:lvl6pPr>
-              <a:defRPr sz="1600">
+              <a:defRPr sz="1200">
                 <a:solidFill>
                   <a:srgbClr val="111111"/>
                 </a:solidFill>
               </a:defRPr>
             </a:lvl6pPr>
             <a:lvl7pPr>
-              <a:defRPr sz="1600">
+              <a:defRPr sz="1200">
                 <a:solidFill>
                   <a:srgbClr val="111111"/>
                 </a:solidFill>
               </a:defRPr>
             </a:lvl7pPr>
             <a:lvl8pPr>
-              <a:defRPr sz="1600">
+              <a:defRPr sz="1200">
                 <a:solidFill>
                   <a:srgbClr val="111111"/>
                 </a:solidFill>
               </a:defRPr>
             </a:lvl8pPr>
             <a:lvl9pPr>
-              <a:defRPr sz="1600">
+              <a:defRPr sz="1200">
                 <a:solidFill>
                   <a:srgbClr val="111111"/>
                 </a:solidFill>
@@ -1863,7 +1968,7 @@
           <a:p>
             <a:pPr lvl="0"/>
             <a:r>
-              <a:rPr lang="en-US" smtClean="0">
+              <a:rPr lang="en-US">
                 <a:solidFill>
                   <a:srgbClr val="111111"/>
                 </a:solidFill>
@@ -1874,7 +1979,7 @@
           <a:p>
             <a:pPr lvl="1"/>
             <a:r>
-              <a:rPr lang="en-US" smtClean="0">
+              <a:rPr lang="en-US">
                 <a:solidFill>
                   <a:srgbClr val="111111"/>
                 </a:solidFill>
@@ -1885,7 +1990,7 @@
           <a:p>
             <a:pPr lvl="2"/>
             <a:r>
-              <a:rPr lang="en-US" smtClean="0">
+              <a:rPr lang="en-US">
                 <a:solidFill>
                   <a:srgbClr val="111111"/>
                 </a:solidFill>
@@ -1896,7 +2001,7 @@
           <a:p>
             <a:pPr lvl="3"/>
             <a:r>
-              <a:rPr lang="en-US" smtClean="0">
+              <a:rPr lang="en-US">
                 <a:solidFill>
                   <a:srgbClr val="111111"/>
                 </a:solidFill>
@@ -1907,14 +2012,13 @@
           <a:p>
             <a:pPr lvl="4"/>
             <a:r>
-              <a:rPr lang="en-US" smtClean="0">
+              <a:rPr lang="en-US">
                 <a:solidFill>
                   <a:srgbClr val="111111"/>
                 </a:solidFill>
               </a:rPr>
               <a:t>Fifth level</a:t>
             </a:r>
-            <a:endParaRPr lang="en-US"/>
           </a:p>
         </p:txBody>
       </p:sp>
@@ -1930,8 +2034,8 @@
         </p:nvSpPr>
         <p:spPr>
           <a:xfrm>
-            <a:off x="4645025" y="1535113"/>
-            <a:ext cx="4041775" cy="639762"/>
+            <a:off x="4645026" y="1151335"/>
+            <a:ext cx="4041775" cy="479822"/>
           </a:xfrm>
         </p:spPr>
         <p:txBody>
@@ -1939,71 +2043,71 @@
           <a:lstStyle>
             <a:lvl1pPr marL="0" indent="0">
               <a:buNone/>
-              <a:defRPr sz="2400" b="1">
+              <a:defRPr sz="1800" b="1">
                 <a:solidFill>
                   <a:srgbClr val="111111"/>
                 </a:solidFill>
               </a:defRPr>
             </a:lvl1pPr>
-            <a:lvl2pPr marL="457200" indent="0">
+            <a:lvl2pPr marL="342900" indent="0">
               <a:buNone/>
-              <a:defRPr sz="2000" b="1">
+              <a:defRPr sz="1500" b="1">
                 <a:solidFill>
                   <a:srgbClr val="111111"/>
                 </a:solidFill>
               </a:defRPr>
             </a:lvl2pPr>
-            <a:lvl3pPr marL="914400" indent="0">
+            <a:lvl3pPr marL="685800" indent="0">
               <a:buNone/>
-              <a:defRPr sz="1800" b="1">
+              <a:defRPr sz="1350" b="1">
                 <a:solidFill>
                   <a:srgbClr val="111111"/>
                 </a:solidFill>
               </a:defRPr>
             </a:lvl3pPr>
-            <a:lvl4pPr marL="1371600" indent="0">
+            <a:lvl4pPr marL="1028700" indent="0">
               <a:buNone/>
-              <a:defRPr sz="1600" b="1">
+              <a:defRPr sz="1200" b="1">
                 <a:solidFill>
                   <a:srgbClr val="111111"/>
                 </a:solidFill>
               </a:defRPr>
             </a:lvl4pPr>
-            <a:lvl5pPr marL="1828800" indent="0">
+            <a:lvl5pPr marL="1371600" indent="0">
               <a:buNone/>
-              <a:defRPr sz="1600" b="1">
+              <a:defRPr sz="1200" b="1">
                 <a:solidFill>
                   <a:srgbClr val="111111"/>
                 </a:solidFill>
               </a:defRPr>
             </a:lvl5pPr>
-            <a:lvl6pPr marL="2286000" indent="0">
+            <a:lvl6pPr marL="1714500" indent="0">
               <a:buNone/>
-              <a:defRPr sz="1600" b="1">
+              <a:defRPr sz="1200" b="1">
                 <a:solidFill>
                   <a:srgbClr val="111111"/>
                 </a:solidFill>
               </a:defRPr>
             </a:lvl6pPr>
-            <a:lvl7pPr marL="2743200" indent="0">
+            <a:lvl7pPr marL="2057400" indent="0">
               <a:buNone/>
-              <a:defRPr sz="1600" b="1">
+              <a:defRPr sz="1200" b="1">
                 <a:solidFill>
                   <a:srgbClr val="111111"/>
                 </a:solidFill>
               </a:defRPr>
             </a:lvl7pPr>
-            <a:lvl8pPr marL="3200400" indent="0">
+            <a:lvl8pPr marL="2400300" indent="0">
               <a:buNone/>
-              <a:defRPr sz="1600" b="1">
+              <a:defRPr sz="1200" b="1">
                 <a:solidFill>
                   <a:srgbClr val="111111"/>
                 </a:solidFill>
               </a:defRPr>
             </a:lvl8pPr>
-            <a:lvl9pPr marL="3657600" indent="0">
+            <a:lvl9pPr marL="2743200" indent="0">
               <a:buNone/>
-              <a:defRPr sz="1600" b="1">
+              <a:defRPr sz="1200" b="1">
                 <a:solidFill>
                   <a:srgbClr val="111111"/>
                 </a:solidFill>
@@ -2013,7 +2117,7 @@
           <a:p>
             <a:pPr lvl="0"/>
             <a:r>
-              <a:rPr lang="en-US" smtClean="0">
+              <a:rPr lang="en-US">
                 <a:solidFill>
                   <a:srgbClr val="111111"/>
                 </a:solidFill>
@@ -2035,71 +2139,71 @@
         </p:nvSpPr>
         <p:spPr>
           <a:xfrm>
-            <a:off x="4645025" y="2174875"/>
-            <a:ext cx="4041775" cy="3951288"/>
+            <a:off x="4645026" y="1631156"/>
+            <a:ext cx="4041775" cy="2963466"/>
           </a:xfrm>
         </p:spPr>
         <p:txBody>
           <a:bodyPr/>
           <a:lstStyle>
             <a:lvl1pPr>
-              <a:defRPr sz="2400">
+              <a:defRPr sz="1800">
                 <a:solidFill>
                   <a:srgbClr val="111111"/>
                 </a:solidFill>
               </a:defRPr>
             </a:lvl1pPr>
             <a:lvl2pPr>
-              <a:defRPr sz="2000">
+              <a:defRPr sz="1500">
                 <a:solidFill>
                   <a:srgbClr val="111111"/>
                 </a:solidFill>
               </a:defRPr>
             </a:lvl2pPr>
             <a:lvl3pPr>
-              <a:defRPr sz="1800">
+              <a:defRPr sz="1350">
                 <a:solidFill>
                   <a:srgbClr val="111111"/>
                 </a:solidFill>
               </a:defRPr>
             </a:lvl3pPr>
             <a:lvl4pPr>
-              <a:defRPr sz="1600">
+              <a:defRPr sz="1200">
                 <a:solidFill>
                   <a:srgbClr val="111111"/>
                 </a:solidFill>
               </a:defRPr>
             </a:lvl4pPr>
             <a:lvl5pPr>
-              <a:defRPr sz="1600">
+              <a:defRPr sz="1200">
                 <a:solidFill>
                   <a:srgbClr val="111111"/>
                 </a:solidFill>
               </a:defRPr>
             </a:lvl5pPr>
             <a:lvl6pPr>
-              <a:defRPr sz="1600">
+              <a:defRPr sz="1200">
                 <a:solidFill>
                   <a:srgbClr val="111111"/>
                 </a:solidFill>
               </a:defRPr>
             </a:lvl6pPr>
             <a:lvl7pPr>
-              <a:defRPr sz="1600">
+              <a:defRPr sz="1200">
                 <a:solidFill>
                   <a:srgbClr val="111111"/>
                 </a:solidFill>
               </a:defRPr>
             </a:lvl7pPr>
             <a:lvl8pPr>
-              <a:defRPr sz="1600">
+              <a:defRPr sz="1200">
                 <a:solidFill>
                   <a:srgbClr val="111111"/>
                 </a:solidFill>
               </a:defRPr>
             </a:lvl8pPr>
             <a:lvl9pPr>
-              <a:defRPr sz="1600">
+              <a:defRPr sz="1200">
                 <a:solidFill>
                   <a:srgbClr val="111111"/>
                 </a:solidFill>
@@ -2109,7 +2213,7 @@
           <a:p>
             <a:pPr lvl="0"/>
             <a:r>
-              <a:rPr lang="en-US" smtClean="0">
+              <a:rPr lang="en-US">
                 <a:solidFill>
                   <a:srgbClr val="111111"/>
                 </a:solidFill>
@@ -2120,7 +2224,7 @@
           <a:p>
             <a:pPr lvl="1"/>
             <a:r>
-              <a:rPr lang="en-US" smtClean="0">
+              <a:rPr lang="en-US">
                 <a:solidFill>
                   <a:srgbClr val="111111"/>
                 </a:solidFill>
@@ -2131,7 +2235,7 @@
           <a:p>
             <a:pPr lvl="2"/>
             <a:r>
-              <a:rPr lang="en-US" smtClean="0">
+              <a:rPr lang="en-US">
                 <a:solidFill>
                   <a:srgbClr val="111111"/>
                 </a:solidFill>
@@ -2142,7 +2246,7 @@
           <a:p>
             <a:pPr lvl="3"/>
             <a:r>
-              <a:rPr lang="en-US" smtClean="0">
+              <a:rPr lang="en-US">
                 <a:solidFill>
                   <a:srgbClr val="111111"/>
                 </a:solidFill>
@@ -2153,14 +2257,13 @@
           <a:p>
             <a:pPr lvl="4"/>
             <a:r>
-              <a:rPr lang="en-US" smtClean="0">
+              <a:rPr lang="en-US">
                 <a:solidFill>
                   <a:srgbClr val="111111"/>
                 </a:solidFill>
               </a:rPr>
               <a:t>Fifth level</a:t>
             </a:r>
-            <a:endParaRPr lang="en-US"/>
           </a:p>
         </p:txBody>
       </p:sp>
@@ -2179,15 +2282,19 @@
           <a:bodyPr/>
           <a:lstStyle/>
           <a:p>
-            <a:fld id="{5BCAD085-E8A6-8845-BD4E-CB4CCA059FC4}" type="datetimeFigureOut">
+            <a:fld id="{241EB5C9-1307-BA42-ABA2-0BC069CD8E7F}" type="datetimeFigureOut">
               <a:rPr lang="en-US" smtClean="0">
                 <a:solidFill>
                   <a:srgbClr val="111111"/>
                 </a:solidFill>
               </a:rPr>
-              <a:t>1/27/13</a:t>
+              <a:t>1/2/22</a:t>
             </a:fld>
-            <a:endParaRPr lang="en-US"/>
+            <a:endParaRPr lang="en-US">
+              <a:solidFill>
+                <a:srgbClr val="111111"/>
+              </a:solidFill>
+            </a:endParaRPr>
           </a:p>
         </p:txBody>
       </p:sp>
@@ -2206,7 +2313,11 @@
           <a:bodyPr/>
           <a:lstStyle/>
           <a:p>
-            <a:endParaRPr lang="en-US"/>
+            <a:endParaRPr lang="en-US">
+              <a:solidFill>
+                <a:srgbClr val="111111"/>
+              </a:solidFill>
+            </a:endParaRPr>
           </a:p>
         </p:txBody>
       </p:sp>
@@ -2225,7 +2336,7 @@
           <a:bodyPr/>
           <a:lstStyle/>
           <a:p>
-            <a:fld id="{C1FF6DA9-008F-8B48-92A6-B652298478BF}" type="slidenum">
+            <a:fld id="{C5EF2332-01BF-834F-8236-50238282D533}" type="slidenum">
               <a:rPr lang="en-US" smtClean="0">
                 <a:solidFill>
                   <a:srgbClr val="111111"/>
@@ -2233,14 +2344,18 @@
               </a:rPr>
               <a:t>‹#›</a:t>
             </a:fld>
-            <a:endParaRPr lang="en-US"/>
+            <a:endParaRPr lang="en-US">
+              <a:solidFill>
+                <a:srgbClr val="111111"/>
+              </a:solidFill>
+            </a:endParaRPr>
           </a:p>
         </p:txBody>
       </p:sp>
     </p:spTree>
     <p:extLst>
       <p:ext uri="{BB962C8B-B14F-4D97-AF65-F5344CB8AC3E}">
-        <p14:creationId xmlns:p14="http://schemas.microsoft.com/office/powerpoint/2010/main" val="990158736"/>
+        <p14:creationId xmlns:p14="http://schemas.microsoft.com/office/powerpoint/2010/main" val="2535793967"/>
       </p:ext>
     </p:extLst>
   </p:cSld>
@@ -2283,14 +2398,13 @@
           <a:lstStyle/>
           <a:p>
             <a:r>
-              <a:rPr lang="en-US" smtClean="0">
+              <a:rPr lang="en-US">
                 <a:solidFill>
                   <a:srgbClr val="111111"/>
                 </a:solidFill>
               </a:rPr>
               <a:t>Click to edit Master title style</a:t>
             </a:r>
-            <a:endParaRPr lang="en-US"/>
           </a:p>
         </p:txBody>
       </p:sp>
@@ -2309,15 +2423,19 @@
           <a:bodyPr/>
           <a:lstStyle/>
           <a:p>
-            <a:fld id="{5BCAD085-E8A6-8845-BD4E-CB4CCA059FC4}" type="datetimeFigureOut">
+            <a:fld id="{241EB5C9-1307-BA42-ABA2-0BC069CD8E7F}" type="datetimeFigureOut">
               <a:rPr lang="en-US" smtClean="0">
                 <a:solidFill>
                   <a:srgbClr val="111111"/>
                 </a:solidFill>
               </a:rPr>
-              <a:t>1/27/13</a:t>
+              <a:t>1/2/22</a:t>
             </a:fld>
-            <a:endParaRPr lang="en-US"/>
+            <a:endParaRPr lang="en-US">
+              <a:solidFill>
+                <a:srgbClr val="111111"/>
+              </a:solidFill>
+            </a:endParaRPr>
           </a:p>
         </p:txBody>
       </p:sp>
@@ -2336,7 +2454,11 @@
           <a:bodyPr/>
           <a:lstStyle/>
           <a:p>
-            <a:endParaRPr lang="en-US"/>
+            <a:endParaRPr lang="en-US">
+              <a:solidFill>
+                <a:srgbClr val="111111"/>
+              </a:solidFill>
+            </a:endParaRPr>
           </a:p>
         </p:txBody>
       </p:sp>
@@ -2355,7 +2477,7 @@
           <a:bodyPr/>
           <a:lstStyle/>
           <a:p>
-            <a:fld id="{C1FF6DA9-008F-8B48-92A6-B652298478BF}" type="slidenum">
+            <a:fld id="{C5EF2332-01BF-834F-8236-50238282D533}" type="slidenum">
               <a:rPr lang="en-US" smtClean="0">
                 <a:solidFill>
                   <a:srgbClr val="111111"/>
@@ -2363,14 +2485,18 @@
               </a:rPr>
               <a:t>‹#›</a:t>
             </a:fld>
-            <a:endParaRPr lang="en-US"/>
+            <a:endParaRPr lang="en-US">
+              <a:solidFill>
+                <a:srgbClr val="111111"/>
+              </a:solidFill>
+            </a:endParaRPr>
           </a:p>
         </p:txBody>
       </p:sp>
     </p:spTree>
     <p:extLst>
       <p:ext uri="{BB962C8B-B14F-4D97-AF65-F5344CB8AC3E}">
-        <p14:creationId xmlns:p14="http://schemas.microsoft.com/office/powerpoint/2010/main" val="727027711"/>
+        <p14:creationId xmlns:p14="http://schemas.microsoft.com/office/powerpoint/2010/main" val="3472721253"/>
       </p:ext>
     </p:extLst>
   </p:cSld>
@@ -2412,15 +2538,19 @@
           <a:bodyPr/>
           <a:lstStyle/>
           <a:p>
-            <a:fld id="{5BCAD085-E8A6-8845-BD4E-CB4CCA059FC4}" type="datetimeFigureOut">
+            <a:fld id="{241EB5C9-1307-BA42-ABA2-0BC069CD8E7F}" type="datetimeFigureOut">
               <a:rPr lang="en-US" smtClean="0">
                 <a:solidFill>
                   <a:srgbClr val="111111"/>
                 </a:solidFill>
               </a:rPr>
-              <a:t>1/27/13</a:t>
+              <a:t>1/2/22</a:t>
             </a:fld>
-            <a:endParaRPr lang="en-US"/>
+            <a:endParaRPr lang="en-US">
+              <a:solidFill>
+                <a:srgbClr val="111111"/>
+              </a:solidFill>
+            </a:endParaRPr>
           </a:p>
         </p:txBody>
       </p:sp>
@@ -2439,7 +2569,11 @@
           <a:bodyPr/>
           <a:lstStyle/>
           <a:p>
-            <a:endParaRPr lang="en-US"/>
+            <a:endParaRPr lang="en-US">
+              <a:solidFill>
+                <a:srgbClr val="111111"/>
+              </a:solidFill>
+            </a:endParaRPr>
           </a:p>
         </p:txBody>
       </p:sp>
@@ -2458,7 +2592,7 @@
           <a:bodyPr/>
           <a:lstStyle/>
           <a:p>
-            <a:fld id="{C1FF6DA9-008F-8B48-92A6-B652298478BF}" type="slidenum">
+            <a:fld id="{C5EF2332-01BF-834F-8236-50238282D533}" type="slidenum">
               <a:rPr lang="en-US" smtClean="0">
                 <a:solidFill>
                   <a:srgbClr val="111111"/>
@@ -2466,14 +2600,18 @@
               </a:rPr>
               <a:t>‹#›</a:t>
             </a:fld>
-            <a:endParaRPr lang="en-US"/>
+            <a:endParaRPr lang="en-US">
+              <a:solidFill>
+                <a:srgbClr val="111111"/>
+              </a:solidFill>
+            </a:endParaRPr>
           </a:p>
         </p:txBody>
       </p:sp>
     </p:spTree>
     <p:extLst>
       <p:ext uri="{BB962C8B-B14F-4D97-AF65-F5344CB8AC3E}">
-        <p14:creationId xmlns:p14="http://schemas.microsoft.com/office/powerpoint/2010/main" val="1212999818"/>
+        <p14:creationId xmlns:p14="http://schemas.microsoft.com/office/powerpoint/2010/main" val="2130901097"/>
       </p:ext>
     </p:extLst>
   </p:cSld>
@@ -2512,15 +2650,15 @@
         </p:nvSpPr>
         <p:spPr>
           <a:xfrm>
-            <a:off x="457200" y="273050"/>
-            <a:ext cx="3008313" cy="1162050"/>
+            <a:off x="457201" y="204787"/>
+            <a:ext cx="3008313" cy="871538"/>
           </a:xfrm>
         </p:spPr>
         <p:txBody>
           <a:bodyPr anchor="b"/>
           <a:lstStyle>
             <a:lvl1pPr algn="l">
-              <a:defRPr sz="2000" b="1">
+              <a:defRPr sz="1500" b="1">
                 <a:solidFill>
                   <a:srgbClr val="111111"/>
                 </a:solidFill>
@@ -2529,14 +2667,13 @@
           </a:lstStyle>
           <a:p>
             <a:r>
-              <a:rPr lang="en-US" smtClean="0">
+              <a:rPr lang="en-US">
                 <a:solidFill>
                   <a:srgbClr val="111111"/>
                 </a:solidFill>
               </a:rPr>
               <a:t>Click to edit Master title style</a:t>
             </a:r>
-            <a:endParaRPr lang="en-US"/>
           </a:p>
         </p:txBody>
       </p:sp>
@@ -2552,71 +2689,71 @@
         </p:nvSpPr>
         <p:spPr>
           <a:xfrm>
-            <a:off x="3575050" y="273050"/>
-            <a:ext cx="5111750" cy="5853113"/>
+            <a:off x="3575050" y="204788"/>
+            <a:ext cx="5111750" cy="4389835"/>
           </a:xfrm>
         </p:spPr>
         <p:txBody>
           <a:bodyPr/>
           <a:lstStyle>
             <a:lvl1pPr>
-              <a:defRPr sz="3200">
+              <a:defRPr sz="2400">
                 <a:solidFill>
                   <a:srgbClr val="111111"/>
                 </a:solidFill>
               </a:defRPr>
             </a:lvl1pPr>
             <a:lvl2pPr>
-              <a:defRPr sz="2800">
+              <a:defRPr sz="2100">
                 <a:solidFill>
                   <a:srgbClr val="111111"/>
                 </a:solidFill>
               </a:defRPr>
             </a:lvl2pPr>
             <a:lvl3pPr>
-              <a:defRPr sz="2400">
+              <a:defRPr sz="1800">
                 <a:solidFill>
                   <a:srgbClr val="111111"/>
                 </a:solidFill>
               </a:defRPr>
             </a:lvl3pPr>
             <a:lvl4pPr>
-              <a:defRPr sz="2000">
+              <a:defRPr sz="1500">
                 <a:solidFill>
                   <a:srgbClr val="111111"/>
                 </a:solidFill>
               </a:defRPr>
             </a:lvl4pPr>
             <a:lvl5pPr>
-              <a:defRPr sz="2000">
+              <a:defRPr sz="1500">
                 <a:solidFill>
                   <a:srgbClr val="111111"/>
                 </a:solidFill>
               </a:defRPr>
             </a:lvl5pPr>
             <a:lvl6pPr>
-              <a:defRPr sz="2000">
+              <a:defRPr sz="1500">
                 <a:solidFill>
                   <a:srgbClr val="111111"/>
                 </a:solidFill>
               </a:defRPr>
             </a:lvl6pPr>
             <a:lvl7pPr>
-              <a:defRPr sz="2000">
+              <a:defRPr sz="1500">
                 <a:solidFill>
                   <a:srgbClr val="111111"/>
                 </a:solidFill>
               </a:defRPr>
             </a:lvl7pPr>
             <a:lvl8pPr>
-              <a:defRPr sz="2000">
+              <a:defRPr sz="1500">
                 <a:solidFill>
                   <a:srgbClr val="111111"/>
                 </a:solidFill>
               </a:defRPr>
             </a:lvl8pPr>
             <a:lvl9pPr>
-              <a:defRPr sz="2000">
+              <a:defRPr sz="1500">
                 <a:solidFill>
                   <a:srgbClr val="111111"/>
                 </a:solidFill>
@@ -2626,7 +2763,7 @@
           <a:p>
             <a:pPr lvl="0"/>
             <a:r>
-              <a:rPr lang="en-US" smtClean="0">
+              <a:rPr lang="en-US">
                 <a:solidFill>
                   <a:srgbClr val="111111"/>
                 </a:solidFill>
@@ -2637,7 +2774,7 @@
           <a:p>
             <a:pPr lvl="1"/>
             <a:r>
-              <a:rPr lang="en-US" smtClean="0">
+              <a:rPr lang="en-US">
                 <a:solidFill>
                   <a:srgbClr val="111111"/>
                 </a:solidFill>
@@ -2648,7 +2785,7 @@
           <a:p>
             <a:pPr lvl="2"/>
             <a:r>
-              <a:rPr lang="en-US" smtClean="0">
+              <a:rPr lang="en-US">
                 <a:solidFill>
                   <a:srgbClr val="111111"/>
                 </a:solidFill>
@@ -2659,7 +2796,7 @@
           <a:p>
             <a:pPr lvl="3"/>
             <a:r>
-              <a:rPr lang="en-US" smtClean="0">
+              <a:rPr lang="en-US">
                 <a:solidFill>
                   <a:srgbClr val="111111"/>
                 </a:solidFill>
@@ -2670,14 +2807,13 @@
           <a:p>
             <a:pPr lvl="4"/>
             <a:r>
-              <a:rPr lang="en-US" smtClean="0">
+              <a:rPr lang="en-US">
                 <a:solidFill>
                   <a:srgbClr val="111111"/>
                 </a:solidFill>
               </a:rPr>
               <a:t>Fifth level</a:t>
             </a:r>
-            <a:endParaRPr lang="en-US"/>
           </a:p>
         </p:txBody>
       </p:sp>
@@ -2693,8 +2829,8 @@
         </p:nvSpPr>
         <p:spPr>
           <a:xfrm>
-            <a:off x="457200" y="1435100"/>
-            <a:ext cx="3008313" cy="4691063"/>
+            <a:off x="457201" y="1076326"/>
+            <a:ext cx="3008313" cy="3518297"/>
           </a:xfrm>
         </p:spPr>
         <p:txBody>
@@ -2702,71 +2838,71 @@
           <a:lstStyle>
             <a:lvl1pPr marL="0" indent="0">
               <a:buNone/>
-              <a:defRPr sz="1400">
+              <a:defRPr sz="1050">
                 <a:solidFill>
                   <a:srgbClr val="111111"/>
                 </a:solidFill>
               </a:defRPr>
             </a:lvl1pPr>
-            <a:lvl2pPr marL="457200" indent="0">
+            <a:lvl2pPr marL="342900" indent="0">
               <a:buNone/>
-              <a:defRPr sz="1200">
+              <a:defRPr sz="900">
                 <a:solidFill>
                   <a:srgbClr val="111111"/>
                 </a:solidFill>
               </a:defRPr>
             </a:lvl2pPr>
-            <a:lvl3pPr marL="914400" indent="0">
+            <a:lvl3pPr marL="685800" indent="0">
               <a:buNone/>
-              <a:defRPr sz="1000">
+              <a:defRPr sz="750">
                 <a:solidFill>
                   <a:srgbClr val="111111"/>
                 </a:solidFill>
               </a:defRPr>
             </a:lvl3pPr>
-            <a:lvl4pPr marL="1371600" indent="0">
+            <a:lvl4pPr marL="1028700" indent="0">
               <a:buNone/>
-              <a:defRPr sz="900">
+              <a:defRPr sz="675">
                 <a:solidFill>
                   <a:srgbClr val="111111"/>
                 </a:solidFill>
               </a:defRPr>
             </a:lvl4pPr>
-            <a:lvl5pPr marL="1828800" indent="0">
+            <a:lvl5pPr marL="1371600" indent="0">
               <a:buNone/>
-              <a:defRPr sz="900">
+              <a:defRPr sz="675">
                 <a:solidFill>
                   <a:srgbClr val="111111"/>
                 </a:solidFill>
               </a:defRPr>
             </a:lvl5pPr>
-            <a:lvl6pPr marL="2286000" indent="0">
+            <a:lvl6pPr marL="1714500" indent="0">
               <a:buNone/>
-              <a:defRPr sz="900">
+              <a:defRPr sz="675">
                 <a:solidFill>
                   <a:srgbClr val="111111"/>
                 </a:solidFill>
               </a:defRPr>
             </a:lvl6pPr>
-            <a:lvl7pPr marL="2743200" indent="0">
+            <a:lvl7pPr marL="2057400" indent="0">
               <a:buNone/>
-              <a:defRPr sz="900">
+              <a:defRPr sz="675">
                 <a:solidFill>
                   <a:srgbClr val="111111"/>
                 </a:solidFill>
               </a:defRPr>
             </a:lvl7pPr>
-            <a:lvl8pPr marL="3200400" indent="0">
+            <a:lvl8pPr marL="2400300" indent="0">
               <a:buNone/>
-              <a:defRPr sz="900">
+              <a:defRPr sz="675">
                 <a:solidFill>
                   <a:srgbClr val="111111"/>
                 </a:solidFill>
               </a:defRPr>
             </a:lvl8pPr>
-            <a:lvl9pPr marL="3657600" indent="0">
+            <a:lvl9pPr marL="2743200" indent="0">
               <a:buNone/>
-              <a:defRPr sz="900">
+              <a:defRPr sz="675">
                 <a:solidFill>
                   <a:srgbClr val="111111"/>
                 </a:solidFill>
@@ -2776,7 +2912,7 @@
           <a:p>
             <a:pPr lvl="0"/>
             <a:r>
-              <a:rPr lang="en-US" smtClean="0">
+              <a:rPr lang="en-US">
                 <a:solidFill>
                   <a:srgbClr val="111111"/>
                 </a:solidFill>
@@ -2801,15 +2937,19 @@
           <a:bodyPr/>
           <a:lstStyle/>
           <a:p>
-            <a:fld id="{5BCAD085-E8A6-8845-BD4E-CB4CCA059FC4}" type="datetimeFigureOut">
+            <a:fld id="{241EB5C9-1307-BA42-ABA2-0BC069CD8E7F}" type="datetimeFigureOut">
               <a:rPr lang="en-US" smtClean="0">
                 <a:solidFill>
                   <a:srgbClr val="111111"/>
                 </a:solidFill>
               </a:rPr>
-              <a:t>1/27/13</a:t>
+              <a:t>1/2/22</a:t>
             </a:fld>
-            <a:endParaRPr lang="en-US"/>
+            <a:endParaRPr lang="en-US">
+              <a:solidFill>
+                <a:srgbClr val="111111"/>
+              </a:solidFill>
+            </a:endParaRPr>
           </a:p>
         </p:txBody>
       </p:sp>
@@ -2828,7 +2968,11 @@
           <a:bodyPr/>
           <a:lstStyle/>
           <a:p>
-            <a:endParaRPr lang="en-US"/>
+            <a:endParaRPr lang="en-US">
+              <a:solidFill>
+                <a:srgbClr val="111111"/>
+              </a:solidFill>
+            </a:endParaRPr>
           </a:p>
         </p:txBody>
       </p:sp>
@@ -2847,7 +2991,7 @@
           <a:bodyPr/>
           <a:lstStyle/>
           <a:p>
-            <a:fld id="{C1FF6DA9-008F-8B48-92A6-B652298478BF}" type="slidenum">
+            <a:fld id="{C5EF2332-01BF-834F-8236-50238282D533}" type="slidenum">
               <a:rPr lang="en-US" smtClean="0">
                 <a:solidFill>
                   <a:srgbClr val="111111"/>
@@ -2855,14 +2999,18 @@
               </a:rPr>
               <a:t>‹#›</a:t>
             </a:fld>
-            <a:endParaRPr lang="en-US"/>
+            <a:endParaRPr lang="en-US">
+              <a:solidFill>
+                <a:srgbClr val="111111"/>
+              </a:solidFill>
+            </a:endParaRPr>
           </a:p>
         </p:txBody>
       </p:sp>
     </p:spTree>
     <p:extLst>
       <p:ext uri="{BB962C8B-B14F-4D97-AF65-F5344CB8AC3E}">
-        <p14:creationId xmlns:p14="http://schemas.microsoft.com/office/powerpoint/2010/main" val="1840726560"/>
+        <p14:creationId xmlns:p14="http://schemas.microsoft.com/office/powerpoint/2010/main" val="3540895647"/>
       </p:ext>
     </p:extLst>
   </p:cSld>
@@ -2901,15 +3049,15 @@
         </p:nvSpPr>
         <p:spPr>
           <a:xfrm>
-            <a:off x="1792288" y="4800600"/>
-            <a:ext cx="5486400" cy="566738"/>
+            <a:off x="1792288" y="3600450"/>
+            <a:ext cx="5486400" cy="425054"/>
           </a:xfrm>
         </p:spPr>
         <p:txBody>
           <a:bodyPr anchor="b"/>
           <a:lstStyle>
             <a:lvl1pPr algn="l">
-              <a:defRPr sz="2000" b="1">
+              <a:defRPr sz="1500" b="1">
                 <a:solidFill>
                   <a:srgbClr val="111111"/>
                 </a:solidFill>
@@ -2918,14 +3066,13 @@
           </a:lstStyle>
           <a:p>
             <a:r>
-              <a:rPr lang="en-US" smtClean="0">
+              <a:rPr lang="en-US">
                 <a:solidFill>
                   <a:srgbClr val="111111"/>
                 </a:solidFill>
               </a:rPr>
               <a:t>Click to edit Master title style</a:t>
             </a:r>
-            <a:endParaRPr lang="en-US"/>
           </a:p>
         </p:txBody>
       </p:sp>
@@ -2941,8 +3088,8 @@
         </p:nvSpPr>
         <p:spPr>
           <a:xfrm>
-            <a:off x="1792288" y="612775"/>
-            <a:ext cx="5486400" cy="4114800"/>
+            <a:off x="1792288" y="459581"/>
+            <a:ext cx="5486400" cy="3086100"/>
           </a:xfrm>
         </p:spPr>
         <p:txBody>
@@ -2950,71 +3097,71 @@
           <a:lstStyle>
             <a:lvl1pPr marL="0" indent="0">
               <a:buNone/>
-              <a:defRPr sz="3200">
+              <a:defRPr sz="2400">
                 <a:solidFill>
                   <a:srgbClr val="111111"/>
                 </a:solidFill>
               </a:defRPr>
             </a:lvl1pPr>
-            <a:lvl2pPr marL="457200" indent="0">
+            <a:lvl2pPr marL="342900" indent="0">
               <a:buNone/>
-              <a:defRPr sz="2800">
+              <a:defRPr sz="2100">
                 <a:solidFill>
                   <a:srgbClr val="111111"/>
                 </a:solidFill>
               </a:defRPr>
             </a:lvl2pPr>
-            <a:lvl3pPr marL="914400" indent="0">
+            <a:lvl3pPr marL="685800" indent="0">
               <a:buNone/>
-              <a:defRPr sz="2400">
+              <a:defRPr sz="1800">
                 <a:solidFill>
                   <a:srgbClr val="111111"/>
                 </a:solidFill>
               </a:defRPr>
             </a:lvl3pPr>
-            <a:lvl4pPr marL="1371600" indent="0">
+            <a:lvl4pPr marL="1028700" indent="0">
               <a:buNone/>
-              <a:defRPr sz="2000">
+              <a:defRPr sz="1500">
                 <a:solidFill>
                   <a:srgbClr val="111111"/>
                 </a:solidFill>
               </a:defRPr>
             </a:lvl4pPr>
-            <a:lvl5pPr marL="1828800" indent="0">
+            <a:lvl5pPr marL="1371600" indent="0">
               <a:buNone/>
-              <a:defRPr sz="2000">
+              <a:defRPr sz="1500">
                 <a:solidFill>
                   <a:srgbClr val="111111"/>
                 </a:solidFill>
               </a:defRPr>
             </a:lvl5pPr>
-            <a:lvl6pPr marL="2286000" indent="0">
+            <a:lvl6pPr marL="1714500" indent="0">
               <a:buNone/>
-              <a:defRPr sz="2000">
+              <a:defRPr sz="1500">
                 <a:solidFill>
                   <a:srgbClr val="111111"/>
                 </a:solidFill>
               </a:defRPr>
             </a:lvl6pPr>
-            <a:lvl7pPr marL="2743200" indent="0">
+            <a:lvl7pPr marL="2057400" indent="0">
               <a:buNone/>
-              <a:defRPr sz="2000">
+              <a:defRPr sz="1500">
                 <a:solidFill>
                   <a:srgbClr val="111111"/>
                 </a:solidFill>
               </a:defRPr>
             </a:lvl7pPr>
-            <a:lvl8pPr marL="3200400" indent="0">
+            <a:lvl8pPr marL="2400300" indent="0">
               <a:buNone/>
-              <a:defRPr sz="2000">
+              <a:defRPr sz="1500">
                 <a:solidFill>
                   <a:srgbClr val="111111"/>
                 </a:solidFill>
               </a:defRPr>
             </a:lvl8pPr>
-            <a:lvl9pPr marL="3657600" indent="0">
+            <a:lvl9pPr marL="2743200" indent="0">
               <a:buNone/>
-              <a:defRPr sz="2000">
+              <a:defRPr sz="1500">
                 <a:solidFill>
                   <a:srgbClr val="111111"/>
                 </a:solidFill>
@@ -3022,7 +3169,11 @@
             </a:lvl9pPr>
           </a:lstStyle>
           <a:p>
-            <a:endParaRPr lang="en-US"/>
+            <a:endParaRPr lang="en-US">
+              <a:solidFill>
+                <a:srgbClr val="111111"/>
+              </a:solidFill>
+            </a:endParaRPr>
           </a:p>
         </p:txBody>
       </p:sp>
@@ -3038,8 +3189,8 @@
         </p:nvSpPr>
         <p:spPr>
           <a:xfrm>
-            <a:off x="1792288" y="5367338"/>
-            <a:ext cx="5486400" cy="804862"/>
+            <a:off x="1792288" y="4025503"/>
+            <a:ext cx="5486400" cy="603647"/>
           </a:xfrm>
         </p:spPr>
         <p:txBody>
@@ -3047,71 +3198,71 @@
           <a:lstStyle>
             <a:lvl1pPr marL="0" indent="0">
               <a:buNone/>
-              <a:defRPr sz="1400">
+              <a:defRPr sz="1050">
                 <a:solidFill>
                   <a:srgbClr val="111111"/>
                 </a:solidFill>
               </a:defRPr>
             </a:lvl1pPr>
-            <a:lvl2pPr marL="457200" indent="0">
+            <a:lvl2pPr marL="342900" indent="0">
               <a:buNone/>
-              <a:defRPr sz="1200">
+              <a:defRPr sz="900">
                 <a:solidFill>
                   <a:srgbClr val="111111"/>
                 </a:solidFill>
               </a:defRPr>
             </a:lvl2pPr>
-            <a:lvl3pPr marL="914400" indent="0">
+            <a:lvl3pPr marL="685800" indent="0">
               <a:buNone/>
-              <a:defRPr sz="1000">
+              <a:defRPr sz="750">
                 <a:solidFill>
                   <a:srgbClr val="111111"/>
                 </a:solidFill>
               </a:defRPr>
             </a:lvl3pPr>
-            <a:lvl4pPr marL="1371600" indent="0">
+            <a:lvl4pPr marL="1028700" indent="0">
               <a:buNone/>
-              <a:defRPr sz="900">
+              <a:defRPr sz="675">
                 <a:solidFill>
                   <a:srgbClr val="111111"/>
                 </a:solidFill>
               </a:defRPr>
             </a:lvl4pPr>
-            <a:lvl5pPr marL="1828800" indent="0">
+            <a:lvl5pPr marL="1371600" indent="0">
               <a:buNone/>
-              <a:defRPr sz="900">
+              <a:defRPr sz="675">
                 <a:solidFill>
                   <a:srgbClr val="111111"/>
                 </a:solidFill>
               </a:defRPr>
             </a:lvl5pPr>
-            <a:lvl6pPr marL="2286000" indent="0">
+            <a:lvl6pPr marL="1714500" indent="0">
               <a:buNone/>
-              <a:defRPr sz="900">
+              <a:defRPr sz="675">
                 <a:solidFill>
                   <a:srgbClr val="111111"/>
                 </a:solidFill>
               </a:defRPr>
             </a:lvl6pPr>
-            <a:lvl7pPr marL="2743200" indent="0">
+            <a:lvl7pPr marL="2057400" indent="0">
               <a:buNone/>
-              <a:defRPr sz="900">
+              <a:defRPr sz="675">
                 <a:solidFill>
                   <a:srgbClr val="111111"/>
                 </a:solidFill>
               </a:defRPr>
             </a:lvl7pPr>
-            <a:lvl8pPr marL="3200400" indent="0">
+            <a:lvl8pPr marL="2400300" indent="0">
               <a:buNone/>
-              <a:defRPr sz="900">
+              <a:defRPr sz="675">
                 <a:solidFill>
                   <a:srgbClr val="111111"/>
                 </a:solidFill>
               </a:defRPr>
             </a:lvl8pPr>
-            <a:lvl9pPr marL="3657600" indent="0">
+            <a:lvl9pPr marL="2743200" indent="0">
               <a:buNone/>
-              <a:defRPr sz="900">
+              <a:defRPr sz="675">
                 <a:solidFill>
                   <a:srgbClr val="111111"/>
                 </a:solidFill>
@@ -3121,7 +3272,7 @@
           <a:p>
             <a:pPr lvl="0"/>
             <a:r>
-              <a:rPr lang="en-US" smtClean="0">
+              <a:rPr lang="en-US">
                 <a:solidFill>
                   <a:srgbClr val="111111"/>
                 </a:solidFill>
@@ -3146,15 +3297,19 @@
           <a:bodyPr/>
           <a:lstStyle/>
           <a:p>
-            <a:fld id="{5BCAD085-E8A6-8845-BD4E-CB4CCA059FC4}" type="datetimeFigureOut">
+            <a:fld id="{241EB5C9-1307-BA42-ABA2-0BC069CD8E7F}" type="datetimeFigureOut">
               <a:rPr lang="en-US" smtClean="0">
                 <a:solidFill>
                   <a:srgbClr val="111111"/>
                 </a:solidFill>
               </a:rPr>
-              <a:t>1/27/13</a:t>
+              <a:t>1/2/22</a:t>
             </a:fld>
-            <a:endParaRPr lang="en-US"/>
+            <a:endParaRPr lang="en-US">
+              <a:solidFill>
+                <a:srgbClr val="111111"/>
+              </a:solidFill>
+            </a:endParaRPr>
           </a:p>
         </p:txBody>
       </p:sp>
@@ -3173,7 +3328,11 @@
           <a:bodyPr/>
           <a:lstStyle/>
           <a:p>
-            <a:endParaRPr lang="en-US"/>
+            <a:endParaRPr lang="en-US">
+              <a:solidFill>
+                <a:srgbClr val="111111"/>
+              </a:solidFill>
+            </a:endParaRPr>
           </a:p>
         </p:txBody>
       </p:sp>
@@ -3192,7 +3351,7 @@
           <a:bodyPr/>
           <a:lstStyle/>
           <a:p>
-            <a:fld id="{C1FF6DA9-008F-8B48-92A6-B652298478BF}" type="slidenum">
+            <a:fld id="{C5EF2332-01BF-834F-8236-50238282D533}" type="slidenum">
               <a:rPr lang="en-US" smtClean="0">
                 <a:solidFill>
                   <a:srgbClr val="111111"/>
@@ -3200,14 +3359,18 @@
               </a:rPr>
               <a:t>‹#›</a:t>
             </a:fld>
-            <a:endParaRPr lang="en-US"/>
+            <a:endParaRPr lang="en-US">
+              <a:solidFill>
+                <a:srgbClr val="111111"/>
+              </a:solidFill>
+            </a:endParaRPr>
           </a:p>
         </p:txBody>
       </p:sp>
     </p:spTree>
     <p:extLst>
       <p:ext uri="{BB962C8B-B14F-4D97-AF65-F5344CB8AC3E}">
-        <p14:creationId xmlns:p14="http://schemas.microsoft.com/office/powerpoint/2010/main" val="3889236939"/>
+        <p14:creationId xmlns:p14="http://schemas.microsoft.com/office/powerpoint/2010/main" val="3566899855"/>
       </p:ext>
     </p:extLst>
   </p:cSld>
@@ -3221,12 +3384,9 @@
 <p:sldMaster xmlns:a="http://schemas.openxmlformats.org/drawingml/2006/main" xmlns:p="http://schemas.openxmlformats.org/presentationml/2006/main" xmlns:r="http://schemas.openxmlformats.org/officeDocument/2006/relationships">
   <p:cSld>
     <p:bg>
-      <p:bgPr>
-        <a:solidFill>
-          <a:srgbClr val="FFFFFF"/>
-        </a:solidFill>
-        <a:effectLst/>
-      </p:bgPr>
+      <p:bgRef idx="1001">
+        <a:schemeClr val="bg1"/>
+      </p:bgRef>
     </p:bg>
     <p:spTree>
       <p:nvGrpSpPr>
@@ -3254,8 +3414,8 @@
         </p:nvSpPr>
         <p:spPr>
           <a:xfrm>
-            <a:off x="457200" y="274638"/>
-            <a:ext cx="8229600" cy="1143000"/>
+            <a:off x="457200" y="205979"/>
+            <a:ext cx="8229600" cy="857250"/>
           </a:xfrm>
           <a:prstGeom prst="rect">
             <a:avLst/>
@@ -3268,14 +3428,13 @@
           <a:lstStyle/>
           <a:p>
             <a:r>
-              <a:rPr lang="en-US" smtClean="0">
+              <a:rPr lang="en-US">
                 <a:solidFill>
                   <a:srgbClr val="111111"/>
                 </a:solidFill>
               </a:rPr>
               <a:t>Click to edit Master title style</a:t>
             </a:r>
-            <a:endParaRPr lang="en-US"/>
           </a:p>
         </p:txBody>
       </p:sp>
@@ -3291,8 +3450,8 @@
         </p:nvSpPr>
         <p:spPr>
           <a:xfrm>
-            <a:off x="457200" y="1600200"/>
-            <a:ext cx="8229600" cy="4525963"/>
+            <a:off x="457200" y="1200151"/>
+            <a:ext cx="8229600" cy="3394472"/>
           </a:xfrm>
           <a:prstGeom prst="rect">
             <a:avLst/>
@@ -3306,7 +3465,7 @@
           <a:p>
             <a:pPr lvl="0"/>
             <a:r>
-              <a:rPr lang="en-US" smtClean="0">
+              <a:rPr lang="en-US">
                 <a:solidFill>
                   <a:srgbClr val="111111"/>
                 </a:solidFill>
@@ -3317,7 +3476,7 @@
           <a:p>
             <a:pPr lvl="1"/>
             <a:r>
-              <a:rPr lang="en-US" smtClean="0">
+              <a:rPr lang="en-US">
                 <a:solidFill>
                   <a:srgbClr val="111111"/>
                 </a:solidFill>
@@ -3328,7 +3487,7 @@
           <a:p>
             <a:pPr lvl="2"/>
             <a:r>
-              <a:rPr lang="en-US" smtClean="0">
+              <a:rPr lang="en-US">
                 <a:solidFill>
                   <a:srgbClr val="111111"/>
                 </a:solidFill>
@@ -3339,7 +3498,7 @@
           <a:p>
             <a:pPr lvl="3"/>
             <a:r>
-              <a:rPr lang="en-US" smtClean="0">
+              <a:rPr lang="en-US">
                 <a:solidFill>
                   <a:srgbClr val="111111"/>
                 </a:solidFill>
@@ -3350,14 +3509,13 @@
           <a:p>
             <a:pPr lvl="4"/>
             <a:r>
-              <a:rPr lang="en-US" smtClean="0">
+              <a:rPr lang="en-US">
                 <a:solidFill>
                   <a:srgbClr val="111111"/>
                 </a:solidFill>
               </a:rPr>
               <a:t>Fifth level</a:t>
             </a:r>
-            <a:endParaRPr lang="en-US"/>
           </a:p>
         </p:txBody>
       </p:sp>
@@ -3373,8 +3531,8 @@
         </p:nvSpPr>
         <p:spPr>
           <a:xfrm>
-            <a:off x="457200" y="6356350"/>
-            <a:ext cx="2133600" cy="365125"/>
+            <a:off x="457200" y="4767263"/>
+            <a:ext cx="2133600" cy="273844"/>
           </a:xfrm>
           <a:prstGeom prst="rect">
             <a:avLst/>
@@ -3384,7 +3542,7 @@
           <a:bodyPr anchor="ctr" bIns="45720" lIns="91440" rIns="91440" rtlCol="0" tIns="45720" vert="horz"/>
           <a:lstStyle>
             <a:lvl1pPr algn="l">
-              <a:defRPr sz="1200">
+              <a:defRPr sz="900">
                 <a:solidFill>
                   <a:srgbClr val="111111"/>
                 </a:solidFill>
@@ -3392,15 +3550,19 @@
             </a:lvl1pPr>
           </a:lstStyle>
           <a:p>
-            <a:fld id="{5BCAD085-E8A6-8845-BD4E-CB4CCA059FC4}" type="datetimeFigureOut">
+            <a:fld id="{241EB5C9-1307-BA42-ABA2-0BC069CD8E7F}" type="datetimeFigureOut">
               <a:rPr lang="en-US" smtClean="0">
                 <a:solidFill>
                   <a:srgbClr val="111111"/>
                 </a:solidFill>
               </a:rPr>
-              <a:t>1/27/13</a:t>
+              <a:t>1/2/22</a:t>
             </a:fld>
-            <a:endParaRPr lang="en-US"/>
+            <a:endParaRPr lang="en-US">
+              <a:solidFill>
+                <a:srgbClr val="111111"/>
+              </a:solidFill>
+            </a:endParaRPr>
           </a:p>
         </p:txBody>
       </p:sp>
@@ -3416,8 +3578,8 @@
         </p:nvSpPr>
         <p:spPr>
           <a:xfrm>
-            <a:off x="3124200" y="6356350"/>
-            <a:ext cx="2895600" cy="365125"/>
+            <a:off x="3124200" y="4767263"/>
+            <a:ext cx="2895600" cy="273844"/>
           </a:xfrm>
           <a:prstGeom prst="rect">
             <a:avLst/>
@@ -3427,7 +3589,7 @@
           <a:bodyPr anchor="ctr" bIns="45720" lIns="91440" rIns="91440" rtlCol="0" tIns="45720" vert="horz"/>
           <a:lstStyle>
             <a:lvl1pPr algn="ctr">
-              <a:defRPr sz="1200">
+              <a:defRPr sz="900">
                 <a:solidFill>
                   <a:srgbClr val="111111"/>
                 </a:solidFill>
@@ -3435,7 +3597,11 @@
             </a:lvl1pPr>
           </a:lstStyle>
           <a:p>
-            <a:endParaRPr lang="en-US"/>
+            <a:endParaRPr lang="en-US">
+              <a:solidFill>
+                <a:srgbClr val="111111"/>
+              </a:solidFill>
+            </a:endParaRPr>
           </a:p>
         </p:txBody>
       </p:sp>
@@ -3451,8 +3617,8 @@
         </p:nvSpPr>
         <p:spPr>
           <a:xfrm>
-            <a:off x="6553200" y="6356350"/>
-            <a:ext cx="2133600" cy="365125"/>
+            <a:off x="6553200" y="4767263"/>
+            <a:ext cx="2133600" cy="273844"/>
           </a:xfrm>
           <a:prstGeom prst="rect">
             <a:avLst/>
@@ -3462,7 +3628,7 @@
           <a:bodyPr anchor="ctr" bIns="45720" lIns="91440" rIns="91440" rtlCol="0" tIns="45720" vert="horz"/>
           <a:lstStyle>
             <a:lvl1pPr algn="r">
-              <a:defRPr sz="1200">
+              <a:defRPr sz="900">
                 <a:solidFill>
                   <a:srgbClr val="111111"/>
                 </a:solidFill>
@@ -3470,7 +3636,7 @@
             </a:lvl1pPr>
           </a:lstStyle>
           <a:p>
-            <a:fld id="{C1FF6DA9-008F-8B48-92A6-B652298478BF}" type="slidenum">
+            <a:fld id="{C5EF2332-01BF-834F-8236-50238282D533}" type="slidenum">
               <a:rPr lang="en-US" smtClean="0">
                 <a:solidFill>
                   <a:srgbClr val="111111"/>
@@ -3478,14 +3644,18 @@
               </a:rPr>
               <a:t>‹#›</a:t>
             </a:fld>
-            <a:endParaRPr lang="en-US"/>
+            <a:endParaRPr lang="en-US">
+              <a:solidFill>
+                <a:srgbClr val="111111"/>
+              </a:solidFill>
+            </a:endParaRPr>
           </a:p>
         </p:txBody>
       </p:sp>
     </p:spTree>
     <p:extLst>
       <p:ext uri="{BB962C8B-B14F-4D97-AF65-F5344CB8AC3E}">
-        <p14:creationId xmlns:p14="http://schemas.microsoft.com/office/powerpoint/2010/main" val="2209977519"/>
+        <p14:creationId xmlns:p14="http://schemas.microsoft.com/office/powerpoint/2010/main" val="3676200875"/>
       </p:ext>
     </p:extLst>
   </p:cSld>
@@ -3505,12 +3675,12 @@
   </p:sldLayoutIdLst>
   <p:txStyles>
     <p:titleStyle>
-      <a:lvl1pPr algn="ctr" defTabSz="457200" eaLnBrk="1" hangingPunct="1" latinLnBrk="0" rtl="0">
+      <a:lvl1pPr algn="ctr" defTabSz="342900" eaLnBrk="1" hangingPunct="1" latinLnBrk="0" rtl="0">
         <a:spcBef>
           <a:spcPct val="0"/>
         </a:spcBef>
         <a:buNone/>
-        <a:defRPr kern="1200" sz="4400">
+        <a:defRPr kern="1200" sz="3300">
           <a:latin typeface="Cambria"/>
           <a:ea typeface="+mj-ea"/>
           <a:cs typeface="+mj-cs"/>
@@ -3521,37 +3691,7 @@
       </a:lvl1pPr>
     </p:titleStyle>
     <p:bodyStyle>
-      <a:lvl1pPr algn="l" defTabSz="457200" eaLnBrk="1" hangingPunct="1" indent="-342900" latinLnBrk="0" marL="342900" rtl="0">
-        <a:spcBef>
-          <a:spcPct val="20000"/>
-        </a:spcBef>
-        <a:buFont typeface="Arial"/>
-        <a:buChar char="•"/>
-        <a:defRPr kern="1200" sz="3200">
-          <a:latin typeface="Cambria"/>
-          <a:ea typeface="+mn-ea"/>
-          <a:cs typeface="+mn-cs"/>
-          <a:solidFill>
-            <a:srgbClr val="111111"/>
-          </a:solidFill>
-        </a:defRPr>
-      </a:lvl1pPr>
-      <a:lvl2pPr algn="l" defTabSz="457200" eaLnBrk="1" hangingPunct="1" indent="-285750" latinLnBrk="0" marL="742950" rtl="0">
-        <a:spcBef>
-          <a:spcPct val="20000"/>
-        </a:spcBef>
-        <a:buFont typeface="Arial"/>
-        <a:buChar char="–"/>
-        <a:defRPr kern="1200" sz="2800">
-          <a:latin typeface="Cambria"/>
-          <a:ea typeface="+mn-ea"/>
-          <a:cs typeface="+mn-cs"/>
-          <a:solidFill>
-            <a:srgbClr val="111111"/>
-          </a:solidFill>
-        </a:defRPr>
-      </a:lvl2pPr>
-      <a:lvl3pPr algn="l" defTabSz="457200" eaLnBrk="1" hangingPunct="1" indent="-228600" latinLnBrk="0" marL="1143000" rtl="0">
+      <a:lvl1pPr algn="l" defTabSz="342900" eaLnBrk="1" hangingPunct="1" indent="-342900" latinLnBrk="0" marL="342900" rtl="0">
         <a:spcBef>
           <a:spcPct val="20000"/>
         </a:spcBef>
@@ -3565,14 +3705,44 @@
             <a:srgbClr val="111111"/>
           </a:solidFill>
         </a:defRPr>
-      </a:lvl3pPr>
-      <a:lvl4pPr algn="l" defTabSz="457200" eaLnBrk="1" hangingPunct="1" indent="-228600" latinLnBrk="0" marL="1600200" rtl="0">
+      </a:lvl1pPr>
+      <a:lvl2pPr algn="l" defTabSz="342900" eaLnBrk="1" hangingPunct="1" indent="-342900" latinLnBrk="0" marL="685800" rtl="0">
         <a:spcBef>
           <a:spcPct val="20000"/>
         </a:spcBef>
         <a:buFont typeface="Arial"/>
         <a:buChar char="–"/>
-        <a:defRPr kern="1200" sz="2000">
+        <a:defRPr kern="1200" sz="2100">
+          <a:latin typeface="Cambria"/>
+          <a:ea typeface="+mn-ea"/>
+          <a:cs typeface="+mn-cs"/>
+          <a:solidFill>
+            <a:srgbClr val="111111"/>
+          </a:solidFill>
+        </a:defRPr>
+      </a:lvl2pPr>
+      <a:lvl3pPr algn="l" defTabSz="342900" eaLnBrk="1" hangingPunct="1" indent="-342900" latinLnBrk="0" marL="1028700" rtl="0">
+        <a:spcBef>
+          <a:spcPct val="20000"/>
+        </a:spcBef>
+        <a:buFont typeface="Arial"/>
+        <a:buChar char="•"/>
+        <a:defRPr kern="1200" sz="1800">
+          <a:latin typeface="Cambria"/>
+          <a:ea typeface="+mn-ea"/>
+          <a:cs typeface="+mn-cs"/>
+          <a:solidFill>
+            <a:srgbClr val="111111"/>
+          </a:solidFill>
+        </a:defRPr>
+      </a:lvl3pPr>
+      <a:lvl4pPr algn="l" defTabSz="342900" eaLnBrk="1" hangingPunct="1" indent="-342900" latinLnBrk="0" marL="1371600" rtl="0">
+        <a:spcBef>
+          <a:spcPct val="20000"/>
+        </a:spcBef>
+        <a:buFont typeface="Arial"/>
+        <a:buChar char="–"/>
+        <a:defRPr kern="1200" sz="1500">
           <a:latin typeface="Cambria"/>
           <a:ea typeface="+mn-ea"/>
           <a:cs typeface="+mn-cs"/>
@@ -3581,13 +3751,13 @@
           </a:solidFill>
         </a:defRPr>
       </a:lvl4pPr>
-      <a:lvl5pPr algn="l" defTabSz="457200" eaLnBrk="1" hangingPunct="1" indent="-228600" latinLnBrk="0" marL="2057400" rtl="0">
+      <a:lvl5pPr algn="l" defTabSz="342900" eaLnBrk="1" hangingPunct="1" indent="-342900" latinLnBrk="0" marL="1714500" rtl="0">
         <a:spcBef>
           <a:spcPct val="20000"/>
         </a:spcBef>
         <a:buFont typeface="Arial"/>
         <a:buChar char="»"/>
-        <a:defRPr kern="1200" sz="2000">
+        <a:defRPr kern="1200" sz="1500">
           <a:latin typeface="Cambria"/>
           <a:ea typeface="+mn-ea"/>
           <a:cs typeface="+mn-cs"/>
@@ -3596,13 +3766,13 @@
           </a:solidFill>
         </a:defRPr>
       </a:lvl5pPr>
-      <a:lvl6pPr algn="l" defTabSz="457200" eaLnBrk="1" hangingPunct="1" indent="-228600" latinLnBrk="0" marL="2514600" rtl="0">
+      <a:lvl6pPr algn="l" defTabSz="342900" eaLnBrk="1" hangingPunct="1" indent="-342900" latinLnBrk="0" marL="2057400" rtl="0">
         <a:spcBef>
           <a:spcPct val="20000"/>
         </a:spcBef>
         <a:buFont typeface="Arial"/>
         <a:buChar char="•"/>
-        <a:defRPr kern="1200" sz="2000">
+        <a:defRPr kern="1200" sz="1500">
           <a:latin typeface="Cambria"/>
           <a:ea typeface="+mn-ea"/>
           <a:cs typeface="+mn-cs"/>
@@ -3611,13 +3781,13 @@
           </a:solidFill>
         </a:defRPr>
       </a:lvl6pPr>
-      <a:lvl7pPr algn="l" defTabSz="457200" eaLnBrk="1" hangingPunct="1" indent="-228600" latinLnBrk="0" marL="2971800" rtl="0">
+      <a:lvl7pPr algn="l" defTabSz="342900" eaLnBrk="1" hangingPunct="1" indent="-342900" latinLnBrk="0" marL="2400300" rtl="0">
         <a:spcBef>
           <a:spcPct val="20000"/>
         </a:spcBef>
         <a:buFont typeface="Arial"/>
         <a:buChar char="•"/>
-        <a:defRPr kern="1200" sz="2000">
+        <a:defRPr kern="1200" sz="1500">
           <a:latin typeface="Cambria"/>
           <a:ea typeface="+mn-ea"/>
           <a:cs typeface="+mn-cs"/>
@@ -3626,13 +3796,13 @@
           </a:solidFill>
         </a:defRPr>
       </a:lvl7pPr>
-      <a:lvl8pPr algn="l" defTabSz="457200" eaLnBrk="1" hangingPunct="1" indent="-228600" latinLnBrk="0" marL="3429000" rtl="0">
+      <a:lvl8pPr algn="l" defTabSz="342900" eaLnBrk="1" hangingPunct="1" indent="-342900" latinLnBrk="0" marL="2743200" rtl="0">
         <a:spcBef>
           <a:spcPct val="20000"/>
         </a:spcBef>
         <a:buFont typeface="Arial"/>
         <a:buChar char="•"/>
-        <a:defRPr kern="1200" sz="2000">
+        <a:defRPr kern="1200" sz="1500">
           <a:latin typeface="Cambria"/>
           <a:ea typeface="+mn-ea"/>
           <a:cs typeface="+mn-cs"/>
@@ -3641,13 +3811,13 @@
           </a:solidFill>
         </a:defRPr>
       </a:lvl8pPr>
-      <a:lvl9pPr algn="l" defTabSz="457200" eaLnBrk="1" hangingPunct="1" indent="-228600" latinLnBrk="0" marL="3886200" rtl="0">
+      <a:lvl9pPr algn="l" defTabSz="342900" eaLnBrk="1" hangingPunct="1" indent="-342900" latinLnBrk="0" marL="3086100" rtl="0">
         <a:spcBef>
           <a:spcPct val="20000"/>
         </a:spcBef>
         <a:buFont typeface="Arial"/>
         <a:buChar char="•"/>
-        <a:defRPr kern="1200" sz="2000">
+        <a:defRPr kern="1200" sz="1500">
           <a:latin typeface="Cambria"/>
           <a:ea typeface="+mn-ea"/>
           <a:cs typeface="+mn-cs"/>
@@ -3665,8 +3835,8 @@
           </a:solidFill>
         </a:defRPr>
       </a:defPPr>
-      <a:lvl1pPr algn="l" defTabSz="457200" eaLnBrk="1" hangingPunct="1" latinLnBrk="0" marL="0" rtl="0">
-        <a:defRPr kern="1200" sz="1800">
+      <a:lvl1pPr algn="l" defTabSz="342900" eaLnBrk="1" hangingPunct="1" latinLnBrk="0" marL="0" rtl="0">
+        <a:defRPr kern="1200" sz="1350">
           <a:latin typeface="Cambria"/>
           <a:ea typeface="+mn-ea"/>
           <a:cs typeface="+mn-cs"/>
@@ -3675,8 +3845,8 @@
           </a:solidFill>
         </a:defRPr>
       </a:lvl1pPr>
-      <a:lvl2pPr algn="l" defTabSz="457200" eaLnBrk="1" hangingPunct="1" latinLnBrk="0" marL="457200" rtl="0">
-        <a:defRPr kern="1200" sz="1800">
+      <a:lvl2pPr algn="l" defTabSz="342900" eaLnBrk="1" hangingPunct="1" latinLnBrk="0" marL="342900" rtl="0">
+        <a:defRPr kern="1200" sz="1350">
           <a:latin typeface="Cambria"/>
           <a:ea typeface="+mn-ea"/>
           <a:cs typeface="+mn-cs"/>
@@ -3685,8 +3855,8 @@
           </a:solidFill>
         </a:defRPr>
       </a:lvl2pPr>
-      <a:lvl3pPr algn="l" defTabSz="457200" eaLnBrk="1" hangingPunct="1" latinLnBrk="0" marL="914400" rtl="0">
-        <a:defRPr kern="1200" sz="1800">
+      <a:lvl3pPr algn="l" defTabSz="342900" eaLnBrk="1" hangingPunct="1" latinLnBrk="0" marL="685800" rtl="0">
+        <a:defRPr kern="1200" sz="1350">
           <a:latin typeface="Cambria"/>
           <a:ea typeface="+mn-ea"/>
           <a:cs typeface="+mn-cs"/>
@@ -3695,8 +3865,8 @@
           </a:solidFill>
         </a:defRPr>
       </a:lvl3pPr>
-      <a:lvl4pPr algn="l" defTabSz="457200" eaLnBrk="1" hangingPunct="1" latinLnBrk="0" marL="1371600" rtl="0">
-        <a:defRPr kern="1200" sz="1800">
+      <a:lvl4pPr algn="l" defTabSz="342900" eaLnBrk="1" hangingPunct="1" latinLnBrk="0" marL="1028700" rtl="0">
+        <a:defRPr kern="1200" sz="1350">
           <a:latin typeface="Cambria"/>
           <a:ea typeface="+mn-ea"/>
           <a:cs typeface="+mn-cs"/>
@@ -3705,8 +3875,8 @@
           </a:solidFill>
         </a:defRPr>
       </a:lvl4pPr>
-      <a:lvl5pPr algn="l" defTabSz="457200" eaLnBrk="1" hangingPunct="1" latinLnBrk="0" marL="1828800" rtl="0">
-        <a:defRPr kern="1200" sz="1800">
+      <a:lvl5pPr algn="l" defTabSz="342900" eaLnBrk="1" hangingPunct="1" latinLnBrk="0" marL="1371600" rtl="0">
+        <a:defRPr kern="1200" sz="1350">
           <a:latin typeface="Cambria"/>
           <a:ea typeface="+mn-ea"/>
           <a:cs typeface="+mn-cs"/>
@@ -3715,8 +3885,8 @@
           </a:solidFill>
         </a:defRPr>
       </a:lvl5pPr>
-      <a:lvl6pPr algn="l" defTabSz="457200" eaLnBrk="1" hangingPunct="1" latinLnBrk="0" marL="2286000" rtl="0">
-        <a:defRPr kern="1200" sz="1800">
+      <a:lvl6pPr algn="l" defTabSz="342900" eaLnBrk="1" hangingPunct="1" latinLnBrk="0" marL="1714500" rtl="0">
+        <a:defRPr kern="1200" sz="1350">
           <a:latin typeface="Cambria"/>
           <a:ea typeface="+mn-ea"/>
           <a:cs typeface="+mn-cs"/>
@@ -3725,8 +3895,8 @@
           </a:solidFill>
         </a:defRPr>
       </a:lvl6pPr>
-      <a:lvl7pPr algn="l" defTabSz="457200" eaLnBrk="1" hangingPunct="1" latinLnBrk="0" marL="2743200" rtl="0">
-        <a:defRPr kern="1200" sz="1800">
+      <a:lvl7pPr algn="l" defTabSz="342900" eaLnBrk="1" hangingPunct="1" latinLnBrk="0" marL="2057400" rtl="0">
+        <a:defRPr kern="1200" sz="1350">
           <a:latin typeface="Cambria"/>
           <a:ea typeface="+mn-ea"/>
           <a:cs typeface="+mn-cs"/>
@@ -3735,8 +3905,8 @@
           </a:solidFill>
         </a:defRPr>
       </a:lvl7pPr>
-      <a:lvl8pPr algn="l" defTabSz="457200" eaLnBrk="1" hangingPunct="1" latinLnBrk="0" marL="3200400" rtl="0">
-        <a:defRPr kern="1200" sz="1800">
+      <a:lvl8pPr algn="l" defTabSz="342900" eaLnBrk="1" hangingPunct="1" latinLnBrk="0" marL="2400300" rtl="0">
+        <a:defRPr kern="1200" sz="1350">
           <a:latin typeface="Cambria"/>
           <a:ea typeface="+mn-ea"/>
           <a:cs typeface="+mn-cs"/>
@@ -3745,8 +3915,8 @@
           </a:solidFill>
         </a:defRPr>
       </a:lvl8pPr>
-      <a:lvl9pPr algn="l" defTabSz="457200" eaLnBrk="1" hangingPunct="1" latinLnBrk="0" marL="3657600" rtl="0">
-        <a:defRPr kern="1200" sz="1800">
+      <a:lvl9pPr algn="l" defTabSz="342900" eaLnBrk="1" hangingPunct="1" latinLnBrk="0" marL="2743200" rtl="0">
+        <a:defRPr kern="1200" sz="1350">
           <a:latin typeface="Cambria"/>
           <a:ea typeface="+mn-ea"/>
           <a:cs typeface="+mn-cs"/>
@@ -3789,8 +3959,8 @@
         </p:nvSpPr>
         <p:spPr>
           <a:xfrm>
-            <a:off x="685800" y="2130425"/>
-            <a:ext cx="7772400" cy="1470025"/>
+            <a:off x="685800" y="1597819"/>
+            <a:ext cx="7772400" cy="1102519"/>
           </a:xfrm>
         </p:spPr>
         <p:txBody>
@@ -3819,8 +3989,8 @@
         </p:nvSpPr>
         <p:spPr>
           <a:xfrm>
-            <a:off x="1371600" y="3886200"/>
-            <a:ext cx="6400800" cy="1752600"/>
+            <a:off x="1371600" y="2914650"/>
+            <a:ext cx="6400800" cy="1314450"/>
           </a:xfrm>
         </p:spPr>
         <p:txBody>
@@ -11126,8 +11296,8 @@
         </p:nvSpPr>
         <p:spPr>
           <a:xfrm>
-            <a:off x="722313" y="4406900"/>
-            <a:ext cx="7772400" cy="1362075"/>
+            <a:off x="722313" y="3305176"/>
+            <a:ext cx="7772400" cy="1021556"/>
           </a:xfrm>
         </p:spPr>
         <p:txBody>
@@ -13010,8 +13180,8 @@
         </p:nvSpPr>
         <p:spPr>
           <a:xfrm>
-            <a:off x="722313" y="4406900"/>
-            <a:ext cx="7772400" cy="1362075"/>
+            <a:off x="722313" y="3305176"/>
+            <a:ext cx="7772400" cy="1021556"/>
           </a:xfrm>
         </p:spPr>
         <p:txBody>
@@ -13102,7 +13272,7 @@
             </a:r>
           </a:p>
           <a:p>
-            <a:pPr lvl="0" indent="-457200" marL="457200">
+            <a:pPr lvl="0" indent="-342900" marL="342900">
               <a:buAutoNum type="alphaLcPeriod"/>
             </a:pPr>
             <a:r>
@@ -13135,7 +13305,7 @@
             </a:r>
           </a:p>
           <a:p>
-            <a:pPr lvl="0" indent="-457200" marL="457200">
+            <a:pPr lvl="0" indent="-342900" marL="342900">
               <a:buAutoNum type="alphaLcPeriod"/>
             </a:pPr>
             <a:r>
@@ -13148,7 +13318,7 @@
             </a:r>
           </a:p>
           <a:p>
-            <a:pPr lvl="0" indent="-457200" marL="457200">
+            <a:pPr lvl="0" indent="-342900" marL="342900">
               <a:buAutoNum type="alphaLcPeriod"/>
             </a:pPr>
             <a:r>
@@ -13181,7 +13351,7 @@
             </a:r>
           </a:p>
           <a:p>
-            <a:pPr lvl="0" indent="-457200" marL="457200">
+            <a:pPr lvl="0" indent="-342900" marL="342900">
               <a:buAutoNum type="alphaLcPeriod"/>
             </a:pPr>
             <a:r>
@@ -13250,7 +13420,7 @@
             </a:r>
           </a:p>
           <a:p>
-            <a:pPr lvl="0" indent="-457200" marL="457200">
+            <a:pPr lvl="0" indent="-342900" marL="342900">
               <a:buAutoNum type="alphaLcPeriod"/>
             </a:pPr>
             <a:r>
@@ -13271,7 +13441,7 @@
             </a:r>
           </a:p>
           <a:p>
-            <a:pPr lvl="0" indent="-457200" marL="457200">
+            <a:pPr lvl="0" indent="-342900" marL="342900">
               <a:buAutoNum type="alphaLcPeriod"/>
             </a:pPr>
             <a:r>
@@ -13330,7 +13500,7 @@
             </a:r>
           </a:p>
           <a:p>
-            <a:pPr lvl="0" indent="-457200" marL="457200">
+            <a:pPr lvl="0" indent="-342900" marL="342900">
               <a:buAutoNum type="alphaLcPeriod"/>
             </a:pPr>
             <a:r>
@@ -13351,7 +13521,7 @@
             </a:r>
           </a:p>
           <a:p>
-            <a:pPr lvl="0" indent="-457200" marL="457200">
+            <a:pPr lvl="0" indent="-342900" marL="342900">
               <a:buAutoNum type="alphaLcPeriod"/>
             </a:pPr>
             <a:r>
@@ -13364,7 +13534,7 @@
             </a:r>
           </a:p>
           <a:p>
-            <a:pPr lvl="0" indent="-457200" marL="457200">
+            <a:pPr lvl="0" indent="-342900" marL="342900">
               <a:buAutoNum type="alphaLcPeriod"/>
             </a:pPr>
             <a:r>
@@ -13377,7 +13547,7 @@
             </a:r>
           </a:p>
           <a:p>
-            <a:pPr lvl="0" indent="-457200" marL="457200">
+            <a:pPr lvl="0" indent="-342900" marL="342900">
               <a:buAutoNum type="alphaLcPeriod"/>
             </a:pPr>
             <a:r>
@@ -13424,7 +13594,7 @@
             </a:r>
           </a:p>
           <a:p>
-            <a:pPr lvl="0" indent="-457200" marL="457200">
+            <a:pPr lvl="0" indent="-342900" marL="342900">
               <a:buAutoNum type="alphaLcPeriod"/>
             </a:pPr>
             <a:r>
@@ -13555,7 +13725,7 @@
             </a:r>
           </a:p>
           <a:p>
-            <a:pPr lvl="0" indent="-457200" marL="457200">
+            <a:pPr lvl="0" indent="-342900" marL="342900">
               <a:buAutoNum type="arabicPeriod"/>
             </a:pPr>
             <a:r>
@@ -13582,7 +13752,7 @@
             </a:r>
           </a:p>
           <a:p>
-            <a:pPr lvl="0" indent="-457200" marL="457200">
+            <a:pPr lvl="0" indent="-342900" marL="342900">
               <a:buAutoNum type="arabicPeriod"/>
             </a:pPr>
             <a:r>
@@ -13763,8 +13933,8 @@
         </p:nvSpPr>
         <p:spPr>
           <a:xfrm>
-            <a:off x="722313" y="4406900"/>
-            <a:ext cx="7772400" cy="1362075"/>
+            <a:off x="722313" y="3305176"/>
+            <a:ext cx="7772400" cy="1021556"/>
           </a:xfrm>
         </p:spPr>
         <p:txBody>
@@ -14120,7 +14290,7 @@
           <a:bodyPr/>
           <a:lstStyle/>
           <a:p>
-            <a:pPr lvl="0" indent="-457200" marL="457200">
+            <a:pPr lvl="0" indent="-342900" marL="342900">
               <a:buAutoNum type="arabicPeriod"/>
             </a:pPr>
             <a:r>
@@ -14403,8 +14573,8 @@
           </p:nvPr>
         </p:nvGraphicFramePr>
         <p:xfrm>
-          <a:off x="457200" y="1600200"/>
-          <a:ext cx="8229600" cy="4521200"/>
+          <a:off x="457200" y="1193800"/>
+          <a:ext cx="8229600" cy="3390900"/>
         </p:xfrm>
         <a:graphic>
           <a:graphicData uri="http://schemas.openxmlformats.org/drawingml/2006/table">
@@ -15010,8 +15180,8 @@
         </p:nvSpPr>
         <p:spPr>
           <a:xfrm>
-            <a:off x="722313" y="4406900"/>
-            <a:ext cx="7772400" cy="1362075"/>
+            <a:off x="722313" y="3305176"/>
+            <a:ext cx="7772400" cy="1021556"/>
           </a:xfrm>
         </p:spPr>
         <p:txBody>
